--- a/09_meetings/HUNGARY_Sales_Review_2026/ISZE_HUNGARY_Sales_Review_FY2027.pptx
+++ b/09_meetings/HUNGARY_Sales_Review_2026/ISZE_HUNGARY_Sales_Review_FY2027.pptx
@@ -23,6 +23,8 @@
     <p:sldId id="271" r:id="rId22"/>
     <p:sldId id="272" r:id="rId23"/>
     <p:sldId id="273" r:id="rId24"/>
+    <p:sldId id="275" r:id="rId26"/>
+    <p:sldId id="276" r:id="rId27"/>
     <p:sldId id="274" r:id="rId25"/>
   </p:sldIdLst>
   <p:sldSz cx="12188952" cy="6858000" type="screen4x3"/>
@@ -10682,6 +10684,1705 @@
                 <a:latin typeface="Calibri"/>
               </a:rPr>
               <a:t>Next steps</a:t>
+            </a:r>
+          </a:p>
+        </p:txBody>
+      </p:sp>
+    </p:spTree>
+  </p:cSld>
+  <p:clrMapOvr>
+    <a:masterClrMapping/>
+  </p:clrMapOvr>
+</p:sld>
+</file>
+
+<file path=ppt/slides/slide20.xml><?xml version="1.0" encoding="utf-8"?>
+<p:sld xmlns:a="http://schemas.openxmlformats.org/drawingml/2006/main" xmlns:p="http://schemas.openxmlformats.org/presentationml/2006/main" xmlns:r="http://schemas.openxmlformats.org/officeDocument/2006/relationships">
+  <p:cSld>
+    <p:bg>
+      <p:bgPr>
+        <a:solidFill>
+          <a:srgbClr val="FFFFFF"/>
+        </a:solidFill>
+        <a:effectLst/>
+      </p:bgPr>
+    </p:bg>
+    <p:spTree>
+      <p:nvGrpSpPr>
+        <p:cNvPr id="1" name=""/>
+        <p:cNvGrpSpPr/>
+        <p:nvPr/>
+      </p:nvGrpSpPr>
+      <p:grpSpPr/>
+      <p:pic>
+        <p:nvPicPr>
+          <p:cNvPr id="2" name="Picture 1" descr="image.png"/>
+          <p:cNvPicPr>
+            <a:picLocks noChangeAspect="1"/>
+          </p:cNvPicPr>
+          <p:nvPr/>
+        </p:nvPicPr>
+        <p:blipFill>
+          <a:blip r:embed="rId2"/>
+          <a:stretch>
+            <a:fillRect/>
+          </a:stretch>
+        </p:blipFill>
+        <p:spPr>
+          <a:xfrm>
+            <a:off x="256032" y="6263640"/>
+            <a:ext cx="1679787" cy="292608"/>
+          </a:xfrm>
+          <a:prstGeom prst="rect">
+            <a:avLst/>
+          </a:prstGeom>
+        </p:spPr>
+      </p:pic>
+      <p:sp>
+        <p:nvSpPr>
+          <p:cNvPr id="3" name="Rectangle 2"/>
+          <p:cNvSpPr/>
+          <p:nvPr/>
+        </p:nvSpPr>
+        <p:spPr>
+          <a:xfrm>
+            <a:off x="0" y="6766560"/>
+            <a:ext cx="12188952" cy="91440"/>
+          </a:xfrm>
+          <a:prstGeom prst="rect">
+            <a:avLst/>
+          </a:prstGeom>
+          <a:solidFill>
+            <a:srgbClr val="CC0E1E"/>
+          </a:solidFill>
+          <a:ln>
+            <a:noFill/>
+          </a:ln>
+        </p:spPr>
+        <p:style>
+          <a:lnRef idx="1">
+            <a:schemeClr val="accent1"/>
+          </a:lnRef>
+          <a:fillRef idx="3">
+            <a:schemeClr val="accent1"/>
+          </a:fillRef>
+          <a:effectRef idx="2">
+            <a:schemeClr val="accent1"/>
+          </a:effectRef>
+          <a:fontRef idx="minor">
+            <a:schemeClr val="lt1"/>
+          </a:fontRef>
+        </p:style>
+        <p:txBody>
+          <a:bodyPr rtlCol="0" anchor="ctr"/>
+          <a:lstStyle/>
+          <a:p>
+            <a:pPr algn="ctr"/>
+          </a:p>
+        </p:txBody>
+      </p:sp>
+      <p:sp>
+        <p:nvSpPr>
+          <p:cNvPr id="4" name="TextBox 3"/>
+          <p:cNvSpPr txBox="1"/>
+          <p:nvPr/>
+        </p:nvSpPr>
+        <p:spPr>
+          <a:xfrm>
+            <a:off x="292608" y="201168"/>
+            <a:ext cx="11430000" cy="274320"/>
+          </a:xfrm>
+          <a:prstGeom prst="rect">
+            <a:avLst/>
+          </a:prstGeom>
+          <a:noFill/>
+        </p:spPr>
+        <p:txBody>
+          <a:bodyPr wrap="square">
+            <a:spAutoFit/>
+          </a:bodyPr>
+          <a:lstStyle/>
+          <a:p>
+            <a:pPr algn="l"/>
+            <a:r>
+              <a:rPr sz="1100" b="1">
+                <a:solidFill>
+                  <a:srgbClr val="CC0E1E"/>
+                </a:solidFill>
+                <a:latin typeface="Calibri"/>
+              </a:rPr>
+              <a:t>DEEP DIVE — GPS HISTORY</a:t>
+            </a:r>
+          </a:p>
+        </p:txBody>
+      </p:sp>
+      <p:sp>
+        <p:nvSpPr>
+          <p:cNvPr id="5" name="TextBox 4"/>
+          <p:cNvSpPr txBox="1"/>
+          <p:nvPr/>
+        </p:nvSpPr>
+        <p:spPr>
+          <a:xfrm>
+            <a:off x="292608" y="475488"/>
+            <a:ext cx="11612880" cy="566928"/>
+          </a:xfrm>
+          <a:prstGeom prst="rect">
+            <a:avLst/>
+          </a:prstGeom>
+          <a:noFill/>
+        </p:spPr>
+        <p:txBody>
+          <a:bodyPr wrap="square">
+            <a:spAutoFit/>
+          </a:bodyPr>
+          <a:lstStyle/>
+          <a:p>
+            <a:pPr algn="l"/>
+            <a:r>
+              <a:rPr sz="2500" b="1">
+                <a:solidFill>
+                  <a:srgbClr val="1A1A1A"/>
+                </a:solidFill>
+                <a:latin typeface="Calibri"/>
+              </a:rPr>
+              <a:t>GPS since 2022: peaked at 42%, now easing back to 37%</a:t>
+            </a:r>
+          </a:p>
+        </p:txBody>
+      </p:sp>
+      <p:sp>
+        <p:nvSpPr>
+          <p:cNvPr id="6" name="Rectangle 5"/>
+          <p:cNvSpPr/>
+          <p:nvPr/>
+        </p:nvSpPr>
+        <p:spPr>
+          <a:xfrm>
+            <a:off x="292608" y="1005840"/>
+            <a:ext cx="11612880" cy="28000"/>
+          </a:xfrm>
+          <a:prstGeom prst="rect">
+            <a:avLst/>
+          </a:prstGeom>
+          <a:solidFill>
+            <a:srgbClr val="CC0E1E"/>
+          </a:solidFill>
+          <a:ln>
+            <a:noFill/>
+          </a:ln>
+        </p:spPr>
+        <p:style>
+          <a:lnRef idx="1">
+            <a:schemeClr val="accent1"/>
+          </a:lnRef>
+          <a:fillRef idx="3">
+            <a:schemeClr val="accent1"/>
+          </a:fillRef>
+          <a:effectRef idx="2">
+            <a:schemeClr val="accent1"/>
+          </a:effectRef>
+          <a:fontRef idx="minor">
+            <a:schemeClr val="lt1"/>
+          </a:fontRef>
+        </p:style>
+        <p:txBody>
+          <a:bodyPr rtlCol="0" anchor="ctr"/>
+          <a:lstStyle/>
+          <a:p>
+            <a:pPr algn="ctr"/>
+          </a:p>
+        </p:txBody>
+      </p:sp>
+      <p:sp>
+        <p:nvSpPr>
+          <p:cNvPr id="7" name="TextBox 6"/>
+          <p:cNvSpPr txBox="1"/>
+          <p:nvPr/>
+        </p:nvSpPr>
+        <p:spPr>
+          <a:xfrm>
+            <a:off x="11594592" y="6473952"/>
+            <a:ext cx="365760" cy="274320"/>
+          </a:xfrm>
+          <a:prstGeom prst="rect">
+            <a:avLst/>
+          </a:prstGeom>
+          <a:noFill/>
+        </p:spPr>
+        <p:txBody>
+          <a:bodyPr wrap="square">
+            <a:spAutoFit/>
+          </a:bodyPr>
+          <a:lstStyle/>
+          <a:p>
+            <a:pPr algn="r"/>
+            <a:r>
+              <a:rPr sz="1000" b="0">
+                <a:solidFill>
+                  <a:srgbClr val="5A5A5A"/>
+                </a:solidFill>
+                <a:latin typeface="Calibri"/>
+              </a:rPr>
+              <a:t>19</a:t>
+            </a:r>
+          </a:p>
+        </p:txBody>
+      </p:sp>
+      <p:pic>
+        <p:nvPicPr>
+          <p:cNvPr id="8" name="Picture 7" descr="gps_history.png"/>
+          <p:cNvPicPr>
+            <a:picLocks noChangeAspect="1"/>
+          </p:cNvPicPr>
+          <p:nvPr/>
+        </p:nvPicPr>
+        <p:blipFill>
+          <a:blip r:embed="rId3"/>
+          <a:stretch>
+            <a:fillRect/>
+          </a:stretch>
+        </p:blipFill>
+        <p:spPr>
+          <a:xfrm>
+            <a:off x="292608" y="2121722"/>
+            <a:ext cx="7178040" cy="3026036"/>
+          </a:xfrm>
+          <a:prstGeom prst="rect">
+            <a:avLst/>
+          </a:prstGeom>
+        </p:spPr>
+      </p:pic>
+      <p:sp>
+        <p:nvSpPr>
+          <p:cNvPr id="9" name="Rectangle 8"/>
+          <p:cNvSpPr/>
+          <p:nvPr/>
+        </p:nvSpPr>
+        <p:spPr>
+          <a:xfrm>
+            <a:off x="7726679" y="1188720"/>
+            <a:ext cx="22000" cy="4892040"/>
+          </a:xfrm>
+          <a:prstGeom prst="rect">
+            <a:avLst/>
+          </a:prstGeom>
+          <a:solidFill>
+            <a:srgbClr val="ECECEC"/>
+          </a:solidFill>
+          <a:ln>
+            <a:noFill/>
+          </a:ln>
+        </p:spPr>
+        <p:style>
+          <a:lnRef idx="1">
+            <a:schemeClr val="accent1"/>
+          </a:lnRef>
+          <a:fillRef idx="3">
+            <a:schemeClr val="accent1"/>
+          </a:fillRef>
+          <a:effectRef idx="2">
+            <a:schemeClr val="accent1"/>
+          </a:effectRef>
+          <a:fontRef idx="minor">
+            <a:schemeClr val="lt1"/>
+          </a:fontRef>
+        </p:style>
+        <p:txBody>
+          <a:bodyPr rtlCol="0" anchor="ctr"/>
+          <a:lstStyle/>
+          <a:p>
+            <a:pPr algn="ctr"/>
+          </a:p>
+        </p:txBody>
+      </p:sp>
+      <p:sp>
+        <p:nvSpPr>
+          <p:cNvPr id="10" name="TextBox 9"/>
+          <p:cNvSpPr txBox="1"/>
+          <p:nvPr/>
+        </p:nvSpPr>
+        <p:spPr>
+          <a:xfrm>
+            <a:off x="7927847" y="1234440"/>
+            <a:ext cx="3886200" cy="320040"/>
+          </a:xfrm>
+          <a:prstGeom prst="rect">
+            <a:avLst/>
+          </a:prstGeom>
+          <a:noFill/>
+        </p:spPr>
+        <p:txBody>
+          <a:bodyPr wrap="square">
+            <a:spAutoFit/>
+          </a:bodyPr>
+          <a:lstStyle/>
+          <a:p>
+            <a:pPr algn="l"/>
+            <a:r>
+              <a:rPr sz="1200" b="1">
+                <a:solidFill>
+                  <a:srgbClr val="CC0E1E"/>
+                </a:solidFill>
+                <a:latin typeface="Calibri"/>
+              </a:rPr>
+              <a:t>TAKEAWAYS</a:t>
+            </a:r>
+          </a:p>
+        </p:txBody>
+      </p:sp>
+      <p:sp>
+        <p:nvSpPr>
+          <p:cNvPr id="11" name="TextBox 10"/>
+          <p:cNvSpPr txBox="1"/>
+          <p:nvPr/>
+        </p:nvSpPr>
+        <p:spPr>
+          <a:xfrm>
+            <a:off x="7927847" y="1691640"/>
+            <a:ext cx="3794760" cy="4343400"/>
+          </a:xfrm>
+          <a:prstGeom prst="rect">
+            <a:avLst/>
+          </a:prstGeom>
+          <a:noFill/>
+        </p:spPr>
+        <p:txBody>
+          <a:bodyPr wrap="square">
+            <a:spAutoFit/>
+          </a:bodyPr>
+          <a:lstStyle/>
+          <a:p>
+            <a:pPr>
+              <a:lnSpc>
+                <a:spcPct val="125000"/>
+              </a:lnSpc>
+              <a:spcAft>
+                <a:spcPts val="1000"/>
+              </a:spcAft>
+            </a:pPr>
+            <a:r>
+              <a:rPr sz="1250" b="1">
+                <a:solidFill>
+                  <a:srgbClr val="CC0E1E"/>
+                </a:solidFill>
+                <a:latin typeface="Calibri"/>
+              </a:rPr>
+              <a:t>—  </a:t>
+            </a:r>
+            <a:r>
+              <a:rPr sz="1250">
+                <a:solidFill>
+                  <a:srgbClr val="1A1A1A"/>
+                </a:solidFill>
+                <a:latin typeface="Calibri"/>
+              </a:rPr>
+              <a:t>GPS rose from about 30% in 2022 to a peak of 41.9% in 2024, then eased back to 34.5% in 2025 and sits at 37.1% today (FY2026) — two years of erosion, not a straight climb.</a:t>
+            </a:r>
+          </a:p>
+          <a:p>
+            <a:pPr>
+              <a:lnSpc>
+                <a:spcPct val="125000"/>
+              </a:lnSpc>
+              <a:spcAft>
+                <a:spcPts val="1000"/>
+              </a:spcAft>
+            </a:pPr>
+            <a:r>
+              <a:rPr sz="1250" b="1">
+                <a:solidFill>
+                  <a:srgbClr val="CC0E1E"/>
+                </a:solidFill>
+                <a:latin typeface="Calibri"/>
+              </a:rPr>
+              <a:t>—  </a:t>
+            </a:r>
+            <a:r>
+              <a:rPr sz="1250">
+                <a:solidFill>
+                  <a:srgbClr val="1A1A1A"/>
+                </a:solidFill>
+                <a:latin typeface="Calibri"/>
+              </a:rPr>
+              <a:t>Genuine parts have held 82-88% of billing every year since 2020 (BVP 12-18%) — a stable mix, so it isn't what moved GPS.</a:t>
+            </a:r>
+          </a:p>
+          <a:p>
+            <a:pPr>
+              <a:lnSpc>
+                <a:spcPct val="125000"/>
+              </a:lnSpc>
+              <a:spcAft>
+                <a:spcPts val="1000"/>
+              </a:spcAft>
+            </a:pPr>
+            <a:r>
+              <a:rPr sz="1250" b="1">
+                <a:solidFill>
+                  <a:srgbClr val="CC0E1E"/>
+                </a:solidFill>
+                <a:latin typeface="Calibri"/>
+              </a:rPr>
+              <a:t>—  </a:t>
+            </a:r>
+            <a:r>
+              <a:rPr sz="1250">
+                <a:solidFill>
+                  <a:srgbClr val="1A1A1A"/>
+                </a:solidFill>
+                <a:latin typeface="Calibri"/>
+              </a:rPr>
+              <a:t>2022 doesn't reconcile with the previously computed series (EUR 261K vs EUR 186K net) — treat 2022 as directional; 2023-2025 corroborate closely.</a:t>
+            </a:r>
+          </a:p>
+          <a:p>
+            <a:pPr>
+              <a:lnSpc>
+                <a:spcPct val="125000"/>
+              </a:lnSpc>
+              <a:spcAft>
+                <a:spcPts val="1000"/>
+              </a:spcAft>
+            </a:pPr>
+            <a:r>
+              <a:rPr sz="1250" b="1">
+                <a:solidFill>
+                  <a:srgbClr val="CC0E1E"/>
+                </a:solidFill>
+                <a:latin typeface="Calibri"/>
+              </a:rPr>
+              <a:t>—  </a:t>
+            </a:r>
+            <a:r>
+              <a:rPr sz="1250">
+                <a:solidFill>
+                  <a:srgbClr val="1A1A1A"/>
+                </a:solidFill>
+                <a:latin typeface="Calibri"/>
+              </a:rPr>
+              <a:t>The FY2027 base is disputed: corrected-survival shows the parc shrinking to 3,645 (-2.4%); UIO V19 shows it growing to 3,992 (+6.9%). Worth agreeing which one we plan against.</a:t>
+            </a:r>
+          </a:p>
+        </p:txBody>
+      </p:sp>
+    </p:spTree>
+  </p:cSld>
+  <p:clrMapOvr>
+    <a:masterClrMapping/>
+  </p:clrMapOvr>
+</p:sld>
+</file>
+
+<file path=ppt/slides/slide21.xml><?xml version="1.0" encoding="utf-8"?>
+<p:sld xmlns:a="http://schemas.openxmlformats.org/drawingml/2006/main" xmlns:p="http://schemas.openxmlformats.org/presentationml/2006/main" xmlns:r="http://schemas.openxmlformats.org/officeDocument/2006/relationships">
+  <p:cSld>
+    <p:bg>
+      <p:bgPr>
+        <a:solidFill>
+          <a:srgbClr val="FFFFFF"/>
+        </a:solidFill>
+        <a:effectLst/>
+      </p:bgPr>
+    </p:bg>
+    <p:spTree>
+      <p:nvGrpSpPr>
+        <p:cNvPr id="1" name=""/>
+        <p:cNvGrpSpPr/>
+        <p:nvPr/>
+      </p:nvGrpSpPr>
+      <p:grpSpPr/>
+      <p:pic>
+        <p:nvPicPr>
+          <p:cNvPr id="2" name="Picture 1" descr="image.png"/>
+          <p:cNvPicPr>
+            <a:picLocks noChangeAspect="1"/>
+          </p:cNvPicPr>
+          <p:nvPr/>
+        </p:nvPicPr>
+        <p:blipFill>
+          <a:blip r:embed="rId2"/>
+          <a:stretch>
+            <a:fillRect/>
+          </a:stretch>
+        </p:blipFill>
+        <p:spPr>
+          <a:xfrm>
+            <a:off x="256032" y="6263640"/>
+            <a:ext cx="1679787" cy="292608"/>
+          </a:xfrm>
+          <a:prstGeom prst="rect">
+            <a:avLst/>
+          </a:prstGeom>
+        </p:spPr>
+      </p:pic>
+      <p:sp>
+        <p:nvSpPr>
+          <p:cNvPr id="3" name="Rectangle 2"/>
+          <p:cNvSpPr/>
+          <p:nvPr/>
+        </p:nvSpPr>
+        <p:spPr>
+          <a:xfrm>
+            <a:off x="0" y="6766560"/>
+            <a:ext cx="12188952" cy="91440"/>
+          </a:xfrm>
+          <a:prstGeom prst="rect">
+            <a:avLst/>
+          </a:prstGeom>
+          <a:solidFill>
+            <a:srgbClr val="CC0E1E"/>
+          </a:solidFill>
+          <a:ln>
+            <a:noFill/>
+          </a:ln>
+        </p:spPr>
+        <p:style>
+          <a:lnRef idx="1">
+            <a:schemeClr val="accent1"/>
+          </a:lnRef>
+          <a:fillRef idx="3">
+            <a:schemeClr val="accent1"/>
+          </a:fillRef>
+          <a:effectRef idx="2">
+            <a:schemeClr val="accent1"/>
+          </a:effectRef>
+          <a:fontRef idx="minor">
+            <a:schemeClr val="lt1"/>
+          </a:fontRef>
+        </p:style>
+        <p:txBody>
+          <a:bodyPr rtlCol="0" anchor="ctr"/>
+          <a:lstStyle/>
+          <a:p>
+            <a:pPr algn="ctr"/>
+          </a:p>
+        </p:txBody>
+      </p:sp>
+      <p:sp>
+        <p:nvSpPr>
+          <p:cNvPr id="4" name="TextBox 3"/>
+          <p:cNvSpPr txBox="1"/>
+          <p:nvPr/>
+        </p:nvSpPr>
+        <p:spPr>
+          <a:xfrm>
+            <a:off x="292608" y="201168"/>
+            <a:ext cx="11430000" cy="274320"/>
+          </a:xfrm>
+          <a:prstGeom prst="rect">
+            <a:avLst/>
+          </a:prstGeom>
+          <a:noFill/>
+        </p:spPr>
+        <p:txBody>
+          <a:bodyPr wrap="square">
+            <a:spAutoFit/>
+          </a:bodyPr>
+          <a:lstStyle/>
+          <a:p>
+            <a:pPr algn="l"/>
+            <a:r>
+              <a:rPr sz="1100" b="1">
+                <a:solidFill>
+                  <a:srgbClr val="CC0E1E"/>
+                </a:solidFill>
+                <a:latin typeface="Calibri"/>
+              </a:rPr>
+              <a:t>DEEP DIVE — COMPETITIVE CAPTURE</a:t>
+            </a:r>
+          </a:p>
+        </p:txBody>
+      </p:sp>
+      <p:sp>
+        <p:nvSpPr>
+          <p:cNvPr id="5" name="TextBox 4"/>
+          <p:cNvSpPr txBox="1"/>
+          <p:nvPr/>
+        </p:nvSpPr>
+        <p:spPr>
+          <a:xfrm>
+            <a:off x="292608" y="475488"/>
+            <a:ext cx="11612880" cy="566928"/>
+          </a:xfrm>
+          <a:prstGeom prst="rect">
+            <a:avLst/>
+          </a:prstGeom>
+          <a:noFill/>
+        </p:spPr>
+        <p:txBody>
+          <a:bodyPr wrap="square">
+            <a:spAutoFit/>
+          </a:bodyPr>
+          <a:lstStyle/>
+          <a:p>
+            <a:pPr algn="l"/>
+            <a:r>
+              <a:rPr sz="2500" b="1">
+                <a:solidFill>
+                  <a:srgbClr val="1A1A1A"/>
+                </a:solidFill>
+                <a:latin typeface="Calibri"/>
+              </a:rPr>
+              <a:t>Where the gap is: competitive parts leaking to the aftermarket</a:t>
+            </a:r>
+          </a:p>
+        </p:txBody>
+      </p:sp>
+      <p:sp>
+        <p:nvSpPr>
+          <p:cNvPr id="6" name="Rectangle 5"/>
+          <p:cNvSpPr/>
+          <p:nvPr/>
+        </p:nvSpPr>
+        <p:spPr>
+          <a:xfrm>
+            <a:off x="292608" y="1005840"/>
+            <a:ext cx="11612880" cy="28000"/>
+          </a:xfrm>
+          <a:prstGeom prst="rect">
+            <a:avLst/>
+          </a:prstGeom>
+          <a:solidFill>
+            <a:srgbClr val="CC0E1E"/>
+          </a:solidFill>
+          <a:ln>
+            <a:noFill/>
+          </a:ln>
+        </p:spPr>
+        <p:style>
+          <a:lnRef idx="1">
+            <a:schemeClr val="accent1"/>
+          </a:lnRef>
+          <a:fillRef idx="3">
+            <a:schemeClr val="accent1"/>
+          </a:fillRef>
+          <a:effectRef idx="2">
+            <a:schemeClr val="accent1"/>
+          </a:effectRef>
+          <a:fontRef idx="minor">
+            <a:schemeClr val="lt1"/>
+          </a:fontRef>
+        </p:style>
+        <p:txBody>
+          <a:bodyPr rtlCol="0" anchor="ctr"/>
+          <a:lstStyle/>
+          <a:p>
+            <a:pPr algn="ctr"/>
+          </a:p>
+        </p:txBody>
+      </p:sp>
+      <p:sp>
+        <p:nvSpPr>
+          <p:cNvPr id="7" name="TextBox 6"/>
+          <p:cNvSpPr txBox="1"/>
+          <p:nvPr/>
+        </p:nvSpPr>
+        <p:spPr>
+          <a:xfrm>
+            <a:off x="11594592" y="6473952"/>
+            <a:ext cx="365760" cy="274320"/>
+          </a:xfrm>
+          <a:prstGeom prst="rect">
+            <a:avLst/>
+          </a:prstGeom>
+          <a:noFill/>
+        </p:spPr>
+        <p:txBody>
+          <a:bodyPr wrap="square">
+            <a:spAutoFit/>
+          </a:bodyPr>
+          <a:lstStyle/>
+          <a:p>
+            <a:pPr algn="r"/>
+            <a:r>
+              <a:rPr sz="1000" b="0">
+                <a:solidFill>
+                  <a:srgbClr val="5A5A5A"/>
+                </a:solidFill>
+                <a:latin typeface="Calibri"/>
+              </a:rPr>
+              <a:t>20</a:t>
+            </a:r>
+          </a:p>
+        </p:txBody>
+      </p:sp>
+      <p:graphicFrame>
+        <p:nvGraphicFramePr>
+          <p:cNvPr id="8" name="Table 7"/>
+          <p:cNvGraphicFramePr>
+            <a:graphicFrameLocks noGrp="1"/>
+          </p:cNvGraphicFramePr>
+          <p:nvPr/>
+        </p:nvGraphicFramePr>
+        <p:xfrm>
+          <a:off x="292608" y="1097280"/>
+          <a:ext cx="11612880" cy="1783080"/>
+        </p:xfrm>
+        <a:graphic>
+          <a:graphicData uri="http://schemas.openxmlformats.org/drawingml/2006/table">
+            <a:tbl>
+              <a:tblPr firstRow="1" bandRow="1">
+                <a:tableStyleId>{5C22544A-7EE6-4342-B048-85BDC9FD1C3A}</a:tableStyleId>
+              </a:tblPr>
+              <a:tblGrid>
+                <a:gridCol w="3200400"/>
+                <a:gridCol w="2103120"/>
+                <a:gridCol w="2103120"/>
+                <a:gridCol w="2103120"/>
+                <a:gridCol w="2103120"/>
+              </a:tblGrid>
+              <a:tr h="297180">
+                <a:tc>
+                  <a:txBody>
+                    <a:bodyPr/>
+                    <a:lstStyle/>
+                    <a:p>
+                      <a:pPr algn="l"/>
+                      <a:r>
+                        <a:rPr sz="1200" b="1">
+                          <a:solidFill>
+                            <a:srgbClr val="FFFFFF"/>
+                          </a:solidFill>
+                          <a:latin typeface="Calibri"/>
+                        </a:rPr>
+                        <a:t>Category</a:t>
+                      </a:r>
+                    </a:p>
+                  </a:txBody>
+                  <a:tcPr anchor="ctr" marL="73152" marR="73152">
+                    <a:solidFill>
+                      <a:srgbClr val="CC0E1E"/>
+                    </a:solidFill>
+                  </a:tcPr>
+                </a:tc>
+                <a:tc>
+                  <a:txBody>
+                    <a:bodyPr/>
+                    <a:lstStyle/>
+                    <a:p>
+                      <a:pPr algn="r"/>
+                      <a:r>
+                        <a:rPr sz="1200" b="1">
+                          <a:solidFill>
+                            <a:srgbClr val="FFFFFF"/>
+                          </a:solidFill>
+                          <a:latin typeface="Calibri"/>
+                        </a:rPr>
+                        <a:t>2023</a:t>
+                      </a:r>
+                    </a:p>
+                  </a:txBody>
+                  <a:tcPr anchor="ctr" marL="73152" marR="73152">
+                    <a:solidFill>
+                      <a:srgbClr val="CC0E1E"/>
+                    </a:solidFill>
+                  </a:tcPr>
+                </a:tc>
+                <a:tc>
+                  <a:txBody>
+                    <a:bodyPr/>
+                    <a:lstStyle/>
+                    <a:p>
+                      <a:pPr algn="r"/>
+                      <a:r>
+                        <a:rPr sz="1200" b="1">
+                          <a:solidFill>
+                            <a:srgbClr val="FFFFFF"/>
+                          </a:solidFill>
+                          <a:latin typeface="Calibri"/>
+                        </a:rPr>
+                        <a:t>2024</a:t>
+                      </a:r>
+                    </a:p>
+                  </a:txBody>
+                  <a:tcPr anchor="ctr" marL="73152" marR="73152">
+                    <a:solidFill>
+                      <a:srgbClr val="CC0E1E"/>
+                    </a:solidFill>
+                  </a:tcPr>
+                </a:tc>
+                <a:tc>
+                  <a:txBody>
+                    <a:bodyPr/>
+                    <a:lstStyle/>
+                    <a:p>
+                      <a:pPr algn="r"/>
+                      <a:r>
+                        <a:rPr sz="1200" b="1">
+                          <a:solidFill>
+                            <a:srgbClr val="FFFFFF"/>
+                          </a:solidFill>
+                          <a:latin typeface="Calibri"/>
+                        </a:rPr>
+                        <a:t>2025</a:t>
+                      </a:r>
+                    </a:p>
+                  </a:txBody>
+                  <a:tcPr anchor="ctr" marL="73152" marR="73152">
+                    <a:solidFill>
+                      <a:srgbClr val="CC0E1E"/>
+                    </a:solidFill>
+                  </a:tcPr>
+                </a:tc>
+                <a:tc>
+                  <a:txBody>
+                    <a:bodyPr/>
+                    <a:lstStyle/>
+                    <a:p>
+                      <a:pPr algn="r"/>
+                      <a:r>
+                        <a:rPr sz="1200" b="1">
+                          <a:solidFill>
+                            <a:srgbClr val="FFFFFF"/>
+                          </a:solidFill>
+                          <a:latin typeface="Calibri"/>
+                        </a:rPr>
+                        <a:t>Network (2025)</a:t>
+                      </a:r>
+                    </a:p>
+                  </a:txBody>
+                  <a:tcPr anchor="ctr" marL="73152" marR="73152">
+                    <a:solidFill>
+                      <a:srgbClr val="CC0E1E"/>
+                    </a:solidFill>
+                  </a:tcPr>
+                </a:tc>
+              </a:tr>
+              <a:tr h="297180">
+                <a:tc>
+                  <a:txBody>
+                    <a:bodyPr/>
+                    <a:lstStyle/>
+                    <a:p>
+                      <a:pPr algn="l"/>
+                      <a:r>
+                        <a:rPr sz="1200" b="0">
+                          <a:solidFill>
+                            <a:srgbClr val="1A1A1A"/>
+                          </a:solidFill>
+                          <a:latin typeface="Calibri"/>
+                        </a:rPr>
+                        <a:t>Oil filter</a:t>
+                      </a:r>
+                    </a:p>
+                  </a:txBody>
+                  <a:tcPr anchor="ctr" marL="73152" marR="73152">
+                    <a:solidFill>
+                      <a:srgbClr val="FFFFFF"/>
+                    </a:solidFill>
+                  </a:tcPr>
+                </a:tc>
+                <a:tc>
+                  <a:txBody>
+                    <a:bodyPr/>
+                    <a:lstStyle/>
+                    <a:p>
+                      <a:pPr algn="r"/>
+                      <a:r>
+                        <a:rPr sz="1200" b="0">
+                          <a:solidFill>
+                            <a:srgbClr val="1A1A1A"/>
+                          </a:solidFill>
+                          <a:latin typeface="Calibri"/>
+                        </a:rPr>
+                        <a:t>44.6%</a:t>
+                      </a:r>
+                    </a:p>
+                  </a:txBody>
+                  <a:tcPr anchor="ctr" marL="73152" marR="73152">
+                    <a:solidFill>
+                      <a:srgbClr val="FFFFFF"/>
+                    </a:solidFill>
+                  </a:tcPr>
+                </a:tc>
+                <a:tc>
+                  <a:txBody>
+                    <a:bodyPr/>
+                    <a:lstStyle/>
+                    <a:p>
+                      <a:pPr algn="r"/>
+                      <a:r>
+                        <a:rPr sz="1200" b="0">
+                          <a:solidFill>
+                            <a:srgbClr val="1A1A1A"/>
+                          </a:solidFill>
+                          <a:latin typeface="Calibri"/>
+                        </a:rPr>
+                        <a:t>46.3%</a:t>
+                      </a:r>
+                    </a:p>
+                  </a:txBody>
+                  <a:tcPr anchor="ctr" marL="73152" marR="73152">
+                    <a:solidFill>
+                      <a:srgbClr val="FFFFFF"/>
+                    </a:solidFill>
+                  </a:tcPr>
+                </a:tc>
+                <a:tc>
+                  <a:txBody>
+                    <a:bodyPr/>
+                    <a:lstStyle/>
+                    <a:p>
+                      <a:pPr algn="r"/>
+                      <a:r>
+                        <a:rPr sz="1200" b="0">
+                          <a:solidFill>
+                            <a:srgbClr val="1A1A1A"/>
+                          </a:solidFill>
+                          <a:latin typeface="Calibri"/>
+                        </a:rPr>
+                        <a:t>45.0%</a:t>
+                      </a:r>
+                    </a:p>
+                  </a:txBody>
+                  <a:tcPr anchor="ctr" marL="73152" marR="73152">
+                    <a:solidFill>
+                      <a:srgbClr val="FFFFFF"/>
+                    </a:solidFill>
+                  </a:tcPr>
+                </a:tc>
+                <a:tc>
+                  <a:txBody>
+                    <a:bodyPr/>
+                    <a:lstStyle/>
+                    <a:p>
+                      <a:pPr algn="r"/>
+                      <a:r>
+                        <a:rPr sz="1200" b="0">
+                          <a:solidFill>
+                            <a:srgbClr val="1A1A1A"/>
+                          </a:solidFill>
+                          <a:latin typeface="Calibri"/>
+                        </a:rPr>
+                        <a:t>60.9%</a:t>
+                      </a:r>
+                    </a:p>
+                  </a:txBody>
+                  <a:tcPr anchor="ctr" marL="73152" marR="73152">
+                    <a:solidFill>
+                      <a:srgbClr val="FFFFFF"/>
+                    </a:solidFill>
+                  </a:tcPr>
+                </a:tc>
+              </a:tr>
+              <a:tr h="297180">
+                <a:tc>
+                  <a:txBody>
+                    <a:bodyPr/>
+                    <a:lstStyle/>
+                    <a:p>
+                      <a:pPr algn="l"/>
+                      <a:r>
+                        <a:rPr sz="1200" b="0">
+                          <a:solidFill>
+                            <a:srgbClr val="1A1A1A"/>
+                          </a:solidFill>
+                          <a:latin typeface="Calibri"/>
+                        </a:rPr>
+                        <a:t>Fuel filter</a:t>
+                      </a:r>
+                    </a:p>
+                  </a:txBody>
+                  <a:tcPr anchor="ctr" marL="73152" marR="73152">
+                    <a:solidFill>
+                      <a:srgbClr val="ECECEC"/>
+                    </a:solidFill>
+                  </a:tcPr>
+                </a:tc>
+                <a:tc>
+                  <a:txBody>
+                    <a:bodyPr/>
+                    <a:lstStyle/>
+                    <a:p>
+                      <a:pPr algn="r"/>
+                      <a:r>
+                        <a:rPr sz="1200" b="0">
+                          <a:solidFill>
+                            <a:srgbClr val="1A1A1A"/>
+                          </a:solidFill>
+                          <a:latin typeface="Calibri"/>
+                        </a:rPr>
+                        <a:t>12.4%</a:t>
+                      </a:r>
+                    </a:p>
+                  </a:txBody>
+                  <a:tcPr anchor="ctr" marL="73152" marR="73152">
+                    <a:solidFill>
+                      <a:srgbClr val="ECECEC"/>
+                    </a:solidFill>
+                  </a:tcPr>
+                </a:tc>
+                <a:tc>
+                  <a:txBody>
+                    <a:bodyPr/>
+                    <a:lstStyle/>
+                    <a:p>
+                      <a:pPr algn="r"/>
+                      <a:r>
+                        <a:rPr sz="1200" b="0">
+                          <a:solidFill>
+                            <a:srgbClr val="1A1A1A"/>
+                          </a:solidFill>
+                          <a:latin typeface="Calibri"/>
+                        </a:rPr>
+                        <a:t>12.7%</a:t>
+                      </a:r>
+                    </a:p>
+                  </a:txBody>
+                  <a:tcPr anchor="ctr" marL="73152" marR="73152">
+                    <a:solidFill>
+                      <a:srgbClr val="ECECEC"/>
+                    </a:solidFill>
+                  </a:tcPr>
+                </a:tc>
+                <a:tc>
+                  <a:txBody>
+                    <a:bodyPr/>
+                    <a:lstStyle/>
+                    <a:p>
+                      <a:pPr algn="r"/>
+                      <a:r>
+                        <a:rPr sz="1200" b="0">
+                          <a:solidFill>
+                            <a:srgbClr val="1A1A1A"/>
+                          </a:solidFill>
+                          <a:latin typeface="Calibri"/>
+                        </a:rPr>
+                        <a:t>18.8%</a:t>
+                      </a:r>
+                    </a:p>
+                  </a:txBody>
+                  <a:tcPr anchor="ctr" marL="73152" marR="73152">
+                    <a:solidFill>
+                      <a:srgbClr val="ECECEC"/>
+                    </a:solidFill>
+                  </a:tcPr>
+                </a:tc>
+                <a:tc>
+                  <a:txBody>
+                    <a:bodyPr/>
+                    <a:lstStyle/>
+                    <a:p>
+                      <a:pPr algn="r"/>
+                      <a:r>
+                        <a:rPr sz="1200" b="0">
+                          <a:solidFill>
+                            <a:srgbClr val="1A1A1A"/>
+                          </a:solidFill>
+                          <a:latin typeface="Calibri"/>
+                        </a:rPr>
+                        <a:t>47.3%</a:t>
+                      </a:r>
+                    </a:p>
+                  </a:txBody>
+                  <a:tcPr anchor="ctr" marL="73152" marR="73152">
+                    <a:solidFill>
+                      <a:srgbClr val="ECECEC"/>
+                    </a:solidFill>
+                  </a:tcPr>
+                </a:tc>
+              </a:tr>
+              <a:tr h="297180">
+                <a:tc>
+                  <a:txBody>
+                    <a:bodyPr/>
+                    <a:lstStyle/>
+                    <a:p>
+                      <a:pPr algn="l"/>
+                      <a:r>
+                        <a:rPr sz="1200" b="0">
+                          <a:solidFill>
+                            <a:srgbClr val="1A1A1A"/>
+                          </a:solidFill>
+                          <a:latin typeface="Calibri"/>
+                        </a:rPr>
+                        <a:t>Air filter</a:t>
+                      </a:r>
+                    </a:p>
+                  </a:txBody>
+                  <a:tcPr anchor="ctr" marL="73152" marR="73152">
+                    <a:solidFill>
+                      <a:srgbClr val="FFFFFF"/>
+                    </a:solidFill>
+                  </a:tcPr>
+                </a:tc>
+                <a:tc>
+                  <a:txBody>
+                    <a:bodyPr/>
+                    <a:lstStyle/>
+                    <a:p>
+                      <a:pPr algn="r"/>
+                      <a:r>
+                        <a:rPr sz="1200" b="0">
+                          <a:solidFill>
+                            <a:srgbClr val="1A1A1A"/>
+                          </a:solidFill>
+                          <a:latin typeface="Calibri"/>
+                        </a:rPr>
+                        <a:t>42.4%</a:t>
+                      </a:r>
+                    </a:p>
+                  </a:txBody>
+                  <a:tcPr anchor="ctr" marL="73152" marR="73152">
+                    <a:solidFill>
+                      <a:srgbClr val="FFFFFF"/>
+                    </a:solidFill>
+                  </a:tcPr>
+                </a:tc>
+                <a:tc>
+                  <a:txBody>
+                    <a:bodyPr/>
+                    <a:lstStyle/>
+                    <a:p>
+                      <a:pPr algn="r"/>
+                      <a:r>
+                        <a:rPr sz="1200" b="0">
+                          <a:solidFill>
+                            <a:srgbClr val="1A1A1A"/>
+                          </a:solidFill>
+                          <a:latin typeface="Calibri"/>
+                        </a:rPr>
+                        <a:t>40.0%</a:t>
+                      </a:r>
+                    </a:p>
+                  </a:txBody>
+                  <a:tcPr anchor="ctr" marL="73152" marR="73152">
+                    <a:solidFill>
+                      <a:srgbClr val="FFFFFF"/>
+                    </a:solidFill>
+                  </a:tcPr>
+                </a:tc>
+                <a:tc>
+                  <a:txBody>
+                    <a:bodyPr/>
+                    <a:lstStyle/>
+                    <a:p>
+                      <a:pPr algn="r"/>
+                      <a:r>
+                        <a:rPr sz="1200" b="0">
+                          <a:solidFill>
+                            <a:srgbClr val="1A1A1A"/>
+                          </a:solidFill>
+                          <a:latin typeface="Calibri"/>
+                        </a:rPr>
+                        <a:t>45.9%</a:t>
+                      </a:r>
+                    </a:p>
+                  </a:txBody>
+                  <a:tcPr anchor="ctr" marL="73152" marR="73152">
+                    <a:solidFill>
+                      <a:srgbClr val="FFFFFF"/>
+                    </a:solidFill>
+                  </a:tcPr>
+                </a:tc>
+                <a:tc>
+                  <a:txBody>
+                    <a:bodyPr/>
+                    <a:lstStyle/>
+                    <a:p>
+                      <a:pPr algn="r"/>
+                      <a:r>
+                        <a:rPr sz="1200" b="0">
+                          <a:solidFill>
+                            <a:srgbClr val="1A1A1A"/>
+                          </a:solidFill>
+                          <a:latin typeface="Calibri"/>
+                        </a:rPr>
+                        <a:t>52.4%</a:t>
+                      </a:r>
+                    </a:p>
+                  </a:txBody>
+                  <a:tcPr anchor="ctr" marL="73152" marR="73152">
+                    <a:solidFill>
+                      <a:srgbClr val="FFFFFF"/>
+                    </a:solidFill>
+                  </a:tcPr>
+                </a:tc>
+              </a:tr>
+              <a:tr h="297180">
+                <a:tc>
+                  <a:txBody>
+                    <a:bodyPr/>
+                    <a:lstStyle/>
+                    <a:p>
+                      <a:pPr algn="l"/>
+                      <a:r>
+                        <a:rPr sz="1200" b="0">
+                          <a:solidFill>
+                            <a:srgbClr val="1A1A1A"/>
+                          </a:solidFill>
+                          <a:latin typeface="Calibri"/>
+                        </a:rPr>
+                        <a:t>Brake pad</a:t>
+                      </a:r>
+                    </a:p>
+                  </a:txBody>
+                  <a:tcPr anchor="ctr" marL="73152" marR="73152">
+                    <a:solidFill>
+                      <a:srgbClr val="ECECEC"/>
+                    </a:solidFill>
+                  </a:tcPr>
+                </a:tc>
+                <a:tc>
+                  <a:txBody>
+                    <a:bodyPr/>
+                    <a:lstStyle/>
+                    <a:p>
+                      <a:pPr algn="r"/>
+                      <a:r>
+                        <a:rPr sz="1200" b="0">
+                          <a:solidFill>
+                            <a:srgbClr val="1A1A1A"/>
+                          </a:solidFill>
+                          <a:latin typeface="Calibri"/>
+                        </a:rPr>
+                        <a:t>11.7%</a:t>
+                      </a:r>
+                    </a:p>
+                  </a:txBody>
+                  <a:tcPr anchor="ctr" marL="73152" marR="73152">
+                    <a:solidFill>
+                      <a:srgbClr val="ECECEC"/>
+                    </a:solidFill>
+                  </a:tcPr>
+                </a:tc>
+                <a:tc>
+                  <a:txBody>
+                    <a:bodyPr/>
+                    <a:lstStyle/>
+                    <a:p>
+                      <a:pPr algn="r"/>
+                      <a:r>
+                        <a:rPr sz="1200" b="0">
+                          <a:solidFill>
+                            <a:srgbClr val="1A1A1A"/>
+                          </a:solidFill>
+                          <a:latin typeface="Calibri"/>
+                        </a:rPr>
+                        <a:t>11.1%</a:t>
+                      </a:r>
+                    </a:p>
+                  </a:txBody>
+                  <a:tcPr anchor="ctr" marL="73152" marR="73152">
+                    <a:solidFill>
+                      <a:srgbClr val="ECECEC"/>
+                    </a:solidFill>
+                  </a:tcPr>
+                </a:tc>
+                <a:tc>
+                  <a:txBody>
+                    <a:bodyPr/>
+                    <a:lstStyle/>
+                    <a:p>
+                      <a:pPr algn="r"/>
+                      <a:r>
+                        <a:rPr sz="1200" b="0">
+                          <a:solidFill>
+                            <a:srgbClr val="1A1A1A"/>
+                          </a:solidFill>
+                          <a:latin typeface="Calibri"/>
+                        </a:rPr>
+                        <a:t>15.6%</a:t>
+                      </a:r>
+                    </a:p>
+                  </a:txBody>
+                  <a:tcPr anchor="ctr" marL="73152" marR="73152">
+                    <a:solidFill>
+                      <a:srgbClr val="ECECEC"/>
+                    </a:solidFill>
+                  </a:tcPr>
+                </a:tc>
+                <a:tc>
+                  <a:txBody>
+                    <a:bodyPr/>
+                    <a:lstStyle/>
+                    <a:p>
+                      <a:pPr algn="r"/>
+                      <a:r>
+                        <a:rPr sz="1200" b="0">
+                          <a:solidFill>
+                            <a:srgbClr val="1A1A1A"/>
+                          </a:solidFill>
+                          <a:latin typeface="Calibri"/>
+                        </a:rPr>
+                        <a:t>29.8%</a:t>
+                      </a:r>
+                    </a:p>
+                  </a:txBody>
+                  <a:tcPr anchor="ctr" marL="73152" marR="73152">
+                    <a:solidFill>
+                      <a:srgbClr val="ECECEC"/>
+                    </a:solidFill>
+                  </a:tcPr>
+                </a:tc>
+              </a:tr>
+              <a:tr h="297180">
+                <a:tc>
+                  <a:txBody>
+                    <a:bodyPr/>
+                    <a:lstStyle/>
+                    <a:p>
+                      <a:pPr algn="l"/>
+                      <a:r>
+                        <a:rPr sz="1200" b="0">
+                          <a:solidFill>
+                            <a:srgbClr val="1A1A1A"/>
+                          </a:solidFill>
+                          <a:latin typeface="Calibri"/>
+                        </a:rPr>
+                        <a:t>Brake rotor</a:t>
+                      </a:r>
+                    </a:p>
+                  </a:txBody>
+                  <a:tcPr anchor="ctr" marL="73152" marR="73152">
+                    <a:solidFill>
+                      <a:srgbClr val="FFFFFF"/>
+                    </a:solidFill>
+                  </a:tcPr>
+                </a:tc>
+                <a:tc>
+                  <a:txBody>
+                    <a:bodyPr/>
+                    <a:lstStyle/>
+                    <a:p>
+                      <a:pPr algn="r"/>
+                      <a:r>
+                        <a:rPr sz="1200" b="0">
+                          <a:solidFill>
+                            <a:srgbClr val="1A1A1A"/>
+                          </a:solidFill>
+                          <a:latin typeface="Calibri"/>
+                        </a:rPr>
+                        <a:t>22.4%</a:t>
+                      </a:r>
+                    </a:p>
+                  </a:txBody>
+                  <a:tcPr anchor="ctr" marL="73152" marR="73152">
+                    <a:solidFill>
+                      <a:srgbClr val="FFFFFF"/>
+                    </a:solidFill>
+                  </a:tcPr>
+                </a:tc>
+                <a:tc>
+                  <a:txBody>
+                    <a:bodyPr/>
+                    <a:lstStyle/>
+                    <a:p>
+                      <a:pPr algn="r"/>
+                      <a:r>
+                        <a:rPr sz="1200" b="0">
+                          <a:solidFill>
+                            <a:srgbClr val="1A1A1A"/>
+                          </a:solidFill>
+                          <a:latin typeface="Calibri"/>
+                        </a:rPr>
+                        <a:t>25.4%</a:t>
+                      </a:r>
+                    </a:p>
+                  </a:txBody>
+                  <a:tcPr anchor="ctr" marL="73152" marR="73152">
+                    <a:solidFill>
+                      <a:srgbClr val="FFFFFF"/>
+                    </a:solidFill>
+                  </a:tcPr>
+                </a:tc>
+                <a:tc>
+                  <a:txBody>
+                    <a:bodyPr/>
+                    <a:lstStyle/>
+                    <a:p>
+                      <a:pPr algn="r"/>
+                      <a:r>
+                        <a:rPr sz="1200" b="0">
+                          <a:solidFill>
+                            <a:srgbClr val="1A1A1A"/>
+                          </a:solidFill>
+                          <a:latin typeface="Calibri"/>
+                        </a:rPr>
+                        <a:t>36.1%</a:t>
+                      </a:r>
+                    </a:p>
+                  </a:txBody>
+                  <a:tcPr anchor="ctr" marL="73152" marR="73152">
+                    <a:solidFill>
+                      <a:srgbClr val="FFFFFF"/>
+                    </a:solidFill>
+                  </a:tcPr>
+                </a:tc>
+                <a:tc>
+                  <a:txBody>
+                    <a:bodyPr/>
+                    <a:lstStyle/>
+                    <a:p>
+                      <a:pPr algn="r"/>
+                      <a:r>
+                        <a:rPr sz="1200" b="0">
+                          <a:solidFill>
+                            <a:srgbClr val="1A1A1A"/>
+                          </a:solidFill>
+                          <a:latin typeface="Calibri"/>
+                        </a:rPr>
+                        <a:t>54.9%</a:t>
+                      </a:r>
+                    </a:p>
+                  </a:txBody>
+                  <a:tcPr anchor="ctr" marL="73152" marR="73152">
+                    <a:solidFill>
+                      <a:srgbClr val="FFFFFF"/>
+                    </a:solidFill>
+                  </a:tcPr>
+                </a:tc>
+              </a:tr>
+            </a:tbl>
+          </a:graphicData>
+        </a:graphic>
+      </p:graphicFrame>
+      <p:sp>
+        <p:nvSpPr>
+          <p:cNvPr id="9" name="TextBox 8"/>
+          <p:cNvSpPr txBox="1"/>
+          <p:nvPr/>
+        </p:nvSpPr>
+        <p:spPr>
+          <a:xfrm>
+            <a:off x="292608" y="3017520"/>
+            <a:ext cx="11612880" cy="1051560"/>
+          </a:xfrm>
+          <a:prstGeom prst="rect">
+            <a:avLst/>
+          </a:prstGeom>
+          <a:noFill/>
+        </p:spPr>
+        <p:txBody>
+          <a:bodyPr wrap="square">
+            <a:spAutoFit/>
+          </a:bodyPr>
+          <a:lstStyle/>
+          <a:p>
+            <a:pPr>
+              <a:lnSpc>
+                <a:spcPct val="110000"/>
+              </a:lnSpc>
+              <a:spcAft>
+                <a:spcPts val="1000"/>
+              </a:spcAft>
+            </a:pPr>
+            <a:r>
+              <a:rPr sz="1200" b="1">
+                <a:solidFill>
+                  <a:srgbClr val="CC0E1E"/>
+                </a:solidFill>
+                <a:latin typeface="Calibri"/>
+              </a:rPr>
+              <a:t>—  </a:t>
+            </a:r>
+            <a:r>
+              <a:rPr sz="1200">
+                <a:solidFill>
+                  <a:srgbClr val="1A1A1A"/>
+                </a:solidFill>
+                <a:latin typeface="Calibri"/>
+              </a:rPr>
+              <a:t>The gap isn't new — Hungary has sat 15-35 points below network on brake pad, brake rotor and fuel filter capture in every one of the last three full years. Air filter is the one category near parity.</a:t>
+            </a:r>
+          </a:p>
+          <a:p>
+            <a:pPr>
+              <a:lnSpc>
+                <a:spcPct val="110000"/>
+              </a:lnSpc>
+              <a:spcAft>
+                <a:spcPts val="1000"/>
+              </a:spcAft>
+            </a:pPr>
+            <a:r>
+              <a:rPr sz="1200" b="1">
+                <a:solidFill>
+                  <a:srgbClr val="CC0E1E"/>
+                </a:solidFill>
+                <a:latin typeface="Calibri"/>
+              </a:rPr>
+              <a:t>—  </a:t>
+            </a:r>
+            <a:r>
+              <a:rPr sz="1200">
+                <a:solidFill>
+                  <a:srgbClr val="1A1A1A"/>
+                </a:solidFill>
+                <a:latin typeface="Calibri"/>
+              </a:rPr>
+              <a:t>Warranty claims jumped from near-zero (FY2024: EUR 225) to EUR 102,418 (FY2026) — right where GPS started easing back. Worth separating a genuine quality trend from a claims-logging change or a campaign.</a:t>
+            </a:r>
+          </a:p>
+        </p:txBody>
+      </p:sp>
+      <p:sp>
+        <p:nvSpPr>
+          <p:cNvPr id="10" name="TextBox 9"/>
+          <p:cNvSpPr txBox="1"/>
+          <p:nvPr/>
+        </p:nvSpPr>
+        <p:spPr>
+          <a:xfrm>
+            <a:off x="292608" y="4160520"/>
+            <a:ext cx="10972800" cy="292608"/>
+          </a:xfrm>
+          <a:prstGeom prst="rect">
+            <a:avLst/>
+          </a:prstGeom>
+          <a:noFill/>
+        </p:spPr>
+        <p:txBody>
+          <a:bodyPr wrap="square">
+            <a:spAutoFit/>
+          </a:bodyPr>
+          <a:lstStyle/>
+          <a:p>
+            <a:pPr algn="l"/>
+            <a:r>
+              <a:rPr sz="1300" b="1">
+                <a:solidFill>
+                  <a:srgbClr val="CC0E1E"/>
+                </a:solidFill>
+                <a:latin typeface="Calibri"/>
+              </a:rPr>
+              <a:t>QUESTIONS FOR US TO WORK THROUGH TOGETHER</a:t>
+            </a:r>
+          </a:p>
+        </p:txBody>
+      </p:sp>
+      <p:sp>
+        <p:nvSpPr>
+          <p:cNvPr id="11" name="TextBox 10"/>
+          <p:cNvSpPr txBox="1"/>
+          <p:nvPr/>
+        </p:nvSpPr>
+        <p:spPr>
+          <a:xfrm>
+            <a:off x="292608" y="4480560"/>
+            <a:ext cx="11612880" cy="1600200"/>
+          </a:xfrm>
+          <a:prstGeom prst="rect">
+            <a:avLst/>
+          </a:prstGeom>
+          <a:noFill/>
+        </p:spPr>
+        <p:txBody>
+          <a:bodyPr wrap="square">
+            <a:spAutoFit/>
+          </a:bodyPr>
+          <a:lstStyle/>
+          <a:p>
+            <a:pPr>
+              <a:lnSpc>
+                <a:spcPct val="105000"/>
+              </a:lnSpc>
+              <a:spcAft>
+                <a:spcPts val="1000"/>
+              </a:spcAft>
+            </a:pPr>
+            <a:r>
+              <a:rPr sz="1200" b="1">
+                <a:solidFill>
+                  <a:srgbClr val="CC0E1E"/>
+                </a:solidFill>
+                <a:latin typeface="Calibri"/>
+              </a:rPr>
+              <a:t>—  </a:t>
+            </a:r>
+            <a:r>
+              <a:rPr sz="1200">
+                <a:solidFill>
+                  <a:srgbClr val="1A1A1A"/>
+                </a:solidFill>
+                <a:latin typeface="Calibri"/>
+              </a:rPr>
+              <a:t>Brake pad/rotor capture has trailed the network by 15-35 points for three straight years — what's routing that work to independent garages?</a:t>
+            </a:r>
+          </a:p>
+          <a:p>
+            <a:pPr>
+              <a:lnSpc>
+                <a:spcPct val="105000"/>
+              </a:lnSpc>
+              <a:spcAft>
+                <a:spcPts val="1000"/>
+              </a:spcAft>
+            </a:pPr>
+            <a:r>
+              <a:rPr sz="1200" b="1">
+                <a:solidFill>
+                  <a:srgbClr val="CC0E1E"/>
+                </a:solidFill>
+                <a:latin typeface="Calibri"/>
+              </a:rPr>
+              <a:t>—  </a:t>
+            </a:r>
+            <a:r>
+              <a:rPr sz="1200">
+                <a:solidFill>
+                  <a:srgbClr val="1A1A1A"/>
+                </a:solidFill>
+                <a:latin typeface="Calibri"/>
+              </a:rPr>
+              <a:t>Warranty claims went from near-zero to over EUR 100K in two fiscal years — quality issue, claims-logging change, or a specific campaign?</a:t>
+            </a:r>
+          </a:p>
+          <a:p>
+            <a:pPr>
+              <a:lnSpc>
+                <a:spcPct val="105000"/>
+              </a:lnSpc>
+              <a:spcAft>
+                <a:spcPts val="1000"/>
+              </a:spcAft>
+            </a:pPr>
+            <a:r>
+              <a:rPr sz="1200" b="1">
+                <a:solidFill>
+                  <a:srgbClr val="CC0E1E"/>
+                </a:solidFill>
+                <a:latin typeface="Calibri"/>
+              </a:rPr>
+              <a:t>—  </a:t>
+            </a:r>
+            <a:r>
+              <a:rPr sz="1200">
+                <a:solidFill>
+                  <a:srgbClr val="1A1A1A"/>
+                </a:solidFill>
+                <a:latin typeface="Calibri"/>
+              </a:rPr>
+              <a:t>Which fleet number should FY2027 use — the ~4,000-unit growing view or the ~3,645-unit corrected-survival view?</a:t>
+            </a:r>
+          </a:p>
+          <a:p>
+            <a:pPr>
+              <a:lnSpc>
+                <a:spcPct val="105000"/>
+              </a:lnSpc>
+              <a:spcAft>
+                <a:spcPts val="1000"/>
+              </a:spcAft>
+            </a:pPr>
+            <a:r>
+              <a:rPr sz="1200" b="1">
+                <a:solidFill>
+                  <a:srgbClr val="CC0E1E"/>
+                </a:solidFill>
+                <a:latin typeface="Calibri"/>
+              </a:rPr>
+              <a:t>—  </a:t>
+            </a:r>
+            <a:r>
+              <a:rPr sz="1200">
+                <a:solidFill>
+                  <a:srgbClr val="1A1A1A"/>
+                </a:solidFill>
+                <a:latin typeface="Calibri"/>
+              </a:rPr>
+              <a:t>BVP has held 13-18% of billing since 2020 — right mix, or room to push further into price-sensitive segments?</a:t>
             </a:r>
           </a:p>
         </p:txBody>

--- a/09_meetings/HUNGARY_Sales_Review_2026/ISZE_HUNGARY_Sales_Review_FY2027.pptx
+++ b/09_meetings/HUNGARY_Sales_Review_2026/ISZE_HUNGARY_Sales_Review_FY2027.pptx
@@ -11105,7 +11105,7 @@
                 </a:solidFill>
                 <a:latin typeface="Calibri"/>
               </a:rPr>
-              <a:t>Genuine parts have held 82-88% of billing every year since 2020 (BVP 12-18%) — a stable mix, so it isn't what moved GPS.</a:t>
+              <a:t>BVP held 12-18% share through 2024, but 2025's decline is entirely Genuine (-EUR 71K) while BVP grew (+EUR 4K) — a Genuine-parts problem, not a BVP one.</a:t>
             </a:r>
           </a:p>
           <a:p>
@@ -11161,7 +11161,7 @@
                 </a:solidFill>
                 <a:latin typeface="Calibri"/>
               </a:rPr>
-              <a:t>The FY2027 base is disputed: corrected-survival shows the parc shrinking to 3,645 (-2.4%); UIO V19 shows it growing to 3,992 (+6.9%). Worth agreeing which one we plan against.</a:t>
+              <a:t>The FY2027 base is disputed: corrected-survival shrinks the parc to 3,645 (-2.4%); UIO V19 grows it to 3,992 (+6.9%) — worth agreeing which.</a:t>
             </a:r>
           </a:p>
         </p:txBody>
@@ -12382,7 +12382,7 @@
                 </a:solidFill>
                 <a:latin typeface="Calibri"/>
               </a:rPr>
-              <a:t>BVP has held 13-18% of billing since 2020 — right mix, or room to push further into price-sensitive segments?</a:t>
+              <a:t>Genuine parts fell EUR 71K in 2025 while BVP grew EUR 4K — is genuine business moving to the aftermarket, or are dealers trading down within our own catalog?</a:t>
             </a:r>
           </a:p>
         </p:txBody>

--- a/09_meetings/HUNGARY_Sales_Review_2026/ISZE_HUNGARY_Sales_Review_FY2027.pptx
+++ b/09_meetings/HUNGARY_Sales_Review_2026/ISZE_HUNGARY_Sales_Review_FY2027.pptx
@@ -25,6 +25,7 @@
     <p:sldId id="273" r:id="rId24"/>
     <p:sldId id="275" r:id="rId26"/>
     <p:sldId id="276" r:id="rId27"/>
+    <p:sldId id="277" r:id="rId28"/>
     <p:sldId id="274" r:id="rId25"/>
   </p:sldIdLst>
   <p:sldSz cx="12188952" cy="6858000" type="screen4x3"/>
@@ -11289,7 +11290,7 @@
                 </a:solidFill>
                 <a:latin typeface="Calibri"/>
               </a:rPr>
-              <a:t>DEEP DIVE — COMPETITIVE CAPTURE</a:t>
+              <a:t>DEEP DIVE — GENUINE VS BVP</a:t>
             </a:r>
           </a:p>
         </p:txBody>
@@ -11324,7 +11325,7 @@
                 </a:solidFill>
                 <a:latin typeface="Calibri"/>
               </a:rPr>
-              <a:t>Where the gap is: competitive parts leaking to the aftermarket</a:t>
+              <a:t>Genuine vs BVP: 2025 breaks the pattern</a:t>
             </a:r>
           </a:p>
         </p:txBody>
@@ -11403,6 +11404,484 @@
                 <a:latin typeface="Calibri"/>
               </a:rPr>
               <a:t>20</a:t>
+            </a:r>
+          </a:p>
+        </p:txBody>
+      </p:sp>
+      <p:pic>
+        <p:nvPicPr>
+          <p:cNvPr id="8" name="Picture 7" descr="bvp_genuine.png"/>
+          <p:cNvPicPr>
+            <a:picLocks noChangeAspect="1"/>
+          </p:cNvPicPr>
+          <p:nvPr/>
+        </p:nvPicPr>
+        <p:blipFill>
+          <a:blip r:embed="rId3"/>
+          <a:stretch>
+            <a:fillRect/>
+          </a:stretch>
+        </p:blipFill>
+        <p:spPr>
+          <a:xfrm>
+            <a:off x="292608" y="2121722"/>
+            <a:ext cx="7178040" cy="3026036"/>
+          </a:xfrm>
+          <a:prstGeom prst="rect">
+            <a:avLst/>
+          </a:prstGeom>
+        </p:spPr>
+      </p:pic>
+      <p:sp>
+        <p:nvSpPr>
+          <p:cNvPr id="9" name="Rectangle 8"/>
+          <p:cNvSpPr/>
+          <p:nvPr/>
+        </p:nvSpPr>
+        <p:spPr>
+          <a:xfrm>
+            <a:off x="7726679" y="1188720"/>
+            <a:ext cx="22000" cy="4892040"/>
+          </a:xfrm>
+          <a:prstGeom prst="rect">
+            <a:avLst/>
+          </a:prstGeom>
+          <a:solidFill>
+            <a:srgbClr val="ECECEC"/>
+          </a:solidFill>
+          <a:ln>
+            <a:noFill/>
+          </a:ln>
+        </p:spPr>
+        <p:style>
+          <a:lnRef idx="1">
+            <a:schemeClr val="accent1"/>
+          </a:lnRef>
+          <a:fillRef idx="3">
+            <a:schemeClr val="accent1"/>
+          </a:fillRef>
+          <a:effectRef idx="2">
+            <a:schemeClr val="accent1"/>
+          </a:effectRef>
+          <a:fontRef idx="minor">
+            <a:schemeClr val="lt1"/>
+          </a:fontRef>
+        </p:style>
+        <p:txBody>
+          <a:bodyPr rtlCol="0" anchor="ctr"/>
+          <a:lstStyle/>
+          <a:p>
+            <a:pPr algn="ctr"/>
+          </a:p>
+        </p:txBody>
+      </p:sp>
+      <p:sp>
+        <p:nvSpPr>
+          <p:cNvPr id="10" name="TextBox 9"/>
+          <p:cNvSpPr txBox="1"/>
+          <p:nvPr/>
+        </p:nvSpPr>
+        <p:spPr>
+          <a:xfrm>
+            <a:off x="7927847" y="1234440"/>
+            <a:ext cx="3886200" cy="320040"/>
+          </a:xfrm>
+          <a:prstGeom prst="rect">
+            <a:avLst/>
+          </a:prstGeom>
+          <a:noFill/>
+        </p:spPr>
+        <p:txBody>
+          <a:bodyPr wrap="square">
+            <a:spAutoFit/>
+          </a:bodyPr>
+          <a:lstStyle/>
+          <a:p>
+            <a:pPr algn="l"/>
+            <a:r>
+              <a:rPr sz="1200" b="1">
+                <a:solidFill>
+                  <a:srgbClr val="CC0E1E"/>
+                </a:solidFill>
+                <a:latin typeface="Calibri"/>
+              </a:rPr>
+              <a:t>TAKEAWAYS</a:t>
+            </a:r>
+          </a:p>
+        </p:txBody>
+      </p:sp>
+      <p:sp>
+        <p:nvSpPr>
+          <p:cNvPr id="11" name="TextBox 10"/>
+          <p:cNvSpPr txBox="1"/>
+          <p:nvPr/>
+        </p:nvSpPr>
+        <p:spPr>
+          <a:xfrm>
+            <a:off x="7927847" y="1691640"/>
+            <a:ext cx="3794760" cy="4343400"/>
+          </a:xfrm>
+          <a:prstGeom prst="rect">
+            <a:avLst/>
+          </a:prstGeom>
+          <a:noFill/>
+        </p:spPr>
+        <p:txBody>
+          <a:bodyPr wrap="square">
+            <a:spAutoFit/>
+          </a:bodyPr>
+          <a:lstStyle/>
+          <a:p>
+            <a:pPr>
+              <a:lnSpc>
+                <a:spcPct val="125000"/>
+              </a:lnSpc>
+              <a:spcAft>
+                <a:spcPts val="1000"/>
+              </a:spcAft>
+            </a:pPr>
+            <a:r>
+              <a:rPr sz="1250" b="1">
+                <a:solidFill>
+                  <a:srgbClr val="CC0E1E"/>
+                </a:solidFill>
+                <a:latin typeface="Calibri"/>
+              </a:rPr>
+              <a:t>—  </a:t>
+            </a:r>
+            <a:r>
+              <a:rPr sz="1250">
+                <a:solidFill>
+                  <a:srgbClr val="1A1A1A"/>
+                </a:solidFill>
+                <a:latin typeface="Calibri"/>
+              </a:rPr>
+              <a:t>2025 is the only year since 2020 where Genuine and BVP move in opposite directions: Genuine EUR 341K → EUR 270K (-71K); BVP EUR 48K → EUR 52K (+4K). Every prior year they moved together.</a:t>
+            </a:r>
+          </a:p>
+          <a:p>
+            <a:pPr>
+              <a:lnSpc>
+                <a:spcPct val="125000"/>
+              </a:lnSpc>
+              <a:spcAft>
+                <a:spcPts val="1000"/>
+              </a:spcAft>
+            </a:pPr>
+            <a:r>
+              <a:rPr sz="1250" b="1">
+                <a:solidFill>
+                  <a:srgbClr val="CC0E1E"/>
+                </a:solidFill>
+                <a:latin typeface="Calibri"/>
+              </a:rPr>
+              <a:t>—  </a:t>
+            </a:r>
+            <a:r>
+              <a:rPr sz="1250">
+                <a:solidFill>
+                  <a:srgbClr val="1A1A1A"/>
+                </a:solidFill>
+                <a:latin typeface="Calibri"/>
+              </a:rPr>
+              <a:t>Not just a pricing effect: Genuine volume also fell (9,216 → 7,372 units) and breadth contracted (1,160 → 930 distinct genuine part numbers sold, -20%).</a:t>
+            </a:r>
+          </a:p>
+          <a:p>
+            <a:pPr>
+              <a:lnSpc>
+                <a:spcPct val="125000"/>
+              </a:lnSpc>
+              <a:spcAft>
+                <a:spcPts val="1000"/>
+              </a:spcAft>
+            </a:pPr>
+            <a:r>
+              <a:rPr sz="1250" b="1">
+                <a:solidFill>
+                  <a:srgbClr val="CC0E1E"/>
+                </a:solidFill>
+                <a:latin typeface="Calibri"/>
+              </a:rPr>
+              <a:t>—  </a:t>
+            </a:r>
+            <a:r>
+              <a:rPr sz="1250">
+                <a:solidFill>
+                  <a:srgbClr val="1A1A1A"/>
+                </a:solidFill>
+                <a:latin typeface="Calibri"/>
+              </a:rPr>
+              <a:t>BVP held up on every measure over the same year — units flat (4,036 → 4,052), SKU breadth grew (37 → 43) — so this isn't distributor-wide destocking, it's specific to Genuine.</a:t>
+            </a:r>
+          </a:p>
+          <a:p>
+            <a:pPr>
+              <a:lnSpc>
+                <a:spcPct val="125000"/>
+              </a:lnSpc>
+              <a:spcAft>
+                <a:spcPts val="1000"/>
+              </a:spcAft>
+            </a:pPr>
+            <a:r>
+              <a:rPr sz="1250" b="1">
+                <a:solidFill>
+                  <a:srgbClr val="CC0E1E"/>
+                </a:solidFill>
+                <a:latin typeface="Calibri"/>
+              </a:rPr>
+              <a:t>—  </a:t>
+            </a:r>
+            <a:r>
+              <a:rPr sz="1250">
+                <a:solidFill>
+                  <a:srgbClr val="1A1A1A"/>
+                </a:solidFill>
+                <a:latin typeface="Calibri"/>
+              </a:rPr>
+              <a:t>Worth cutting the 2025 genuine drop by category together before assuming it's competitive leakage — a concentrated cause (e.g. one model, one dealer) reads very differently from a broad-based one.</a:t>
+            </a:r>
+          </a:p>
+        </p:txBody>
+      </p:sp>
+    </p:spTree>
+  </p:cSld>
+  <p:clrMapOvr>
+    <a:masterClrMapping/>
+  </p:clrMapOvr>
+</p:sld>
+</file>
+
+<file path=ppt/slides/slide22.xml><?xml version="1.0" encoding="utf-8"?>
+<p:sld xmlns:a="http://schemas.openxmlformats.org/drawingml/2006/main" xmlns:p="http://schemas.openxmlformats.org/presentationml/2006/main" xmlns:r="http://schemas.openxmlformats.org/officeDocument/2006/relationships">
+  <p:cSld>
+    <p:bg>
+      <p:bgPr>
+        <a:solidFill>
+          <a:srgbClr val="FFFFFF"/>
+        </a:solidFill>
+        <a:effectLst/>
+      </p:bgPr>
+    </p:bg>
+    <p:spTree>
+      <p:nvGrpSpPr>
+        <p:cNvPr id="1" name=""/>
+        <p:cNvGrpSpPr/>
+        <p:nvPr/>
+      </p:nvGrpSpPr>
+      <p:grpSpPr/>
+      <p:pic>
+        <p:nvPicPr>
+          <p:cNvPr id="2" name="Picture 1" descr="image.png"/>
+          <p:cNvPicPr>
+            <a:picLocks noChangeAspect="1"/>
+          </p:cNvPicPr>
+          <p:nvPr/>
+        </p:nvPicPr>
+        <p:blipFill>
+          <a:blip r:embed="rId2"/>
+          <a:stretch>
+            <a:fillRect/>
+          </a:stretch>
+        </p:blipFill>
+        <p:spPr>
+          <a:xfrm>
+            <a:off x="256032" y="6263640"/>
+            <a:ext cx="1679787" cy="292608"/>
+          </a:xfrm>
+          <a:prstGeom prst="rect">
+            <a:avLst/>
+          </a:prstGeom>
+        </p:spPr>
+      </p:pic>
+      <p:sp>
+        <p:nvSpPr>
+          <p:cNvPr id="3" name="Rectangle 2"/>
+          <p:cNvSpPr/>
+          <p:nvPr/>
+        </p:nvSpPr>
+        <p:spPr>
+          <a:xfrm>
+            <a:off x="0" y="6766560"/>
+            <a:ext cx="12188952" cy="91440"/>
+          </a:xfrm>
+          <a:prstGeom prst="rect">
+            <a:avLst/>
+          </a:prstGeom>
+          <a:solidFill>
+            <a:srgbClr val="CC0E1E"/>
+          </a:solidFill>
+          <a:ln>
+            <a:noFill/>
+          </a:ln>
+        </p:spPr>
+        <p:style>
+          <a:lnRef idx="1">
+            <a:schemeClr val="accent1"/>
+          </a:lnRef>
+          <a:fillRef idx="3">
+            <a:schemeClr val="accent1"/>
+          </a:fillRef>
+          <a:effectRef idx="2">
+            <a:schemeClr val="accent1"/>
+          </a:effectRef>
+          <a:fontRef idx="minor">
+            <a:schemeClr val="lt1"/>
+          </a:fontRef>
+        </p:style>
+        <p:txBody>
+          <a:bodyPr rtlCol="0" anchor="ctr"/>
+          <a:lstStyle/>
+          <a:p>
+            <a:pPr algn="ctr"/>
+          </a:p>
+        </p:txBody>
+      </p:sp>
+      <p:sp>
+        <p:nvSpPr>
+          <p:cNvPr id="4" name="TextBox 3"/>
+          <p:cNvSpPr txBox="1"/>
+          <p:nvPr/>
+        </p:nvSpPr>
+        <p:spPr>
+          <a:xfrm>
+            <a:off x="292608" y="201168"/>
+            <a:ext cx="11430000" cy="274320"/>
+          </a:xfrm>
+          <a:prstGeom prst="rect">
+            <a:avLst/>
+          </a:prstGeom>
+          <a:noFill/>
+        </p:spPr>
+        <p:txBody>
+          <a:bodyPr wrap="square">
+            <a:spAutoFit/>
+          </a:bodyPr>
+          <a:lstStyle/>
+          <a:p>
+            <a:pPr algn="l"/>
+            <a:r>
+              <a:rPr sz="1100" b="1">
+                <a:solidFill>
+                  <a:srgbClr val="CC0E1E"/>
+                </a:solidFill>
+                <a:latin typeface="Calibri"/>
+              </a:rPr>
+              <a:t>DEEP DIVE — COMPETITIVE CAPTURE</a:t>
+            </a:r>
+          </a:p>
+        </p:txBody>
+      </p:sp>
+      <p:sp>
+        <p:nvSpPr>
+          <p:cNvPr id="5" name="TextBox 4"/>
+          <p:cNvSpPr txBox="1"/>
+          <p:nvPr/>
+        </p:nvSpPr>
+        <p:spPr>
+          <a:xfrm>
+            <a:off x="292608" y="475488"/>
+            <a:ext cx="11612880" cy="566928"/>
+          </a:xfrm>
+          <a:prstGeom prst="rect">
+            <a:avLst/>
+          </a:prstGeom>
+          <a:noFill/>
+        </p:spPr>
+        <p:txBody>
+          <a:bodyPr wrap="square">
+            <a:spAutoFit/>
+          </a:bodyPr>
+          <a:lstStyle/>
+          <a:p>
+            <a:pPr algn="l"/>
+            <a:r>
+              <a:rPr sz="2500" b="1">
+                <a:solidFill>
+                  <a:srgbClr val="1A1A1A"/>
+                </a:solidFill>
+                <a:latin typeface="Calibri"/>
+              </a:rPr>
+              <a:t>Where the gap is: competitive parts leaking to the aftermarket</a:t>
+            </a:r>
+          </a:p>
+        </p:txBody>
+      </p:sp>
+      <p:sp>
+        <p:nvSpPr>
+          <p:cNvPr id="6" name="Rectangle 5"/>
+          <p:cNvSpPr/>
+          <p:nvPr/>
+        </p:nvSpPr>
+        <p:spPr>
+          <a:xfrm>
+            <a:off x="292608" y="1005840"/>
+            <a:ext cx="11612880" cy="28000"/>
+          </a:xfrm>
+          <a:prstGeom prst="rect">
+            <a:avLst/>
+          </a:prstGeom>
+          <a:solidFill>
+            <a:srgbClr val="CC0E1E"/>
+          </a:solidFill>
+          <a:ln>
+            <a:noFill/>
+          </a:ln>
+        </p:spPr>
+        <p:style>
+          <a:lnRef idx="1">
+            <a:schemeClr val="accent1"/>
+          </a:lnRef>
+          <a:fillRef idx="3">
+            <a:schemeClr val="accent1"/>
+          </a:fillRef>
+          <a:effectRef idx="2">
+            <a:schemeClr val="accent1"/>
+          </a:effectRef>
+          <a:fontRef idx="minor">
+            <a:schemeClr val="lt1"/>
+          </a:fontRef>
+        </p:style>
+        <p:txBody>
+          <a:bodyPr rtlCol="0" anchor="ctr"/>
+          <a:lstStyle/>
+          <a:p>
+            <a:pPr algn="ctr"/>
+          </a:p>
+        </p:txBody>
+      </p:sp>
+      <p:sp>
+        <p:nvSpPr>
+          <p:cNvPr id="7" name="TextBox 6"/>
+          <p:cNvSpPr txBox="1"/>
+          <p:nvPr/>
+        </p:nvSpPr>
+        <p:spPr>
+          <a:xfrm>
+            <a:off x="11594592" y="6473952"/>
+            <a:ext cx="365760" cy="274320"/>
+          </a:xfrm>
+          <a:prstGeom prst="rect">
+            <a:avLst/>
+          </a:prstGeom>
+          <a:noFill/>
+        </p:spPr>
+        <p:txBody>
+          <a:bodyPr wrap="square">
+            <a:spAutoFit/>
+          </a:bodyPr>
+          <a:lstStyle/>
+          <a:p>
+            <a:pPr algn="r"/>
+            <a:r>
+              <a:rPr sz="1000" b="0">
+                <a:solidFill>
+                  <a:srgbClr val="5A5A5A"/>
+                </a:solidFill>
+                <a:latin typeface="Calibri"/>
+              </a:rPr>
+              <a:t>21</a:t>
             </a:r>
           </a:p>
         </p:txBody>
@@ -12212,7 +12691,7 @@
                 </a:solidFill>
                 <a:latin typeface="Calibri"/>
               </a:rPr>
-              <a:t>Warranty claims jumped from near-zero (FY2024: EUR 225) to EUR 102,418 (FY2026) — right where GPS started easing back. Worth separating a genuine quality trend from a claims-logging change or a campaign.</a:t>
+              <a:t>Warranty claims (separate claims-system data, not part of the billing above) jumped from near-zero (FY2024: EUR 225) to EUR 102,418 (FY2026) — right where GPS started easing back. Worth checking if that's a genuine quality trend, a claims-logging change, or a campaign.</a:t>
             </a:r>
           </a:p>
         </p:txBody>

--- a/09_meetings/HUNGARY_Sales_Review_2026/ISZE_HUNGARY_Sales_Review_FY2027.pptx
+++ b/09_meetings/HUNGARY_Sales_Review_2026/ISZE_HUNGARY_Sales_Review_FY2027.pptx
@@ -11134,7 +11134,7 @@
                 </a:solidFill>
                 <a:latin typeface="Calibri"/>
               </a:rPr>
-              <a:t>2022 doesn't reconcile with the previously computed series (EUR 261K vs EUR 186K net) — treat 2022 as directional; 2023-2025 corroborate closely.</a:t>
+              <a:t>2022's apparent mismatch against the previously computed series is resolved: that figure was a Jan-Sep YTD cut (99.96% match through 5 Sep 2022), not the full year — CY2022 here is the complete twelve months.</a:t>
             </a:r>
           </a:p>
           <a:p>

--- a/09_meetings/HUNGARY_Sales_Review_2026/ISZE_HUNGARY_Sales_Review_FY2027.pptx
+++ b/09_meetings/HUNGARY_Sales_Review_2026/ISZE_HUNGARY_Sales_Review_FY2027.pptx
@@ -5686,6 +5686,34 @@
                 </a:solidFill>
                 <a:latin typeface="Calibri"/>
               </a:rPr>
+              <a:t>End-2026 mix: LCV / D-Max 3,645; CV — LD 0.</a:t>
+            </a:r>
+          </a:p>
+          <a:p>
+            <a:pPr>
+              <a:lnSpc>
+                <a:spcPct val="125000"/>
+              </a:lnSpc>
+              <a:spcAft>
+                <a:spcPts val="1000"/>
+              </a:spcAft>
+            </a:pPr>
+            <a:r>
+              <a:rPr sz="1250" b="1">
+                <a:solidFill>
+                  <a:srgbClr val="CC0E1E"/>
+                </a:solidFill>
+                <a:latin typeface="Calibri"/>
+              </a:rPr>
+              <a:t>—  </a:t>
+            </a:r>
+            <a:r>
+              <a:rPr sz="1250">
+                <a:solidFill>
+                  <a:srgbClr val="1A1A1A"/>
+                </a:solidFill>
+                <a:latin typeface="Calibri"/>
+              </a:rPr>
               <a:t>The FY2027 Sales-to-Dealer target starts from that fleet change, then applies a 5% price adjustment and 1.8% additional growth.</a:t>
             </a:r>
           </a:p>
@@ -11768,7 +11796,7 @@
                 </a:solidFill>
                 <a:latin typeface="Calibri"/>
               </a:rPr>
-              <a:t>GPS — calendar year and fiscal year on one chart (incl. warranty)</a:t>
+              <a:t>GPS — fiscal year (headline vs excl. warranty; max two lines)</a:t>
             </a:r>
           </a:p>
           <a:p>
@@ -11824,7 +11852,7 @@
                 </a:solidFill>
                 <a:latin typeface="Calibri"/>
               </a:rPr>
-              <a:t>Where the money went — outside the service-parts basket</a:t>
+              <a:t>Where the money went — outside the service-parts basket (FY)</a:t>
             </a:r>
           </a:p>
           <a:p>
@@ -11852,7 +11880,7 @@
                 </a:solidFill>
                 <a:latin typeface="Calibri"/>
               </a:rPr>
-              <a:t>Service parts: calendar-year capture vs network + fiscal-year billing</a:t>
+              <a:t>Service parts: CY capture vs network + FY billing (capture % is CY-only by design)</a:t>
             </a:r>
           </a:p>
           <a:p>
@@ -11880,7 +11908,7 @@
                 </a:solidFill>
                 <a:latin typeface="Calibri"/>
               </a:rPr>
-              <a:t>Brake pads — BVP share of total brake pad sales</a:t>
+              <a:t>Brake pads — BVP share of total brake pad sales (FY)</a:t>
             </a:r>
           </a:p>
           <a:p>
@@ -12127,7 +12155,7 @@
                 </a:solidFill>
                 <a:latin typeface="Calibri"/>
               </a:rPr>
-              <a:t>GPS: calendar year, fiscal year, and after warranty</a:t>
+              <a:t>GPS: fiscal year headline vs after warranty</a:t>
             </a:r>
           </a:p>
         </p:txBody>
@@ -12358,7 +12386,7 @@
                 </a:solidFill>
                 <a:latin typeface="Calibri"/>
               </a:rPr>
-              <a:t>Red = calendar-year GPS. Recent peak 42.0%; CY2025 = 35.4%.</a:t>
+              <a:t>Red = fiscal-year GPS (frozen CY2025 wallet). FY25 39.2% → FY26 37.1%.</a:t>
             </a:r>
           </a:p>
           <a:p>
@@ -12386,7 +12414,7 @@
                 </a:solidFill>
                 <a:latin typeface="Calibri"/>
               </a:rPr>
-              <a:t>Black = fiscal-year GPS (frozen CY2025 wallet). FY26 headline 37.1%.</a:t>
+              <a:t>Black = fiscal GPS after removing warranty parts (€). FY26 ≈ 26.1% (warranty EUR 102,418 ≈ 30% of FY26 billing).</a:t>
             </a:r>
           </a:p>
           <a:p>
@@ -12414,35 +12442,7 @@
                 </a:solidFill>
                 <a:latin typeface="Calibri"/>
               </a:rPr>
-              <a:t>Grey = fiscal GPS after removing warranty parts (€). FY26 ≈ 26.1% (warranty EUR 102,418 ≈ 30% of FY26 billing).</a:t>
-            </a:r>
-          </a:p>
-          <a:p>
-            <a:pPr>
-              <a:lnSpc>
-                <a:spcPct val="125000"/>
-              </a:lnSpc>
-              <a:spcAft>
-                <a:spcPts val="1000"/>
-              </a:spcAft>
-            </a:pPr>
-            <a:r>
-              <a:rPr sz="1250" b="1">
-                <a:solidFill>
-                  <a:srgbClr val="CC0E1E"/>
-                </a:solidFill>
-                <a:latin typeface="Calibri"/>
-              </a:rPr>
-              <a:t>—  </a:t>
-            </a:r>
-            <a:r>
-              <a:rPr sz="1250">
-                <a:solidFill>
-                  <a:srgbClr val="1A1A1A"/>
-                </a:solidFill>
-                <a:latin typeface="Calibri"/>
-              </a:rPr>
-              <a:t>Fleet 3,734 → 3,645 (working CY2026 estimate).</a:t>
+              <a:t>Fleet 3,734 → 3,645 (working year-end estimate under the FY2027 target).</a:t>
             </a:r>
           </a:p>
         </p:txBody>
@@ -13838,7 +13838,7 @@
                 </a:solidFill>
                 <a:latin typeface="Calibri"/>
               </a:rPr>
-              <a:t>Where the genuine drop sits (calendar 2024 → 2025)</a:t>
+              <a:t>Where the genuine drop sits (FY2025 → FY2026)</a:t>
             </a:r>
           </a:p>
         </p:txBody>
@@ -13967,7 +13967,7 @@
                 </a:solidFill>
                 <a:latin typeface="Calibri"/>
               </a:rPr>
-              <a:t>Genuine-only sales moved EUR -63,942 from CY2024 to CY2025.</a:t>
+              <a:t>Genuine-only sales moved EUR -31,719 from FY2025 to FY2026.</a:t>
             </a:r>
           </a:p>
           <a:p>
@@ -13995,7 +13995,7 @@
                 </a:solidFill>
                 <a:latin typeface="Calibri"/>
               </a:rPr>
-              <a:t>Of that, the routine service basket (filters, pads, rotors) moved EUR 10,265 on genuine-only; BVP in that basket moved EUR 4,072.</a:t>
+              <a:t>Of that, the routine service basket (filters, pads, rotors) moved EUR 7,633 on genuine-only; BVP in that basket moved EUR 3,835.</a:t>
             </a:r>
           </a:p>
           <a:p>
@@ -14023,7 +14023,7 @@
                 </a:solidFill>
                 <a:latin typeface="Calibri"/>
               </a:rPr>
-              <a:t>So about 116% of the genuine-only drop sits outside routine service parts.</a:t>
+              <a:t>So about 124% of the genuine-only drop sits outside routine service parts.</a:t>
             </a:r>
           </a:p>
           <a:p>
@@ -16507,7 +16507,7 @@
                 </a:solidFill>
                 <a:latin typeface="Calibri"/>
               </a:rPr>
-              <a:t>Brake pads — BVP share of total brake pad sales</a:t>
+              <a:t>Brake pads — BVP share of total brake pad sales (FY)</a:t>
             </a:r>
           </a:p>
         </p:txBody>
@@ -16650,7 +16650,7 @@
                           </a:solidFill>
                           <a:latin typeface="Calibri"/>
                         </a:rPr>
-                        <a:t>2024</a:t>
+                        <a:t>FY2025</a:t>
                       </a:r>
                     </a:p>
                   </a:txBody>
@@ -16673,7 +16673,7 @@
                           </a:solidFill>
                           <a:latin typeface="Calibri"/>
                         </a:rPr>
-                        <a:t>2025</a:t>
+                        <a:t>FY2026</a:t>
                       </a:r>
                     </a:p>
                   </a:txBody>
@@ -16886,7 +16886,7 @@
                           </a:solidFill>
                           <a:latin typeface="Calibri"/>
                         </a:rPr>
-                        <a:t>9%</a:t>
+                        <a:t>11%</a:t>
                       </a:r>
                     </a:p>
                   </a:txBody>

--- a/09_meetings/HUNGARY_Sales_Review_2026/ISZE_HUNGARY_Sales_Review_FY2027.pptx
+++ b/09_meetings/HUNGARY_Sales_Review_2026/ISZE_HUNGARY_Sales_Review_FY2027.pptx
@@ -10260,7 +10260,7 @@
                 </a:solidFill>
                 <a:latin typeface="Calibri"/>
               </a:rPr>
-              <a:t>Brake parts / Injectors / Turbo: agree which category we tackle first, and what the joint action is.</a:t>
+              <a:t>Brake parts / Steering / Turbo: agree which category we tackle first, and what the joint action is.</a:t>
             </a:r>
           </a:p>
           <a:p>
@@ -10692,7 +10692,7 @@
                 </a:solidFill>
                 <a:latin typeface="Calibri"/>
               </a:rPr>
-              <a:t>Parts Performance — Injectors</a:t>
+              <a:t>Parts Performance — Steering</a:t>
             </a:r>
           </a:p>
           <a:p>
@@ -16029,7 +16029,7 @@
                 </a:solidFill>
                 <a:latin typeface="Calibri"/>
               </a:rPr>
-              <a:t>Parts Performance — CY H1 2026 vs CY H1 2025</a:t>
+              <a:t>Parts Performance — CY H1 2026 vs CY H1 2025 (commercial, ex-warranty)</a:t>
             </a:r>
           </a:p>
         </p:txBody>
@@ -16260,7 +16260,7 @@
                 </a:solidFill>
                 <a:latin typeface="Calibri"/>
               </a:rPr>
-              <a:t>Parts billing EUR 171K against EUR 169K a year earlier — +0.9%. After EUR 1K of credit notes the net figure is EUR 170K.</a:t>
+              <a:t>Commercial parts billing (warranty/campaign excluded) EUR 123K against EUR 122K a year earlier — +0.3% (CY H1 2026 vs CY H1 2025, Jan–Jun).</a:t>
             </a:r>
           </a:p>
           <a:p>
@@ -16288,7 +16288,7 @@
                 </a:solidFill>
                 <a:latin typeface="Calibri"/>
               </a:rPr>
-              <a:t>Biggest declines: Brake parts EUR -9K; Injectors EUR -2K; Turbo EUR -1K.</a:t>
+              <a:t>Largest PN drops: 8983767550 (ROTOR; DISC BRK,FRT) EUR -6K, 79 fewer pcs; 8977993753 (LAMP ASM; HEAD) EUR -3K, 9 fewer pcs; 8975546610 (PAD KIT; CALIPER,DIS) [TF*] EUR -2K, 21 fewer pcs.</a:t>
             </a:r>
           </a:p>
           <a:p>
@@ -16316,7 +16316,7 @@
                 </a:solidFill>
                 <a:latin typeface="Calibri"/>
               </a:rPr>
-              <a:t>Growing: Air conditioning +39%, Electrical sensors +20%, Body parts +9%.</a:t>
+              <a:t>Largest PN gains: 8974995480 (FILTER; ACL) [TFR,TFS,UCR,UCS] EUR 3K, 154 more pcs; 1884057520 (T AXLE OIL  20L) EUR 2K, 14 more pcs; 8975595830 (PANEL; SIDE GATE) EUR 2K, 8 more pcs.</a:t>
             </a:r>
           </a:p>
           <a:p>
@@ -16344,7 +16344,7 @@
                 </a:solidFill>
                 <a:latin typeface="Calibri"/>
               </a:rPr>
-              <a:t>CY H1 2026 against CY H1 2025 (calendar Jan–Jun, Q1+Q2) — like-for-like half-year cut.</a:t>
+              <a:t>Credit notes of EUR 1K stay on the net bridge (net EUR 170K); not in the movers.</a:t>
             </a:r>
           </a:p>
         </p:txBody>
@@ -19223,7 +19223,7 @@
                 </a:solidFill>
                 <a:latin typeface="Calibri"/>
               </a:rPr>
-              <a:t>Brake parts — CY H1 2026 vs CY H1 2025</a:t>
+              <a:t>Brake parts — CY H1 2026 vs CY H1 2025 (commercial, ex-warranty)</a:t>
             </a:r>
           </a:p>
         </p:txBody>
@@ -19337,7 +19337,7 @@
               </a:spcAft>
             </a:pPr>
             <a:r>
-              <a:rPr sz="1400" b="1">
+              <a:rPr sz="1300" b="1">
                 <a:solidFill>
                   <a:srgbClr val="CC0E1E"/>
                 </a:solidFill>
@@ -19346,13 +19346,13 @@
               <a:t>—  </a:t>
             </a:r>
             <a:r>
-              <a:rPr sz="1400">
+              <a:rPr sz="1300">
                 <a:solidFill>
                   <a:srgbClr val="1A1A1A"/>
                 </a:solidFill>
                 <a:latin typeface="Calibri"/>
               </a:rPr>
-              <a:t>EUR 22,944 (CY H1 2025) to EUR 13,910 (CY H1 2026), down EUR 9,034 (-39%).</a:t>
+              <a:t>EUR 18,443 (CY H1 2025) to EUR 10,718 (CY H1 2026), down EUR 7,725 (-42%).</a:t>
             </a:r>
           </a:p>
           <a:p>
@@ -19365,7 +19365,7 @@
               </a:spcAft>
             </a:pPr>
             <a:r>
-              <a:rPr sz="1400" b="1">
+              <a:rPr sz="1300" b="1">
                 <a:solidFill>
                   <a:srgbClr val="CC0E1E"/>
                 </a:solidFill>
@@ -19374,13 +19374,13 @@
               <a:t>—  </a:t>
             </a:r>
             <a:r>
-              <a:rPr sz="1400">
+              <a:rPr sz="1300">
                 <a:solidFill>
                   <a:srgbClr val="1A1A1A"/>
                 </a:solidFill>
                 <a:latin typeface="Calibri"/>
               </a:rPr>
-              <a:t>8983767550 (ROTOR; DISC BRK,FRT): EUR 11,764 to EUR 5,544, 79 fewer pieces.</a:t>
+              <a:t>Largest part numbers driving the decline (by EUR):</a:t>
             </a:r>
           </a:p>
           <a:p>
@@ -19393,7 +19393,7 @@
               </a:spcAft>
             </a:pPr>
             <a:r>
-              <a:rPr sz="1400" b="1">
+              <a:rPr sz="1300" b="1">
                 <a:solidFill>
                   <a:srgbClr val="CC0E1E"/>
                 </a:solidFill>
@@ -19402,13 +19402,13 @@
               <a:t>—  </a:t>
             </a:r>
             <a:r>
-              <a:rPr sz="1400">
+              <a:rPr sz="1300">
                 <a:solidFill>
                   <a:srgbClr val="1A1A1A"/>
                 </a:solidFill>
                 <a:latin typeface="Calibri"/>
               </a:rPr>
-              <a:t>8975056801 (PAD KIT; CALIPER,DISC BRK,FRT): EUR 4,501 to EUR 2,561, 23 fewer pieces.</a:t>
+              <a:t>8983767550 (ROTOR; DISC BRK,FRT): EUR 11,764 to EUR 5,544, 79 fewer pieces.</a:t>
             </a:r>
           </a:p>
           <a:p>
@@ -19421,7 +19421,7 @@
               </a:spcAft>
             </a:pPr>
             <a:r>
-              <a:rPr sz="1400" b="1">
+              <a:rPr sz="1300" b="1">
                 <a:solidFill>
                   <a:srgbClr val="CC0E1E"/>
                 </a:solidFill>
@@ -19430,13 +19430,69 @@
               <a:t>—  </a:t>
             </a:r>
             <a:r>
-              <a:rPr sz="1400">
+              <a:rPr sz="1300">
                 <a:solidFill>
                   <a:srgbClr val="1A1A1A"/>
                 </a:solidFill>
                 <a:latin typeface="Calibri"/>
               </a:rPr>
-              <a:t>8975546610 (PAD KIT; CALIPER,DISC BRK,FRT): EUR 2,500 to EUR 742, 21 fewer pieces.</a:t>
+              <a:t>8975546610 (PAD KIT; CALIPER,DISC BRK,FRT · TF*): EUR 2,500 to EUR 742, 21 fewer pieces.</a:t>
+            </a:r>
+          </a:p>
+          <a:p>
+            <a:pPr>
+              <a:lnSpc>
+                <a:spcPct val="125000"/>
+              </a:lnSpc>
+              <a:spcAft>
+                <a:spcPts val="1000"/>
+              </a:spcAft>
+            </a:pPr>
+            <a:r>
+              <a:rPr sz="1300" b="1">
+                <a:solidFill>
+                  <a:srgbClr val="CC0E1E"/>
+                </a:solidFill>
+                <a:latin typeface="Calibri"/>
+              </a:rPr>
+              <a:t>—  </a:t>
+            </a:r>
+            <a:r>
+              <a:rPr sz="1300">
+                <a:solidFill>
+                  <a:srgbClr val="1A1A1A"/>
+                </a:solidFill>
+                <a:latin typeface="Calibri"/>
+              </a:rPr>
+              <a:t>8978279610 (PAD KIT; DISC BRK,W/O SHIM &amp; CLIP): EUR 2,015 to EUR 1,311, 10 fewer pieces.</a:t>
+            </a:r>
+          </a:p>
+          <a:p>
+            <a:pPr>
+              <a:lnSpc>
+                <a:spcPct val="125000"/>
+              </a:lnSpc>
+              <a:spcAft>
+                <a:spcPts val="1000"/>
+              </a:spcAft>
+            </a:pPr>
+            <a:r>
+              <a:rPr sz="1300" b="1">
+                <a:solidFill>
+                  <a:srgbClr val="CC0E1E"/>
+                </a:solidFill>
+                <a:latin typeface="Calibri"/>
+              </a:rPr>
+              <a:t>—  </a:t>
+            </a:r>
+            <a:r>
+              <a:rPr sz="1300">
+                <a:solidFill>
+                  <a:srgbClr val="1A1A1A"/>
+                </a:solidFill>
+                <a:latin typeface="Calibri"/>
+              </a:rPr>
+              <a:t>8976526220 (PAD KIT; CALIPER,DISC BRK,FRT): EUR 644 to EUR 0, 10 fewer pieces.</a:t>
             </a:r>
           </a:p>
         </p:txBody>
@@ -19706,7 +19762,7 @@
                 </a:solidFill>
                 <a:latin typeface="Calibri"/>
               </a:rPr>
-              <a:t>PARTS PERFORMANCE — INJECTORS</a:t>
+              <a:t>PARTS PERFORMANCE — STEERING</a:t>
             </a:r>
           </a:p>
         </p:txBody>
@@ -19741,7 +19797,7 @@
                 </a:solidFill>
                 <a:latin typeface="Calibri"/>
               </a:rPr>
-              <a:t>Injectors — CY H1 2026 vs CY H1 2025</a:t>
+              <a:t>Steering — CY H1 2026 vs CY H1 2025 (commercial, ex-warranty)</a:t>
             </a:r>
           </a:p>
         </p:txBody>
@@ -19855,7 +19911,7 @@
               </a:spcAft>
             </a:pPr>
             <a:r>
-              <a:rPr sz="1400" b="1">
+              <a:rPr sz="1300" b="1">
                 <a:solidFill>
                   <a:srgbClr val="CC0E1E"/>
                 </a:solidFill>
@@ -19864,13 +19920,13 @@
               <a:t>—  </a:t>
             </a:r>
             <a:r>
-              <a:rPr sz="1400">
+              <a:rPr sz="1300">
                 <a:solidFill>
                   <a:srgbClr val="1A1A1A"/>
                 </a:solidFill>
                 <a:latin typeface="Calibri"/>
               </a:rPr>
-              <a:t>EUR 3,090 (CY H1 2025) to EUR 1,525 (CY H1 2026), down EUR 1,565 (-51%).</a:t>
+              <a:t>EUR 2,096 (CY H1 2025) to EUR 991 (CY H1 2026), down EUR 1,105 (-53%).</a:t>
             </a:r>
           </a:p>
           <a:p>
@@ -19883,7 +19939,7 @@
               </a:spcAft>
             </a:pPr>
             <a:r>
-              <a:rPr sz="1400" b="1">
+              <a:rPr sz="1300" b="1">
                 <a:solidFill>
                   <a:srgbClr val="CC0E1E"/>
                 </a:solidFill>
@@ -19892,73 +19948,15 @@
               <a:t>—  </a:t>
             </a:r>
             <a:r>
-              <a:rPr sz="1400">
+              <a:rPr sz="1300">
                 <a:solidFill>
                   <a:srgbClr val="1A1A1A"/>
                 </a:solidFill>
                 <a:latin typeface="Calibri"/>
               </a:rPr>
-              <a:t>8983842670 (INJECTOR ASM; DEF DCM): EUR 2,051 to EUR 632, 9 fewer pieces.</a:t>
-            </a:r>
-          </a:p>
-        </p:txBody>
-      </p:sp>
-      <p:sp>
-        <p:nvSpPr>
-          <p:cNvPr id="9" name="TextBox 8"/>
-          <p:cNvSpPr txBox="1"/>
-          <p:nvPr/>
-        </p:nvSpPr>
-        <p:spPr>
-          <a:xfrm>
-            <a:off x="292608" y="3840480"/>
-            <a:ext cx="8595360" cy="274320"/>
-          </a:xfrm>
-          <a:prstGeom prst="rect">
-            <a:avLst/>
-          </a:prstGeom>
-          <a:noFill/>
-        </p:spPr>
-        <p:txBody>
-          <a:bodyPr wrap="square">
-            <a:spAutoFit/>
-          </a:bodyPr>
-          <a:lstStyle/>
-          <a:p>
-            <a:pPr algn="l"/>
-            <a:r>
-              <a:rPr sz="1300" b="1">
-                <a:solidFill>
-                  <a:srgbClr val="CC0E1E"/>
-                </a:solidFill>
-                <a:latin typeface="Calibri"/>
-              </a:rPr>
-              <a:t>Questions for us to work through together</a:t>
-            </a:r>
-          </a:p>
-        </p:txBody>
-      </p:sp>
-      <p:sp>
-        <p:nvSpPr>
-          <p:cNvPr id="10" name="TextBox 9"/>
-          <p:cNvSpPr txBox="1"/>
-          <p:nvPr/>
-        </p:nvSpPr>
-        <p:spPr>
-          <a:xfrm>
-            <a:off x="292608" y="4160520"/>
-            <a:ext cx="11612880" cy="1737360"/>
-          </a:xfrm>
-          <a:prstGeom prst="rect">
-            <a:avLst/>
-          </a:prstGeom>
-          <a:noFill/>
-        </p:spPr>
-        <p:txBody>
-          <a:bodyPr wrap="square">
-            <a:spAutoFit/>
-          </a:bodyPr>
-          <a:lstStyle/>
+              <a:t>Largest part numbers driving the decline (by EUR):</a:t>
+            </a:r>
+          </a:p>
           <a:p>
             <a:pPr>
               <a:lnSpc>
@@ -19969,7 +19967,7 @@
               </a:spcAft>
             </a:pPr>
             <a:r>
-              <a:rPr sz="1400" b="1">
+              <a:rPr sz="1300" b="1">
                 <a:solidFill>
                   <a:srgbClr val="CC0E1E"/>
                 </a:solidFill>
@@ -19978,13 +19976,13 @@
               <a:t>—  </a:t>
             </a:r>
             <a:r>
-              <a:rPr sz="1400">
+              <a:rPr sz="1300">
                 <a:solidFill>
                   <a:srgbClr val="1A1A1A"/>
                 </a:solidFill>
                 <a:latin typeface="Calibri"/>
               </a:rPr>
-              <a:t>Is this fewer failures, or repairs moving out of the network?</a:t>
+              <a:t>8979461321 (STEERING UNIT): EUR 624 to EUR 0, 1 fewer pieces.</a:t>
             </a:r>
           </a:p>
           <a:p>
@@ -19997,7 +19995,7 @@
               </a:spcAft>
             </a:pPr>
             <a:r>
-              <a:rPr sz="1400" b="1">
+              <a:rPr sz="1300" b="1">
                 <a:solidFill>
                   <a:srgbClr val="CC0E1E"/>
                 </a:solidFill>
@@ -20006,13 +20004,13 @@
               <a:t>—  </a:t>
             </a:r>
             <a:r>
-              <a:rPr sz="1400">
+              <a:rPr sz="1300">
                 <a:solidFill>
                   <a:srgbClr val="1A1A1A"/>
                 </a:solidFill>
                 <a:latin typeface="Calibri"/>
               </a:rPr>
-              <a:t>Is the exchange/reman route competing with new parts here?</a:t>
+              <a:t>8979461642 (PUMP ASM; OIL,P/S): EUR 465 to EUR 0, 2 fewer pieces.</a:t>
             </a:r>
           </a:p>
           <a:p>
@@ -20025,6 +20023,120 @@
               </a:spcAft>
             </a:pPr>
             <a:r>
+              <a:rPr sz="1300" b="1">
+                <a:solidFill>
+                  <a:srgbClr val="CC0E1E"/>
+                </a:solidFill>
+                <a:latin typeface="Calibri"/>
+              </a:rPr>
+              <a:t>—  </a:t>
+            </a:r>
+            <a:r>
+              <a:rPr sz="1300">
+                <a:solidFill>
+                  <a:srgbClr val="1A1A1A"/>
+                </a:solidFill>
+                <a:latin typeface="Calibri"/>
+              </a:rPr>
+              <a:t>7552338510 (KNUCKLE; FRT AXLE): EUR 257 to EUR 0, 1 fewer pieces.</a:t>
+            </a:r>
+          </a:p>
+          <a:p>
+            <a:pPr>
+              <a:lnSpc>
+                <a:spcPct val="125000"/>
+              </a:lnSpc>
+              <a:spcAft>
+                <a:spcPts val="1000"/>
+              </a:spcAft>
+            </a:pPr>
+            <a:r>
+              <a:rPr sz="1300" b="1">
+                <a:solidFill>
+                  <a:srgbClr val="CC0E1E"/>
+                </a:solidFill>
+                <a:latin typeface="Calibri"/>
+              </a:rPr>
+              <a:t>—  </a:t>
+            </a:r>
+            <a:r>
+              <a:rPr sz="1300">
+                <a:solidFill>
+                  <a:srgbClr val="1A1A1A"/>
+                </a:solidFill>
+                <a:latin typeface="Calibri"/>
+              </a:rPr>
+              <a:t>8983039040 (KNUCKLE; FRT AXLE): EUR 186 to EUR 0, 1 fewer pieces.</a:t>
+            </a:r>
+          </a:p>
+        </p:txBody>
+      </p:sp>
+      <p:sp>
+        <p:nvSpPr>
+          <p:cNvPr id="9" name="TextBox 8"/>
+          <p:cNvSpPr txBox="1"/>
+          <p:nvPr/>
+        </p:nvSpPr>
+        <p:spPr>
+          <a:xfrm>
+            <a:off x="292608" y="3840480"/>
+            <a:ext cx="8595360" cy="274320"/>
+          </a:xfrm>
+          <a:prstGeom prst="rect">
+            <a:avLst/>
+          </a:prstGeom>
+          <a:noFill/>
+        </p:spPr>
+        <p:txBody>
+          <a:bodyPr wrap="square">
+            <a:spAutoFit/>
+          </a:bodyPr>
+          <a:lstStyle/>
+          <a:p>
+            <a:pPr algn="l"/>
+            <a:r>
+              <a:rPr sz="1300" b="1">
+                <a:solidFill>
+                  <a:srgbClr val="CC0E1E"/>
+                </a:solidFill>
+                <a:latin typeface="Calibri"/>
+              </a:rPr>
+              <a:t>Questions for us to work through together</a:t>
+            </a:r>
+          </a:p>
+        </p:txBody>
+      </p:sp>
+      <p:sp>
+        <p:nvSpPr>
+          <p:cNvPr id="10" name="TextBox 9"/>
+          <p:cNvSpPr txBox="1"/>
+          <p:nvPr/>
+        </p:nvSpPr>
+        <p:spPr>
+          <a:xfrm>
+            <a:off x="292608" y="4160520"/>
+            <a:ext cx="11612880" cy="1737360"/>
+          </a:xfrm>
+          <a:prstGeom prst="rect">
+            <a:avLst/>
+          </a:prstGeom>
+          <a:noFill/>
+        </p:spPr>
+        <p:txBody>
+          <a:bodyPr wrap="square">
+            <a:spAutoFit/>
+          </a:bodyPr>
+          <a:lstStyle/>
+          <a:p>
+            <a:pPr>
+              <a:lnSpc>
+                <a:spcPct val="125000"/>
+              </a:lnSpc>
+              <a:spcAft>
+                <a:spcPts val="1000"/>
+              </a:spcAft>
+            </a:pPr>
+            <a:r>
               <a:rPr sz="1400" b="1">
                 <a:solidFill>
                   <a:srgbClr val="CC0E1E"/>
@@ -20040,7 +20152,63 @@
                 </a:solidFill>
                 <a:latin typeface="Calibri"/>
               </a:rPr>
-              <a:t>Are dealers still quoting these part numbers, or have they dropped off the workshop menu?</a:t>
+              <a:t>Is this pricing against what the dealers can buy locally?</a:t>
+            </a:r>
+          </a:p>
+          <a:p>
+            <a:pPr>
+              <a:lnSpc>
+                <a:spcPct val="125000"/>
+              </a:lnSpc>
+              <a:spcAft>
+                <a:spcPts val="1000"/>
+              </a:spcAft>
+            </a:pPr>
+            <a:r>
+              <a:rPr sz="1400" b="1">
+                <a:solidFill>
+                  <a:srgbClr val="CC0E1E"/>
+                </a:solidFill>
+                <a:latin typeface="Calibri"/>
+              </a:rPr>
+              <a:t>—  </a:t>
+            </a:r>
+            <a:r>
+              <a:rPr sz="1400">
+                <a:solidFill>
+                  <a:srgbClr val="1A1A1A"/>
+                </a:solidFill>
+                <a:latin typeface="Calibri"/>
+              </a:rPr>
+              <a:t>Is any of this stock timing on your side rather than end demand?</a:t>
+            </a:r>
+          </a:p>
+          <a:p>
+            <a:pPr>
+              <a:lnSpc>
+                <a:spcPct val="125000"/>
+              </a:lnSpc>
+              <a:spcAft>
+                <a:spcPts val="1000"/>
+              </a:spcAft>
+            </a:pPr>
+            <a:r>
+              <a:rPr sz="1400" b="1">
+                <a:solidFill>
+                  <a:srgbClr val="CC0E1E"/>
+                </a:solidFill>
+                <a:latin typeface="Calibri"/>
+              </a:rPr>
+              <a:t>—  </a:t>
+            </a:r>
+            <a:r>
+              <a:rPr sz="1400">
+                <a:solidFill>
+                  <a:srgbClr val="1A1A1A"/>
+                </a:solidFill>
+                <a:latin typeface="Calibri"/>
+              </a:rPr>
+              <a:t>What would make the biggest difference to keep this business with us?</a:t>
             </a:r>
           </a:p>
         </p:txBody>
@@ -20203,7 +20371,7 @@
                 </a:solidFill>
                 <a:latin typeface="Calibri"/>
               </a:rPr>
-              <a:t>Turbo — CY H1 2026 vs CY H1 2025</a:t>
+              <a:t>Turbo — CY H1 2026 vs CY H1 2025 (commercial, ex-warranty)</a:t>
             </a:r>
           </a:p>
         </p:txBody>
@@ -20317,7 +20485,7 @@
               </a:spcAft>
             </a:pPr>
             <a:r>
-              <a:rPr sz="1400" b="1">
+              <a:rPr sz="1300" b="1">
                 <a:solidFill>
                   <a:srgbClr val="CC0E1E"/>
                 </a:solidFill>
@@ -20326,13 +20494,153 @@
               <a:t>—  </a:t>
             </a:r>
             <a:r>
-              <a:rPr sz="1400">
+              <a:rPr sz="1300">
                 <a:solidFill>
                   <a:srgbClr val="1A1A1A"/>
                 </a:solidFill>
                 <a:latin typeface="Calibri"/>
               </a:rPr>
               <a:t>EUR 1,059 (CY H1 2025) to EUR 12 (CY H1 2026), down EUR 1,047 (-99%).</a:t>
+            </a:r>
+          </a:p>
+          <a:p>
+            <a:pPr>
+              <a:lnSpc>
+                <a:spcPct val="125000"/>
+              </a:lnSpc>
+              <a:spcAft>
+                <a:spcPts val="1000"/>
+              </a:spcAft>
+            </a:pPr>
+            <a:r>
+              <a:rPr sz="1300" b="1">
+                <a:solidFill>
+                  <a:srgbClr val="CC0E1E"/>
+                </a:solidFill>
+                <a:latin typeface="Calibri"/>
+              </a:rPr>
+              <a:t>—  </a:t>
+            </a:r>
+            <a:r>
+              <a:rPr sz="1300">
+                <a:solidFill>
+                  <a:srgbClr val="1A1A1A"/>
+                </a:solidFill>
+                <a:latin typeface="Calibri"/>
+              </a:rPr>
+              <a:t>Largest part numbers driving the decline (by EUR):</a:t>
+            </a:r>
+          </a:p>
+          <a:p>
+            <a:pPr>
+              <a:lnSpc>
+                <a:spcPct val="125000"/>
+              </a:lnSpc>
+              <a:spcAft>
+                <a:spcPts val="1000"/>
+              </a:spcAft>
+            </a:pPr>
+            <a:r>
+              <a:rPr sz="1300" b="1">
+                <a:solidFill>
+                  <a:srgbClr val="CC0E1E"/>
+                </a:solidFill>
+                <a:latin typeface="Calibri"/>
+              </a:rPr>
+              <a:t>—  </a:t>
+            </a:r>
+            <a:r>
+              <a:rPr sz="1300">
+                <a:solidFill>
+                  <a:srgbClr val="1A1A1A"/>
+                </a:solidFill>
+                <a:latin typeface="Calibri"/>
+              </a:rPr>
+              <a:t>8974985741 (TURBOCHARGER ASM): EUR 857 to EUR 0, 1 fewer pieces.</a:t>
+            </a:r>
+          </a:p>
+          <a:p>
+            <a:pPr>
+              <a:lnSpc>
+                <a:spcPct val="125000"/>
+              </a:lnSpc>
+              <a:spcAft>
+                <a:spcPts val="1000"/>
+              </a:spcAft>
+            </a:pPr>
+            <a:r>
+              <a:rPr sz="1300" b="1">
+                <a:solidFill>
+                  <a:srgbClr val="CC0E1E"/>
+                </a:solidFill>
+                <a:latin typeface="Calibri"/>
+              </a:rPr>
+              <a:t>—  </a:t>
+            </a:r>
+            <a:r>
+              <a:rPr sz="1300">
+                <a:solidFill>
+                  <a:srgbClr val="1A1A1A"/>
+                </a:solidFill>
+                <a:latin typeface="Calibri"/>
+              </a:rPr>
+              <a:t>8975334720 (PIPE; OIL RETURN,TURBOCHARGER): EUR 119 to EUR 0, 2 fewer pieces.</a:t>
+            </a:r>
+          </a:p>
+          <a:p>
+            <a:pPr>
+              <a:lnSpc>
+                <a:spcPct val="125000"/>
+              </a:lnSpc>
+              <a:spcAft>
+                <a:spcPts val="1000"/>
+              </a:spcAft>
+            </a:pPr>
+            <a:r>
+              <a:rPr sz="1300" b="1">
+                <a:solidFill>
+                  <a:srgbClr val="CC0E1E"/>
+                </a:solidFill>
+                <a:latin typeface="Calibri"/>
+              </a:rPr>
+              <a:t>—  </a:t>
+            </a:r>
+            <a:r>
+              <a:rPr sz="1300">
+                <a:solidFill>
+                  <a:srgbClr val="1A1A1A"/>
+                </a:solidFill>
+                <a:latin typeface="Calibri"/>
+              </a:rPr>
+              <a:t>8981993530 (SENSOR; TURBOCHARGER): EUR 48 to EUR 0, 1 fewer pieces.</a:t>
+            </a:r>
+          </a:p>
+          <a:p>
+            <a:pPr>
+              <a:lnSpc>
+                <a:spcPct val="125000"/>
+              </a:lnSpc>
+              <a:spcAft>
+                <a:spcPts val="1000"/>
+              </a:spcAft>
+            </a:pPr>
+            <a:r>
+              <a:rPr sz="1300" b="1">
+                <a:solidFill>
+                  <a:srgbClr val="CC0E1E"/>
+                </a:solidFill>
+                <a:latin typeface="Calibri"/>
+              </a:rPr>
+              <a:t>—  </a:t>
+            </a:r>
+            <a:r>
+              <a:rPr sz="1300">
+                <a:solidFill>
+                  <a:srgbClr val="1A1A1A"/>
+                </a:solidFill>
+                <a:latin typeface="Calibri"/>
+              </a:rPr>
+              <a:t>8982480882 (GASKET; TURBOCHARGER TO EXH MANIF): EUR 20 to EUR 0, 5 fewer pieces.</a:t>
             </a:r>
           </a:p>
         </p:txBody>
@@ -20637,7 +20945,7 @@
                 </a:solidFill>
                 <a:latin typeface="Calibri"/>
               </a:rPr>
-              <a:t>Where volume grew — CY H1 2026 vs CY H1 2025</a:t>
+              <a:t>Where volume grew — CY H1 2026 vs CY H1 2025 (commercial, ex-warranty)</a:t>
             </a:r>
           </a:p>
         </p:txBody>
@@ -20739,10 +21047,12 @@
                 <a:tableStyleId>{5C22544A-7EE6-4342-B048-85BDC9FD1C3A}</a:tableStyleId>
               </a:tblPr>
               <a:tblGrid>
-                <a:gridCol w="2194560"/>
-                <a:gridCol w="4480560"/>
-                <a:gridCol w="2468880"/>
-                <a:gridCol w="2468880"/>
+                <a:gridCol w="1737360"/>
+                <a:gridCol w="2926080"/>
+                <a:gridCol w="1645920"/>
+                <a:gridCol w="1737360"/>
+                <a:gridCol w="1737360"/>
+                <a:gridCol w="1828800"/>
               </a:tblGrid>
               <a:tr h="339634">
                 <a:tc>
@@ -20752,7 +21062,7 @@
                     <a:p>
                       <a:pPr algn="l"/>
                       <a:r>
-                        <a:rPr sz="1200" b="1">
+                        <a:rPr sz="1100" b="1">
                           <a:solidFill>
                             <a:srgbClr val="FFFFFF"/>
                           </a:solidFill>
@@ -20775,7 +21085,7 @@
                     <a:p>
                       <a:pPr algn="l"/>
                       <a:r>
-                        <a:rPr sz="1200" b="1">
+                        <a:rPr sz="1100" b="1">
                           <a:solidFill>
                             <a:srgbClr val="FFFFFF"/>
                           </a:solidFill>
@@ -20796,9 +21106,32 @@
                     <a:bodyPr/>
                     <a:lstStyle/>
                     <a:p>
+                      <a:pPr algn="l"/>
+                      <a:r>
+                        <a:rPr sz="1100" b="1">
+                          <a:solidFill>
+                            <a:srgbClr val="FFFFFF"/>
+                          </a:solidFill>
+                          <a:latin typeface="Calibri"/>
+                        </a:rPr>
+                        <a:t>Model</a:t>
+                      </a:r>
+                    </a:p>
+                  </a:txBody>
+                  <a:tcPr anchor="ctr" marL="73152" marR="73152">
+                    <a:solidFill>
+                      <a:srgbClr val="CC0E1E"/>
+                    </a:solidFill>
+                  </a:tcPr>
+                </a:tc>
+                <a:tc>
+                  <a:txBody>
+                    <a:bodyPr/>
+                    <a:lstStyle/>
+                    <a:p>
                       <a:pPr algn="r"/>
                       <a:r>
-                        <a:rPr sz="1200" b="1">
+                        <a:rPr sz="1100" b="1">
                           <a:solidFill>
                             <a:srgbClr val="FFFFFF"/>
                           </a:solidFill>
@@ -20821,13 +21154,36 @@
                     <a:p>
                       <a:pPr algn="r"/>
                       <a:r>
-                        <a:rPr sz="1200" b="1">
+                        <a:rPr sz="1100" b="1">
                           <a:solidFill>
                             <a:srgbClr val="FFFFFF"/>
                           </a:solidFill>
                           <a:latin typeface="Calibri"/>
                         </a:rPr>
                         <a:t>CY H1 2026</a:t>
+                      </a:r>
+                    </a:p>
+                  </a:txBody>
+                  <a:tcPr anchor="ctr" marL="73152" marR="73152">
+                    <a:solidFill>
+                      <a:srgbClr val="CC0E1E"/>
+                    </a:solidFill>
+                  </a:tcPr>
+                </a:tc>
+                <a:tc>
+                  <a:txBody>
+                    <a:bodyPr/>
+                    <a:lstStyle/>
+                    <a:p>
+                      <a:pPr algn="r"/>
+                      <a:r>
+                        <a:rPr sz="1100" b="1">
+                          <a:solidFill>
+                            <a:srgbClr val="FFFFFF"/>
+                          </a:solidFill>
+                          <a:latin typeface="Calibri"/>
+                        </a:rPr>
+                        <a:t>Δ EUR</a:t>
                       </a:r>
                     </a:p>
                   </a:txBody>
@@ -20846,7 +21202,7 @@
                     <a:p>
                       <a:pPr algn="l"/>
                       <a:r>
-                        <a:rPr sz="1200" b="0">
+                        <a:rPr sz="1100" b="0">
                           <a:solidFill>
                             <a:srgbClr val="1A1A1A"/>
                           </a:solidFill>
@@ -20869,7 +21225,7 @@
                     <a:p>
                       <a:pPr algn="l"/>
                       <a:r>
-                        <a:rPr sz="1200" b="0">
+                        <a:rPr sz="1100" b="0">
                           <a:solidFill>
                             <a:srgbClr val="1A1A1A"/>
                           </a:solidFill>
@@ -20890,9 +21246,32 @@
                     <a:bodyPr/>
                     <a:lstStyle/>
                     <a:p>
+                      <a:pPr algn="l"/>
+                      <a:r>
+                        <a:rPr sz="1100" b="0">
+                          <a:solidFill>
+                            <a:srgbClr val="1A1A1A"/>
+                          </a:solidFill>
+                          <a:latin typeface="Calibri"/>
+                        </a:rPr>
+                        <a:t>TFR,TFS,UCR,UCS</a:t>
+                      </a:r>
+                    </a:p>
+                  </a:txBody>
+                  <a:tcPr anchor="ctr" marL="73152" marR="73152">
+                    <a:solidFill>
+                      <a:srgbClr val="FFFFFF"/>
+                    </a:solidFill>
+                  </a:tcPr>
+                </a:tc>
+                <a:tc>
+                  <a:txBody>
+                    <a:bodyPr/>
+                    <a:lstStyle/>
+                    <a:p>
                       <a:pPr algn="r"/>
                       <a:r>
-                        <a:rPr sz="1200" b="0">
+                        <a:rPr sz="1100" b="0">
                           <a:solidFill>
                             <a:srgbClr val="1A1A1A"/>
                           </a:solidFill>
@@ -20915,13 +21294,36 @@
                     <a:p>
                       <a:pPr algn="r"/>
                       <a:r>
-                        <a:rPr sz="1200" b="0">
+                        <a:rPr sz="1100" b="0">
                           <a:solidFill>
                             <a:srgbClr val="1A1A1A"/>
                           </a:solidFill>
                           <a:latin typeface="Calibri"/>
                         </a:rPr>
                         <a:t>EUR 8,390</a:t>
+                      </a:r>
+                    </a:p>
+                  </a:txBody>
+                  <a:tcPr anchor="ctr" marL="73152" marR="73152">
+                    <a:solidFill>
+                      <a:srgbClr val="FFFFFF"/>
+                    </a:solidFill>
+                  </a:tcPr>
+                </a:tc>
+                <a:tc>
+                  <a:txBody>
+                    <a:bodyPr/>
+                    <a:lstStyle/>
+                    <a:p>
+                      <a:pPr algn="r"/>
+                      <a:r>
+                        <a:rPr sz="1100" b="0">
+                          <a:solidFill>
+                            <a:srgbClr val="1A1A1A"/>
+                          </a:solidFill>
+                          <a:latin typeface="Calibri"/>
+                        </a:rPr>
+                        <a:t>EUR 3,237</a:t>
                       </a:r>
                     </a:p>
                   </a:txBody>
@@ -20940,7 +21342,7 @@
                     <a:p>
                       <a:pPr algn="l"/>
                       <a:r>
-                        <a:rPr sz="1200" b="0">
+                        <a:rPr sz="1100" b="0">
                           <a:solidFill>
                             <a:srgbClr val="1A1A1A"/>
                           </a:solidFill>
@@ -20963,7 +21365,7 @@
                     <a:p>
                       <a:pPr algn="l"/>
                       <a:r>
-                        <a:rPr sz="1200" b="0">
+                        <a:rPr sz="1100" b="0">
                           <a:solidFill>
                             <a:srgbClr val="1A1A1A"/>
                           </a:solidFill>
@@ -20984,9 +21386,32 @@
                     <a:bodyPr/>
                     <a:lstStyle/>
                     <a:p>
+                      <a:pPr algn="l"/>
+                      <a:r>
+                        <a:rPr sz="1100" b="0">
+                          <a:solidFill>
+                            <a:srgbClr val="1A1A1A"/>
+                          </a:solidFill>
+                          <a:latin typeface="Calibri"/>
+                        </a:rPr>
+                        <a:t>—</a:t>
+                      </a:r>
+                    </a:p>
+                  </a:txBody>
+                  <a:tcPr anchor="ctr" marL="73152" marR="73152">
+                    <a:solidFill>
+                      <a:srgbClr val="ECECEC"/>
+                    </a:solidFill>
+                  </a:tcPr>
+                </a:tc>
+                <a:tc>
+                  <a:txBody>
+                    <a:bodyPr/>
+                    <a:lstStyle/>
+                    <a:p>
                       <a:pPr algn="r"/>
                       <a:r>
-                        <a:rPr sz="1200" b="0">
+                        <a:rPr sz="1100" b="0">
                           <a:solidFill>
                             <a:srgbClr val="1A1A1A"/>
                           </a:solidFill>
@@ -21009,13 +21434,36 @@
                     <a:p>
                       <a:pPr algn="r"/>
                       <a:r>
-                        <a:rPr sz="1200" b="0">
+                        <a:rPr sz="1100" b="0">
                           <a:solidFill>
                             <a:srgbClr val="1A1A1A"/>
                           </a:solidFill>
                           <a:latin typeface="Calibri"/>
                         </a:rPr>
                         <a:t>EUR 3,801</a:t>
+                      </a:r>
+                    </a:p>
+                  </a:txBody>
+                  <a:tcPr anchor="ctr" marL="73152" marR="73152">
+                    <a:solidFill>
+                      <a:srgbClr val="ECECEC"/>
+                    </a:solidFill>
+                  </a:tcPr>
+                </a:tc>
+                <a:tc>
+                  <a:txBody>
+                    <a:bodyPr/>
+                    <a:lstStyle/>
+                    <a:p>
+                      <a:pPr algn="r"/>
+                      <a:r>
+                        <a:rPr sz="1100" b="0">
+                          <a:solidFill>
+                            <a:srgbClr val="1A1A1A"/>
+                          </a:solidFill>
+                          <a:latin typeface="Calibri"/>
+                        </a:rPr>
+                        <a:t>EUR 2,098</a:t>
                       </a:r>
                     </a:p>
                   </a:txBody>
@@ -21034,13 +21482,13 @@
                     <a:p>
                       <a:pPr algn="l"/>
                       <a:r>
-                        <a:rPr sz="1200" b="0">
+                        <a:rPr sz="1100" b="0">
                           <a:solidFill>
                             <a:srgbClr val="1A1A1A"/>
                           </a:solidFill>
                           <a:latin typeface="Calibri"/>
                         </a:rPr>
-                        <a:t>7552348290</a:t>
+                        <a:t>8975595830</a:t>
                       </a:r>
                     </a:p>
                   </a:txBody>
@@ -21057,13 +21505,36 @@
                     <a:p>
                       <a:pPr algn="l"/>
                       <a:r>
-                        <a:rPr sz="1200" b="0">
+                        <a:rPr sz="1100" b="0">
                           <a:solidFill>
                             <a:srgbClr val="1A1A1A"/>
                           </a:solidFill>
                           <a:latin typeface="Calibri"/>
                         </a:rPr>
-                        <a:t>STEERING UNIT</a:t>
+                        <a:t>PANEL; SIDE GATE</a:t>
+                      </a:r>
+                    </a:p>
+                  </a:txBody>
+                  <a:tcPr anchor="ctr" marL="73152" marR="73152">
+                    <a:solidFill>
+                      <a:srgbClr val="FFFFFF"/>
+                    </a:solidFill>
+                  </a:tcPr>
+                </a:tc>
+                <a:tc>
+                  <a:txBody>
+                    <a:bodyPr/>
+                    <a:lstStyle/>
+                    <a:p>
+                      <a:pPr algn="l"/>
+                      <a:r>
+                        <a:rPr sz="1100" b="0">
+                          <a:solidFill>
+                            <a:srgbClr val="1A1A1A"/>
+                          </a:solidFill>
+                          <a:latin typeface="Calibri"/>
+                        </a:rPr>
+                        <a:t>—</a:t>
                       </a:r>
                     </a:p>
                   </a:txBody>
@@ -21080,13 +21551,13 @@
                     <a:p>
                       <a:pPr algn="r"/>
                       <a:r>
-                        <a:rPr sz="1200" b="0">
+                        <a:rPr sz="1100" b="0">
                           <a:solidFill>
                             <a:srgbClr val="1A1A1A"/>
                           </a:solidFill>
                           <a:latin typeface="Calibri"/>
                         </a:rPr>
-                        <a:t>EUR 19,839</a:t>
+                        <a:t>EUR 430</a:t>
                       </a:r>
                     </a:p>
                   </a:txBody>
@@ -21103,13 +21574,36 @@
                     <a:p>
                       <a:pPr algn="r"/>
                       <a:r>
-                        <a:rPr sz="1200" b="0">
+                        <a:rPr sz="1100" b="0">
                           <a:solidFill>
                             <a:srgbClr val="1A1A1A"/>
                           </a:solidFill>
                           <a:latin typeface="Calibri"/>
                         </a:rPr>
-                        <a:t>EUR 21,823</a:t>
+                        <a:t>EUR 2,130</a:t>
+                      </a:r>
+                    </a:p>
+                  </a:txBody>
+                  <a:tcPr anchor="ctr" marL="73152" marR="73152">
+                    <a:solidFill>
+                      <a:srgbClr val="FFFFFF"/>
+                    </a:solidFill>
+                  </a:tcPr>
+                </a:tc>
+                <a:tc>
+                  <a:txBody>
+                    <a:bodyPr/>
+                    <a:lstStyle/>
+                    <a:p>
+                      <a:pPr algn="r"/>
+                      <a:r>
+                        <a:rPr sz="1100" b="0">
+                          <a:solidFill>
+                            <a:srgbClr val="1A1A1A"/>
+                          </a:solidFill>
+                          <a:latin typeface="Calibri"/>
+                        </a:rPr>
+                        <a:t>EUR 1,700</a:t>
                       </a:r>
                     </a:p>
                   </a:txBody>
@@ -21128,13 +21622,13 @@
                     <a:p>
                       <a:pPr algn="l"/>
                       <a:r>
-                        <a:rPr sz="1200" b="0">
+                        <a:rPr sz="1100" b="0">
                           <a:solidFill>
                             <a:srgbClr val="1A1A1A"/>
                           </a:solidFill>
                           <a:latin typeface="Calibri"/>
                         </a:rPr>
-                        <a:t>8975595830</a:t>
+                        <a:t>8983320160</a:t>
                       </a:r>
                     </a:p>
                   </a:txBody>
@@ -21151,13 +21645,36 @@
                     <a:p>
                       <a:pPr algn="l"/>
                       <a:r>
-                        <a:rPr sz="1200" b="0">
+                        <a:rPr sz="1100" b="0">
                           <a:solidFill>
                             <a:srgbClr val="1A1A1A"/>
                           </a:solidFill>
                           <a:latin typeface="Calibri"/>
                         </a:rPr>
-                        <a:t>PANEL; SIDE GATE</a:t>
+                        <a:t>VALVE; EGR</a:t>
+                      </a:r>
+                    </a:p>
+                  </a:txBody>
+                  <a:tcPr anchor="ctr" marL="73152" marR="73152">
+                    <a:solidFill>
+                      <a:srgbClr val="ECECEC"/>
+                    </a:solidFill>
+                  </a:tcPr>
+                </a:tc>
+                <a:tc>
+                  <a:txBody>
+                    <a:bodyPr/>
+                    <a:lstStyle/>
+                    <a:p>
+                      <a:pPr algn="l"/>
+                      <a:r>
+                        <a:rPr sz="1100" b="0">
+                          <a:solidFill>
+                            <a:srgbClr val="1A1A1A"/>
+                          </a:solidFill>
+                          <a:latin typeface="Calibri"/>
+                        </a:rPr>
+                        <a:t>—</a:t>
                       </a:r>
                     </a:p>
                   </a:txBody>
@@ -21174,13 +21691,13 @@
                     <a:p>
                       <a:pPr algn="r"/>
                       <a:r>
-                        <a:rPr sz="1200" b="0">
+                        <a:rPr sz="1100" b="0">
                           <a:solidFill>
                             <a:srgbClr val="1A1A1A"/>
                           </a:solidFill>
                           <a:latin typeface="Calibri"/>
                         </a:rPr>
-                        <a:t>EUR 430</a:t>
+                        <a:t>EUR 220</a:t>
                       </a:r>
                     </a:p>
                   </a:txBody>
@@ -21197,13 +21714,36 @@
                     <a:p>
                       <a:pPr algn="r"/>
                       <a:r>
-                        <a:rPr sz="1200" b="0">
+                        <a:rPr sz="1100" b="0">
                           <a:solidFill>
                             <a:srgbClr val="1A1A1A"/>
                           </a:solidFill>
                           <a:latin typeface="Calibri"/>
                         </a:rPr>
-                        <a:t>EUR 2,130</a:t>
+                        <a:t>EUR 1,397</a:t>
+                      </a:r>
+                    </a:p>
+                  </a:txBody>
+                  <a:tcPr anchor="ctr" marL="73152" marR="73152">
+                    <a:solidFill>
+                      <a:srgbClr val="ECECEC"/>
+                    </a:solidFill>
+                  </a:tcPr>
+                </a:tc>
+                <a:tc>
+                  <a:txBody>
+                    <a:bodyPr/>
+                    <a:lstStyle/>
+                    <a:p>
+                      <a:pPr algn="r"/>
+                      <a:r>
+                        <a:rPr sz="1100" b="0">
+                          <a:solidFill>
+                            <a:srgbClr val="1A1A1A"/>
+                          </a:solidFill>
+                          <a:latin typeface="Calibri"/>
+                        </a:rPr>
+                        <a:t>EUR 1,178</a:t>
                       </a:r>
                     </a:p>
                   </a:txBody>
@@ -21222,13 +21762,13 @@
                     <a:p>
                       <a:pPr algn="l"/>
                       <a:r>
-                        <a:rPr sz="1200" b="0">
+                        <a:rPr sz="1100" b="0">
                           <a:solidFill>
                             <a:srgbClr val="1A1A1A"/>
                           </a:solidFill>
                           <a:latin typeface="Calibri"/>
                         </a:rPr>
-                        <a:t>8983320160</a:t>
+                        <a:t>8978249035</a:t>
                       </a:r>
                     </a:p>
                   </a:txBody>
@@ -21245,13 +21785,36 @@
                     <a:p>
                       <a:pPr algn="l"/>
                       <a:r>
-                        <a:rPr sz="1200" b="0">
+                        <a:rPr sz="1100" b="0">
                           <a:solidFill>
                             <a:srgbClr val="1A1A1A"/>
                           </a:solidFill>
                           <a:latin typeface="Calibri"/>
                         </a:rPr>
-                        <a:t>VALVE; EGR</a:t>
+                        <a:t>LAMP ASM; HEAD</a:t>
+                      </a:r>
+                    </a:p>
+                  </a:txBody>
+                  <a:tcPr anchor="ctr" marL="73152" marR="73152">
+                    <a:solidFill>
+                      <a:srgbClr val="FFFFFF"/>
+                    </a:solidFill>
+                  </a:tcPr>
+                </a:tc>
+                <a:tc>
+                  <a:txBody>
+                    <a:bodyPr/>
+                    <a:lstStyle/>
+                    <a:p>
+                      <a:pPr algn="l"/>
+                      <a:r>
+                        <a:rPr sz="1100" b="0">
+                          <a:solidFill>
+                            <a:srgbClr val="1A1A1A"/>
+                          </a:solidFill>
+                          <a:latin typeface="Calibri"/>
+                        </a:rPr>
+                        <a:t>—</a:t>
                       </a:r>
                     </a:p>
                   </a:txBody>
@@ -21268,13 +21831,13 @@
                     <a:p>
                       <a:pPr algn="r"/>
                       <a:r>
-                        <a:rPr sz="1200" b="0">
+                        <a:rPr sz="1100" b="0">
                           <a:solidFill>
                             <a:srgbClr val="1A1A1A"/>
                           </a:solidFill>
                           <a:latin typeface="Calibri"/>
                         </a:rPr>
-                        <a:t>EUR 220</a:t>
+                        <a:t>EUR 338</a:t>
                       </a:r>
                     </a:p>
                   </a:txBody>
@@ -21291,13 +21854,36 @@
                     <a:p>
                       <a:pPr algn="r"/>
                       <a:r>
-                        <a:rPr sz="1200" b="0">
+                        <a:rPr sz="1100" b="0">
                           <a:solidFill>
                             <a:srgbClr val="1A1A1A"/>
                           </a:solidFill>
                           <a:latin typeface="Calibri"/>
                         </a:rPr>
-                        <a:t>EUR 1,397</a:t>
+                        <a:t>EUR 1,313</a:t>
+                      </a:r>
+                    </a:p>
+                  </a:txBody>
+                  <a:tcPr anchor="ctr" marL="73152" marR="73152">
+                    <a:solidFill>
+                      <a:srgbClr val="FFFFFF"/>
+                    </a:solidFill>
+                  </a:tcPr>
+                </a:tc>
+                <a:tc>
+                  <a:txBody>
+                    <a:bodyPr/>
+                    <a:lstStyle/>
+                    <a:p>
+                      <a:pPr algn="r"/>
+                      <a:r>
+                        <a:rPr sz="1100" b="0">
+                          <a:solidFill>
+                            <a:srgbClr val="1A1A1A"/>
+                          </a:solidFill>
+                          <a:latin typeface="Calibri"/>
+                        </a:rPr>
+                        <a:t>EUR 975</a:t>
                       </a:r>
                     </a:p>
                   </a:txBody>
@@ -21316,13 +21902,13 @@
                     <a:p>
                       <a:pPr algn="l"/>
                       <a:r>
-                        <a:rPr sz="1200" b="0">
+                        <a:rPr sz="1100" b="0">
                           <a:solidFill>
                             <a:srgbClr val="1A1A1A"/>
                           </a:solidFill>
                           <a:latin typeface="Calibri"/>
                         </a:rPr>
-                        <a:t>8978249035</a:t>
+                        <a:t>5876150530</a:t>
                       </a:r>
                     </a:p>
                   </a:txBody>
@@ -21339,13 +21925,36 @@
                     <a:p>
                       <a:pPr algn="l"/>
                       <a:r>
-                        <a:rPr sz="1200" b="0">
+                        <a:rPr sz="1100" b="0">
                           <a:solidFill>
                             <a:srgbClr val="1A1A1A"/>
                           </a:solidFill>
                           <a:latin typeface="Calibri"/>
                         </a:rPr>
-                        <a:t>LAMP ASM; HEAD</a:t>
+                        <a:t>ELEMENT; OIL FILTER</a:t>
+                      </a:r>
+                    </a:p>
+                  </a:txBody>
+                  <a:tcPr anchor="ctr" marL="73152" marR="73152">
+                    <a:solidFill>
+                      <a:srgbClr val="ECECEC"/>
+                    </a:solidFill>
+                  </a:tcPr>
+                </a:tc>
+                <a:tc>
+                  <a:txBody>
+                    <a:bodyPr/>
+                    <a:lstStyle/>
+                    <a:p>
+                      <a:pPr algn="l"/>
+                      <a:r>
+                        <a:rPr sz="1100" b="0">
+                          <a:solidFill>
+                            <a:srgbClr val="1A1A1A"/>
+                          </a:solidFill>
+                          <a:latin typeface="Calibri"/>
+                        </a:rPr>
+                        <a:t>NHR,NLR,NMR,TF*,</a:t>
                       </a:r>
                     </a:p>
                   </a:txBody>
@@ -21362,13 +21971,13 @@
                     <a:p>
                       <a:pPr algn="r"/>
                       <a:r>
-                        <a:rPr sz="1200" b="0">
+                        <a:rPr sz="1100" b="0">
                           <a:solidFill>
                             <a:srgbClr val="1A1A1A"/>
                           </a:solidFill>
                           <a:latin typeface="Calibri"/>
                         </a:rPr>
-                        <a:t>EUR 338</a:t>
+                        <a:t>EUR 51</a:t>
                       </a:r>
                     </a:p>
                   </a:txBody>
@@ -21385,13 +21994,36 @@
                     <a:p>
                       <a:pPr algn="r"/>
                       <a:r>
-                        <a:rPr sz="1200" b="0">
+                        <a:rPr sz="1100" b="0">
                           <a:solidFill>
                             <a:srgbClr val="1A1A1A"/>
                           </a:solidFill>
                           <a:latin typeface="Calibri"/>
                         </a:rPr>
-                        <a:t>EUR 1,313</a:t>
+                        <a:t>EUR 857</a:t>
+                      </a:r>
+                    </a:p>
+                  </a:txBody>
+                  <a:tcPr anchor="ctr" marL="73152" marR="73152">
+                    <a:solidFill>
+                      <a:srgbClr val="ECECEC"/>
+                    </a:solidFill>
+                  </a:tcPr>
+                </a:tc>
+                <a:tc>
+                  <a:txBody>
+                    <a:bodyPr/>
+                    <a:lstStyle/>
+                    <a:p>
+                      <a:pPr algn="r"/>
+                      <a:r>
+                        <a:rPr sz="1100" b="0">
+                          <a:solidFill>
+                            <a:srgbClr val="1A1A1A"/>
+                          </a:solidFill>
+                          <a:latin typeface="Calibri"/>
+                        </a:rPr>
+                        <a:t>EUR 806</a:t>
                       </a:r>
                     </a:p>
                   </a:txBody>
@@ -21452,7 +22084,7 @@
                 </a:solidFill>
                 <a:latin typeface="Calibri"/>
               </a:rPr>
-              <a:t>Air conditioning +39%, Electrical sensors +20%, Body parts +9% — where the volume went.</a:t>
+              <a:t>Air conditioning +37%, Body parts +12%, Fuel system +553% — where the commercial volume went.</a:t>
             </a:r>
           </a:p>
           <a:p>
@@ -21480,7 +22112,7 @@
                 </a:solidFill>
                 <a:latin typeface="Calibri"/>
               </a:rPr>
-              <a:t>Several of these are the kind of item that also moves on a campaign or claim. Hungary CY2025 warranty parts (claim-price basis) were EUR 77K — separate from fiscal GPS warranty expense. Do not read this growth list as purely commercial without checking claims together.</a:t>
+              <a:t>Claim-matched PNs (87 distinct) and campaign/recall text matches are already excluded from this growth list. Residual warranty on unmapped PNs can remain.</a:t>
             </a:r>
           </a:p>
           <a:p>
@@ -21508,7 +22140,7 @@
                 </a:solidFill>
                 <a:latin typeface="Calibri"/>
               </a:rPr>
-              <a:t>Worth agreeing which of these are repeatable and which were one-off.</a:t>
+              <a:t>PNs ranked by largest EUR increase (prior-period sales &gt; 0). Worth agreeing which of these are repeatable and which were one-off.</a:t>
             </a:r>
           </a:p>
         </p:txBody>
@@ -22049,7 +22681,7 @@
                           </a:solidFill>
                           <a:latin typeface="Calibri"/>
                         </a:rPr>
-                        <a:t>Validate</a:t>
+                        <a:t>Warranty / campaign</a:t>
                       </a:r>
                     </a:p>
                   </a:txBody>

--- a/09_meetings/HUNGARY_Sales_Review_2026/ISZE_HUNGARY_Sales_Review_FY2027.pptx
+++ b/09_meetings/HUNGARY_Sales_Review_2026/ISZE_HUNGARY_Sales_Review_FY2027.pptx
@@ -38,7 +38,6 @@
     <p:sldId id="286" r:id="rId37"/>
     <p:sldId id="287" r:id="rId38"/>
     <p:sldId id="288" r:id="rId39"/>
-    <p:sldId id="289" r:id="rId40"/>
   </p:sldIdLst>
   <p:sldSz cx="12188952" cy="6858000" type="screen4x3"/>
   <p:notesSz cx="6858000" cy="9144000"/>
@@ -3978,8 +3977,8 @@
         </p:blipFill>
         <p:spPr>
           <a:xfrm>
-            <a:off x="292608" y="2050572"/>
-            <a:ext cx="7178040" cy="3168335"/>
+            <a:off x="292608" y="2051349"/>
+            <a:ext cx="7178040" cy="3166782"/>
           </a:xfrm>
           <a:prstGeom prst="rect">
             <a:avLst/>
@@ -4357,7 +4356,7 @@
                 </a:solidFill>
                 <a:latin typeface="Calibri"/>
               </a:rPr>
-              <a:t>IDS 2026: Hungary averages 86.2%, above the 74.8% network benchmark</a:t>
+              <a:t>IDS 2026: Hungary 86.2% vs 74.8% network</a:t>
             </a:r>
           </a:p>
         </p:txBody>
@@ -5399,7 +5398,7 @@
                 </a:solidFill>
                 <a:latin typeface="Calibri"/>
               </a:rPr>
-              <a:t>The fleet is expected to decline in 2026</a:t>
+              <a:t>The fleet is expected to grow in 2026</a:t>
             </a:r>
           </a:p>
         </p:txBody>
@@ -5498,8 +5497,8 @@
         </p:blipFill>
         <p:spPr>
           <a:xfrm>
-            <a:off x="292608" y="2120980"/>
-            <a:ext cx="7178040" cy="3027520"/>
+            <a:off x="292608" y="2121722"/>
+            <a:ext cx="7178040" cy="3026036"/>
           </a:xfrm>
           <a:prstGeom prst="rect">
             <a:avLst/>
@@ -5630,7 +5629,7 @@
                 </a:solidFill>
                 <a:latin typeface="Calibri"/>
               </a:rPr>
-              <a:t>Fleet size (calendar year): 3,734 vehicles in 2025 → 3,645 working estimate for end-2026 (-2.4%).</a:t>
+              <a:t>Fleet size (calendar year): 3,734 vehicles in 2025 → 3,992 working estimate for end-2026 (+6.9%).</a:t>
             </a:r>
           </a:p>
           <a:p>
@@ -5686,7 +5685,7 @@
                 </a:solidFill>
                 <a:latin typeface="Calibri"/>
               </a:rPr>
-              <a:t>End-2026 mix: LCV / D-Max 3,645; CV — LD 0.</a:t>
+              <a:t>End-2026 mix: LCV / D-Max 3,992; CV — LD 0.</a:t>
             </a:r>
           </a:p>
           <a:p>
@@ -5714,7 +5713,7 @@
                 </a:solidFill>
                 <a:latin typeface="Calibri"/>
               </a:rPr>
-              <a:t>The FY2027 Sales-to-Dealer target starts from that fleet change, then applies a 5% price adjustment and 1.8% additional growth.</a:t>
+              <a:t>That fleet growth feeds the FY2027 Extended Target's max-spend potential (EUR 920,328), which the base plan plus stretch is measured against.</a:t>
             </a:r>
           </a:p>
           <a:p>
@@ -5742,7 +5741,7 @@
                 </a:solidFill>
                 <a:latin typeface="Calibri"/>
               </a:rPr>
-              <a:t>So the target is built from a slightly smaller fleet — not from an assumed growth story.</a:t>
+              <a:t>The target reflects the working fleet outlook without extending the chart beyond 2026.</a:t>
             </a:r>
           </a:p>
         </p:txBody>
@@ -6018,7 +6017,7 @@
                 </a:solidFill>
                 <a:latin typeface="Calibri"/>
               </a:rPr>
-              <a:t>Sales-to-Dealer amount bridge</a:t>
+              <a:t>ISZE → AutoWallis Extended Target bridge</a:t>
             </a:r>
           </a:p>
         </p:txBody>
@@ -6033,7 +6032,7 @@
         </p:nvGraphicFramePr>
         <p:xfrm>
           <a:off x="292608" y="1508760"/>
-          <a:ext cx="8595360" cy="2148840"/>
+          <a:ext cx="8595360" cy="1737360"/>
         </p:xfrm>
         <a:graphic>
           <a:graphicData uri="http://schemas.openxmlformats.org/drawingml/2006/table">
@@ -6045,7 +6044,7 @@
                 <a:gridCol w="5669280"/>
                 <a:gridCol w="2926080"/>
               </a:tblGrid>
-              <a:tr h="429768">
+              <a:tr h="434340">
                 <a:tc>
                   <a:txBody>
                     <a:bodyPr/>
@@ -6093,7 +6092,7 @@
                   </a:tcPr>
                 </a:tc>
               </a:tr>
-              <a:tr h="429768">
+              <a:tr h="434340">
                 <a:tc>
                   <a:txBody>
                     <a:bodyPr/>
@@ -6107,7 +6106,7 @@
                           </a:solidFill>
                           <a:latin typeface="Calibri"/>
                         </a:rPr>
-                        <a:t>FY2026 Sales-to-Dealer (working estimate)</a:t>
+                        <a:t>FY2026 ISZE billing (actual)</a:t>
                       </a:r>
                     </a:p>
                   </a:txBody>
@@ -6130,7 +6129,7 @@
                           </a:solidFill>
                           <a:latin typeface="Calibri"/>
                         </a:rPr>
-                        <a:t>EUR 532,687</a:t>
+                        <a:t>EUR 346,246</a:t>
                       </a:r>
                     </a:p>
                   </a:txBody>
@@ -6141,7 +6140,7 @@
                   </a:tcPr>
                 </a:tc>
               </a:tr>
-              <a:tr h="429768">
+              <a:tr h="434340">
                 <a:tc>
                   <a:txBody>
                     <a:bodyPr/>
@@ -6155,7 +6154,7 @@
                           </a:solidFill>
                           <a:latin typeface="Calibri"/>
                         </a:rPr>
-                        <a:t>After fleet movement (-2.4%)</a:t>
+                        <a:t>FY2027 base plan (BP FY27, reviewed with ISZE)</a:t>
                       </a:r>
                     </a:p>
                   </a:txBody>
@@ -6178,7 +6177,7 @@
                           </a:solidFill>
                           <a:latin typeface="Calibri"/>
                         </a:rPr>
-                        <a:t>EUR 519,990</a:t>
+                        <a:t>EUR 349,600</a:t>
                       </a:r>
                     </a:p>
                   </a:txBody>
@@ -6189,55 +6188,7 @@
                   </a:tcPr>
                 </a:tc>
               </a:tr>
-              <a:tr h="429768">
-                <a:tc>
-                  <a:txBody>
-                    <a:bodyPr/>
-                    <a:lstStyle/>
-                    <a:p>
-                      <a:pPr algn="l"/>
-                      <a:r>
-                        <a:rPr sz="1250" b="0">
-                          <a:solidFill>
-                            <a:srgbClr val="1A1A1A"/>
-                          </a:solidFill>
-                          <a:latin typeface="Calibri"/>
-                        </a:rPr>
-                        <a:t>After price adjustment (+5%)</a:t>
-                      </a:r>
-                    </a:p>
-                  </a:txBody>
-                  <a:tcPr anchor="ctr" marL="73152" marR="73152">
-                    <a:solidFill>
-                      <a:srgbClr val="FFFFFF"/>
-                    </a:solidFill>
-                  </a:tcPr>
-                </a:tc>
-                <a:tc>
-                  <a:txBody>
-                    <a:bodyPr/>
-                    <a:lstStyle/>
-                    <a:p>
-                      <a:pPr algn="r"/>
-                      <a:r>
-                        <a:rPr sz="1250" b="0">
-                          <a:solidFill>
-                            <a:srgbClr val="1A1A1A"/>
-                          </a:solidFill>
-                          <a:latin typeface="Calibri"/>
-                        </a:rPr>
-                        <a:t>EUR 545,989</a:t>
-                      </a:r>
-                    </a:p>
-                  </a:txBody>
-                  <a:tcPr anchor="ctr" marL="73152" marR="73152">
-                    <a:solidFill>
-                      <a:srgbClr val="FFFFFF"/>
-                    </a:solidFill>
-                  </a:tcPr>
-                </a:tc>
-              </a:tr>
-              <a:tr h="429768">
+              <a:tr h="434340">
                 <a:tc>
                   <a:txBody>
                     <a:bodyPr/>
@@ -6251,7 +6202,7 @@
                           </a:solidFill>
                           <a:latin typeface="Calibri"/>
                         </a:rPr>
-                        <a:t>FY2027 target after additional growth (+1.8%)</a:t>
+                        <a:t>After stretch (+1.8% of EUR 920,328 fleet potential)</a:t>
                       </a:r>
                     </a:p>
                   </a:txBody>
@@ -6274,7 +6225,7 @@
                           </a:solidFill>
                           <a:latin typeface="Calibri"/>
                         </a:rPr>
-                        <a:t>EUR 555,817</a:t>
+                        <a:t>EUR 366,166</a:t>
                       </a:r>
                     </a:p>
                   </a:txBody>
@@ -6297,8 +6248,8 @@
         </p:nvSpPr>
         <p:spPr>
           <a:xfrm>
-            <a:off x="292608" y="3977639"/>
-            <a:ext cx="11612880" cy="1188720"/>
+            <a:off x="292608" y="3429000"/>
+            <a:ext cx="11612880" cy="1737360"/>
           </a:xfrm>
           <a:prstGeom prst="rect">
             <a:avLst/>
@@ -6335,7 +6286,7 @@
                 </a:solidFill>
                 <a:latin typeface="Calibri"/>
               </a:rPr>
-              <a:t>The FY2027 target is +4.3% versus the FY2026 Sales-to-Dealer base.</a:t>
+              <a:t>The Extended Target is +5.8% versus FY2026 ISZE billing.</a:t>
             </a:r>
           </a:p>
           <a:p>
@@ -6363,7 +6314,35 @@
                 </a:solidFill>
                 <a:latin typeface="Calibri"/>
               </a:rPr>
-              <a:t>The FY2026 base is a working estimate (ISZE billing ÷ 0.65): the KPI Dashboard has no usable Sales-to-Dealer row for this market.</a:t>
+              <a:t>This bridge is the ISZE→AutoWallis commercial track — a separate figure from what you sell on to your own dealers, which this deck does not target this cycle.</a:t>
+            </a:r>
+          </a:p>
+          <a:p>
+            <a:pPr>
+              <a:lnSpc>
+                <a:spcPct val="125000"/>
+              </a:lnSpc>
+              <a:spcAft>
+                <a:spcPts val="1000"/>
+              </a:spcAft>
+            </a:pPr>
+            <a:r>
+              <a:rPr sz="1300" b="1">
+                <a:solidFill>
+                  <a:srgbClr val="CC0E1E"/>
+                </a:solidFill>
+                <a:latin typeface="Calibri"/>
+              </a:rPr>
+              <a:t>—  </a:t>
+            </a:r>
+            <a:r>
+              <a:rPr sz="1300">
+                <a:solidFill>
+                  <a:srgbClr val="1A1A1A"/>
+                </a:solidFill>
+                <a:latin typeface="Calibri"/>
+              </a:rPr>
+              <a:t>ISZE management has submitted a financial incentive tied to reaching the stretch portion of this target — not yet approved by Japan.</a:t>
             </a:r>
           </a:p>
         </p:txBody>
@@ -6738,7 +6717,7 @@
                 </a:solidFill>
                 <a:latin typeface="Calibri"/>
               </a:rPr>
-              <a:t>Your fleet</a:t>
+              <a:t>Your fleet potential</a:t>
             </a:r>
           </a:p>
         </p:txBody>
@@ -6789,7 +6768,7 @@
                 </a:solidFill>
                 <a:latin typeface="Calibri"/>
               </a:rPr>
-              <a:t>The working fleet movement used in the target is -2.4%.</a:t>
+              <a:t>Max spend for FY2027 is EUR 920,328 — 3,992 units × the FY27 ISZE-net rate (FY26 rate +5%).</a:t>
             </a:r>
           </a:p>
         </p:txBody>
@@ -6923,7 +6902,7 @@
                 </a:solidFill>
                 <a:latin typeface="Calibri"/>
               </a:rPr>
-              <a:t>The price move</a:t>
+              <a:t>The stretch ask</a:t>
             </a:r>
           </a:p>
         </p:txBody>
@@ -6974,7 +6953,7 @@
                 </a:solidFill>
                 <a:latin typeface="Calibri"/>
               </a:rPr>
-              <a:t>ISZE is applying a 5% price adjustment for FY2027, consistent with every ISZE market this year.</a:t>
+              <a:t>ISZE is asking for a 1.8% stretch on top of the base plan — EUR 16,566.</a:t>
             </a:r>
           </a:p>
           <a:p>
@@ -7002,7 +6981,7 @@
                 </a:solidFill>
                 <a:latin typeface="Calibri"/>
               </a:rPr>
-              <a:t>It is built into the per-vehicle rate above, not added separately on top.</a:t>
+              <a:t>That lifts your GPS share from 38.0% to 39.8% of fleet potential.</a:t>
             </a:r>
           </a:p>
         </p:txBody>
@@ -7126,7 +7105,7 @@
                           </a:solidFill>
                           <a:latin typeface="Calibri"/>
                         </a:rPr>
-                        <a:t>FY2027 Sales-to-Dealer target</a:t>
+                        <a:t>FY2027 Extended Target</a:t>
                       </a:r>
                     </a:p>
                   </a:txBody>
@@ -7149,7 +7128,7 @@
                           </a:solidFill>
                           <a:latin typeface="Calibri"/>
                         </a:rPr>
-                        <a:t>EUR 555,817</a:t>
+                        <a:t>EUR 366,166</a:t>
                       </a:r>
                     </a:p>
                   </a:txBody>
@@ -7174,7 +7153,7 @@
                           </a:solidFill>
                           <a:latin typeface="Calibri"/>
                         </a:rPr>
-                        <a:t>vs FY2026 Sales-to-Dealer (EUR 532,687)</a:t>
+                        <a:t>vs FY2026 ISZE billing (EUR 346,246)</a:t>
                       </a:r>
                     </a:p>
                   </a:txBody>
@@ -7197,7 +7176,7 @@
                           </a:solidFill>
                           <a:latin typeface="Calibri"/>
                         </a:rPr>
-                        <a:t>+4.3%</a:t>
+                        <a:t>+5.8%</a:t>
                       </a:r>
                     </a:p>
                   </a:txBody>
@@ -7258,7 +7237,7 @@
                 </a:solidFill>
                 <a:latin typeface="Calibri"/>
               </a:rPr>
-              <a:t>As in previous cycles we would expect an incentive to sit alongside this adjustment — that approval is still pending on our side.</a:t>
+              <a:t>ISZE management has submitted a financial incentive tied to reaching this stretch target for FY2027 — not yet approved by Japan. We'll confirm as soon as that's through.</a:t>
             </a:r>
           </a:p>
           <a:p>
@@ -7286,7 +7265,7 @@
                 </a:solidFill>
                 <a:latin typeface="Calibri"/>
               </a:rPr>
-              <a:t>Until the incentive is confirmed, treat the FY2027 target as the working bridge (fleet × price × additional growth), not a locked commercial commitment.</a:t>
+              <a:t>Until the incentive is confirmed, treat the Extended Target as the working bridge (base plan + stretch), not a locked commercial commitment.</a:t>
             </a:r>
           </a:p>
         </p:txBody>
@@ -10204,7 +10183,7 @@
                 </a:solidFill>
                 <a:latin typeface="Calibri"/>
               </a:rPr>
-              <a:t>Align on the FY2027 Sales-to-Dealer bridge (fleet, price, additional growth) — working figure EUR 555,817 (+4.3% vs FY2026 base).</a:t>
+              <a:t>Align on the FY2027 Extended Target (base plan + stretch) — working figure EUR 366,166 (+5.8% vs FY2026 ISZE billing).</a:t>
             </a:r>
           </a:p>
           <a:p>
@@ -10232,7 +10211,7 @@
                 </a:solidFill>
                 <a:latin typeface="Calibri"/>
               </a:rPr>
-              <a:t>Confirm the incentive alongside the price adjustment; lock the target once that approval is through.</a:t>
+              <a:t>Confirm the incentive tied to the stretch target once approved by Japan.</a:t>
             </a:r>
           </a:p>
           <a:p>
@@ -10804,7 +10783,7 @@
                 </a:solidFill>
                 <a:latin typeface="Calibri"/>
               </a:rPr>
-              <a:t>Sales-to-Dealer Outlook</a:t>
+              <a:t>FY2027 Extended Target — ISZE to HUNGARY</a:t>
             </a:r>
           </a:p>
           <a:p>
@@ -11059,87 +11038,9 @@
         <p:nvPr/>
       </p:nvGrpSpPr>
       <p:grpSpPr/>
-      <p:sp>
-        <p:nvSpPr>
-          <p:cNvPr id="2" name="Rectangle 1"/>
-          <p:cNvSpPr/>
-          <p:nvPr/>
-        </p:nvSpPr>
-        <p:spPr>
-          <a:xfrm>
-            <a:off x="0" y="0"/>
-            <a:ext cx="201168" cy="6858000"/>
-          </a:xfrm>
-          <a:prstGeom prst="rect">
-            <a:avLst/>
-          </a:prstGeom>
-          <a:solidFill>
-            <a:srgbClr val="CC0E1E"/>
-          </a:solidFill>
-          <a:ln>
-            <a:noFill/>
-          </a:ln>
-        </p:spPr>
-        <p:style>
-          <a:lnRef idx="1">
-            <a:schemeClr val="accent1"/>
-          </a:lnRef>
-          <a:fillRef idx="3">
-            <a:schemeClr val="accent1"/>
-          </a:fillRef>
-          <a:effectRef idx="2">
-            <a:schemeClr val="accent1"/>
-          </a:effectRef>
-          <a:fontRef idx="minor">
-            <a:schemeClr val="lt1"/>
-          </a:fontRef>
-        </p:style>
-        <p:txBody>
-          <a:bodyPr rtlCol="0" anchor="ctr"/>
-          <a:lstStyle/>
-          <a:p>
-            <a:pPr algn="ctr"/>
-          </a:p>
-        </p:txBody>
-      </p:sp>
-      <p:sp>
-        <p:nvSpPr>
-          <p:cNvPr id="3" name="TextBox 2"/>
-          <p:cNvSpPr txBox="1"/>
-          <p:nvPr/>
-        </p:nvSpPr>
-        <p:spPr>
-          <a:xfrm>
-            <a:off x="2286000" y="3063240"/>
-            <a:ext cx="7772400" cy="457200"/>
-          </a:xfrm>
-          <a:prstGeom prst="rect">
-            <a:avLst/>
-          </a:prstGeom>
-          <a:noFill/>
-        </p:spPr>
-        <p:txBody>
-          <a:bodyPr wrap="square">
-            <a:spAutoFit/>
-          </a:bodyPr>
-          <a:lstStyle/>
-          <a:p>
-            <a:pPr algn="ctr"/>
-            <a:r>
-              <a:rPr sz="1600" b="0">
-                <a:solidFill>
-                  <a:srgbClr val="5A5A5A"/>
-                </a:solidFill>
-                <a:latin typeface="Calibri"/>
-              </a:rPr>
-              <a:t>Moving the World – for You</a:t>
-            </a:r>
-          </a:p>
-        </p:txBody>
-      </p:sp>
       <p:pic>
         <p:nvPicPr>
-          <p:cNvPr id="4" name="Picture 3" descr="isuzu_logo_red.png"/>
+          <p:cNvPr id="2" name="Picture 1" descr="image.png"/>
           <p:cNvPicPr>
             <a:picLocks noChangeAspect="1"/>
           </p:cNvPicPr>
@@ -11153,14 +11054,312 @@
         </p:blipFill>
         <p:spPr>
           <a:xfrm>
-            <a:off x="4631436" y="2468880"/>
-            <a:ext cx="2926080" cy="509704"/>
+            <a:off x="256032" y="6263640"/>
+            <a:ext cx="1679787" cy="292608"/>
           </a:xfrm>
           <a:prstGeom prst="rect">
             <a:avLst/>
           </a:prstGeom>
         </p:spPr>
       </p:pic>
+      <p:sp>
+        <p:nvSpPr>
+          <p:cNvPr id="3" name="Rectangle 2"/>
+          <p:cNvSpPr/>
+          <p:nvPr/>
+        </p:nvSpPr>
+        <p:spPr>
+          <a:xfrm>
+            <a:off x="0" y="6766560"/>
+            <a:ext cx="12188952" cy="91440"/>
+          </a:xfrm>
+          <a:prstGeom prst="rect">
+            <a:avLst/>
+          </a:prstGeom>
+          <a:solidFill>
+            <a:srgbClr val="CC0E1E"/>
+          </a:solidFill>
+          <a:ln>
+            <a:noFill/>
+          </a:ln>
+        </p:spPr>
+        <p:style>
+          <a:lnRef idx="1">
+            <a:schemeClr val="accent1"/>
+          </a:lnRef>
+          <a:fillRef idx="3">
+            <a:schemeClr val="accent1"/>
+          </a:fillRef>
+          <a:effectRef idx="2">
+            <a:schemeClr val="accent1"/>
+          </a:effectRef>
+          <a:fontRef idx="minor">
+            <a:schemeClr val="lt1"/>
+          </a:fontRef>
+        </p:style>
+        <p:txBody>
+          <a:bodyPr rtlCol="0" anchor="ctr"/>
+          <a:lstStyle/>
+          <a:p>
+            <a:pPr algn="ctr"/>
+          </a:p>
+        </p:txBody>
+      </p:sp>
+      <p:sp>
+        <p:nvSpPr>
+          <p:cNvPr id="4" name="TextBox 3"/>
+          <p:cNvSpPr txBox="1"/>
+          <p:nvPr/>
+        </p:nvSpPr>
+        <p:spPr>
+          <a:xfrm>
+            <a:off x="292608" y="201168"/>
+            <a:ext cx="11430000" cy="274320"/>
+          </a:xfrm>
+          <a:prstGeom prst="rect">
+            <a:avLst/>
+          </a:prstGeom>
+          <a:noFill/>
+        </p:spPr>
+        <p:txBody>
+          <a:bodyPr wrap="square">
+            <a:spAutoFit/>
+          </a:bodyPr>
+          <a:lstStyle/>
+          <a:p>
+            <a:pPr algn="l"/>
+            <a:r>
+              <a:rPr sz="1100" b="1">
+                <a:solidFill>
+                  <a:srgbClr val="CC0E1E"/>
+                </a:solidFill>
+                <a:latin typeface="Calibri"/>
+              </a:rPr>
+              <a:t>HUNGARY · AUTOWALLIS DISTRIBUTION</a:t>
+            </a:r>
+          </a:p>
+        </p:txBody>
+      </p:sp>
+      <p:sp>
+        <p:nvSpPr>
+          <p:cNvPr id="5" name="TextBox 4"/>
+          <p:cNvSpPr txBox="1"/>
+          <p:nvPr/>
+        </p:nvSpPr>
+        <p:spPr>
+          <a:xfrm>
+            <a:off x="292608" y="475488"/>
+            <a:ext cx="11612880" cy="566928"/>
+          </a:xfrm>
+          <a:prstGeom prst="rect">
+            <a:avLst/>
+          </a:prstGeom>
+          <a:noFill/>
+        </p:spPr>
+        <p:txBody>
+          <a:bodyPr wrap="square">
+            <a:spAutoFit/>
+          </a:bodyPr>
+          <a:lstStyle/>
+          <a:p>
+            <a:pPr algn="l"/>
+            <a:r>
+              <a:rPr sz="2500" b="1">
+                <a:solidFill>
+                  <a:srgbClr val="1A1A1A"/>
+                </a:solidFill>
+                <a:latin typeface="Calibri"/>
+              </a:rPr>
+              <a:t>Deep dive — detail behind the Mode A story</a:t>
+            </a:r>
+          </a:p>
+        </p:txBody>
+      </p:sp>
+      <p:sp>
+        <p:nvSpPr>
+          <p:cNvPr id="6" name="Rectangle 5"/>
+          <p:cNvSpPr/>
+          <p:nvPr/>
+        </p:nvSpPr>
+        <p:spPr>
+          <a:xfrm>
+            <a:off x="292608" y="1005840"/>
+            <a:ext cx="11612880" cy="28000"/>
+          </a:xfrm>
+          <a:prstGeom prst="rect">
+            <a:avLst/>
+          </a:prstGeom>
+          <a:solidFill>
+            <a:srgbClr val="CC0E1E"/>
+          </a:solidFill>
+          <a:ln>
+            <a:noFill/>
+          </a:ln>
+        </p:spPr>
+        <p:style>
+          <a:lnRef idx="1">
+            <a:schemeClr val="accent1"/>
+          </a:lnRef>
+          <a:fillRef idx="3">
+            <a:schemeClr val="accent1"/>
+          </a:fillRef>
+          <a:effectRef idx="2">
+            <a:schemeClr val="accent1"/>
+          </a:effectRef>
+          <a:fontRef idx="minor">
+            <a:schemeClr val="lt1"/>
+          </a:fontRef>
+        </p:style>
+        <p:txBody>
+          <a:bodyPr rtlCol="0" anchor="ctr"/>
+          <a:lstStyle/>
+          <a:p>
+            <a:pPr algn="ctr"/>
+          </a:p>
+        </p:txBody>
+      </p:sp>
+      <p:sp>
+        <p:nvSpPr>
+          <p:cNvPr id="7" name="TextBox 6"/>
+          <p:cNvSpPr txBox="1"/>
+          <p:nvPr/>
+        </p:nvSpPr>
+        <p:spPr>
+          <a:xfrm>
+            <a:off x="11594592" y="6473952"/>
+            <a:ext cx="365760" cy="274320"/>
+          </a:xfrm>
+          <a:prstGeom prst="rect">
+            <a:avLst/>
+          </a:prstGeom>
+          <a:noFill/>
+        </p:spPr>
+        <p:txBody>
+          <a:bodyPr wrap="square">
+            <a:spAutoFit/>
+          </a:bodyPr>
+          <a:lstStyle/>
+          <a:p>
+            <a:pPr algn="r"/>
+            <a:r>
+              <a:rPr sz="1000" b="0">
+                <a:solidFill>
+                  <a:srgbClr val="5A5A5A"/>
+                </a:solidFill>
+                <a:latin typeface="Calibri"/>
+              </a:rPr>
+              <a:t>20</a:t>
+            </a:r>
+          </a:p>
+        </p:txBody>
+      </p:sp>
+      <p:sp>
+        <p:nvSpPr>
+          <p:cNvPr id="8" name="TextBox 7"/>
+          <p:cNvSpPr txBox="1"/>
+          <p:nvPr/>
+        </p:nvSpPr>
+        <p:spPr>
+          <a:xfrm>
+            <a:off x="292608" y="1325880"/>
+            <a:ext cx="10972800" cy="4114800"/>
+          </a:xfrm>
+          <a:prstGeom prst="rect">
+            <a:avLst/>
+          </a:prstGeom>
+          <a:noFill/>
+        </p:spPr>
+        <p:txBody>
+          <a:bodyPr wrap="square">
+            <a:spAutoFit/>
+          </a:bodyPr>
+          <a:lstStyle/>
+          <a:p>
+            <a:pPr>
+              <a:lnSpc>
+                <a:spcPct val="125000"/>
+              </a:lnSpc>
+              <a:spcAft>
+                <a:spcPts val="1000"/>
+              </a:spcAft>
+            </a:pPr>
+            <a:r>
+              <a:rPr sz="1500" b="1">
+                <a:solidFill>
+                  <a:srgbClr val="CC0E1E"/>
+                </a:solidFill>
+                <a:latin typeface="Calibri"/>
+              </a:rPr>
+              <a:t>—  </a:t>
+            </a:r>
+            <a:r>
+              <a:rPr sz="1500">
+                <a:solidFill>
+                  <a:srgbClr val="1A1A1A"/>
+                </a:solidFill>
+                <a:latin typeface="Calibri"/>
+              </a:rPr>
+              <a:t>Extra detail for meeting prep — pick which slides to share with AutoWallis Distribution.</a:t>
+            </a:r>
+          </a:p>
+          <a:p>
+            <a:pPr>
+              <a:lnSpc>
+                <a:spcPct val="125000"/>
+              </a:lnSpc>
+              <a:spcAft>
+                <a:spcPts val="1000"/>
+              </a:spcAft>
+            </a:pPr>
+            <a:r>
+              <a:rPr sz="1500" b="1">
+                <a:solidFill>
+                  <a:srgbClr val="CC0E1E"/>
+                </a:solidFill>
+                <a:latin typeface="Calibri"/>
+              </a:rPr>
+              <a:t>—  </a:t>
+            </a:r>
+            <a:r>
+              <a:rPr sz="1500">
+                <a:solidFill>
+                  <a:srgbClr val="1A1A1A"/>
+                </a:solidFill>
+                <a:latin typeface="Calibri"/>
+              </a:rPr>
+              <a:t>This is the internal file. The client-safe deck without this section is ISZE_HUNGARY_Sales_Review_FY2027_ModeA_only.pptx — send that one, not this one.</a:t>
+            </a:r>
+          </a:p>
+          <a:p>
+            <a:pPr>
+              <a:lnSpc>
+                <a:spcPct val="125000"/>
+              </a:lnSpc>
+              <a:spcAft>
+                <a:spcPts val="1000"/>
+              </a:spcAft>
+            </a:pPr>
+            <a:r>
+              <a:rPr sz="1500" b="1">
+                <a:solidFill>
+                  <a:srgbClr val="CC0E1E"/>
+                </a:solidFill>
+                <a:latin typeface="Calibri"/>
+              </a:rPr>
+              <a:t>—  </a:t>
+            </a:r>
+            <a:r>
+              <a:rPr sz="1500">
+                <a:solidFill>
+                  <a:srgbClr val="1A1A1A"/>
+                </a:solidFill>
+                <a:latin typeface="Calibri"/>
+              </a:rPr>
+              <a:t>Label in all charts: “Genuine with BVP alternative” (not “genuine contested”).</a:t>
+            </a:r>
+          </a:p>
+        </p:txBody>
+      </p:sp>
     </p:spTree>
   </p:cSld>
   <p:clrMapOvr>
@@ -11284,7 +11483,7 @@
                 </a:solidFill>
                 <a:latin typeface="Calibri"/>
               </a:rPr>
-              <a:t>HUNGARY · AUTOWALLIS DISTRIBUTION</a:t>
+              <a:t>AGENDA</a:t>
             </a:r>
           </a:p>
         </p:txBody>
@@ -11319,7 +11518,7 @@
                 </a:solidFill>
                 <a:latin typeface="Calibri"/>
               </a:rPr>
-              <a:t>Deep dive — detail behind the Mode A story</a:t>
+              <a:t>Deep-dive agenda</a:t>
             </a:r>
           </a:p>
         </p:txBody>
@@ -11410,8 +11609,8 @@
         </p:nvSpPr>
         <p:spPr>
           <a:xfrm>
-            <a:off x="292608" y="1325880"/>
-            <a:ext cx="10972800" cy="4114800"/>
+            <a:off x="292608" y="1234440"/>
+            <a:ext cx="10972800" cy="4754880"/>
           </a:xfrm>
           <a:prstGeom prst="rect">
             <a:avLst/>
@@ -11448,7 +11647,7 @@
                 </a:solidFill>
                 <a:latin typeface="Calibri"/>
               </a:rPr>
-              <a:t>Extra detail for meeting prep — pick which slides to share with AutoWallis Distribution.</a:t>
+              <a:t>GPS — fiscal year (headline vs excl. warranty; max two lines)</a:t>
             </a:r>
           </a:p>
           <a:p>
@@ -11476,7 +11675,7 @@
                 </a:solidFill>
                 <a:latin typeface="Calibri"/>
               </a:rPr>
-              <a:t>Mode A ends on the previous closing slide.</a:t>
+              <a:t>FY2025 → FY2026 wallet mix (Genuine / Genuine with BVP alternative / BVP)</a:t>
             </a:r>
           </a:p>
           <a:p>
@@ -11504,7 +11703,147 @@
                 </a:solidFill>
                 <a:latin typeface="Calibri"/>
               </a:rPr>
-              <a:t>Label in all charts: “Genuine with BVP alternative” (not “genuine contested”).</a:t>
+              <a:t>Where the money went — outside the service-parts basket (FY)</a:t>
+            </a:r>
+          </a:p>
+          <a:p>
+            <a:pPr>
+              <a:lnSpc>
+                <a:spcPct val="125000"/>
+              </a:lnSpc>
+              <a:spcAft>
+                <a:spcPts val="1000"/>
+              </a:spcAft>
+            </a:pPr>
+            <a:r>
+              <a:rPr sz="1500" b="1">
+                <a:solidFill>
+                  <a:srgbClr val="CC0E1E"/>
+                </a:solidFill>
+                <a:latin typeface="Calibri"/>
+              </a:rPr>
+              <a:t>—  </a:t>
+            </a:r>
+            <a:r>
+              <a:rPr sz="1500">
+                <a:solidFill>
+                  <a:srgbClr val="1A1A1A"/>
+                </a:solidFill>
+                <a:latin typeface="Calibri"/>
+              </a:rPr>
+              <a:t>Service parts: CY capture vs network + FY billing (capture % is CY-only by design)</a:t>
+            </a:r>
+          </a:p>
+          <a:p>
+            <a:pPr>
+              <a:lnSpc>
+                <a:spcPct val="125000"/>
+              </a:lnSpc>
+              <a:spcAft>
+                <a:spcPts val="1000"/>
+              </a:spcAft>
+            </a:pPr>
+            <a:r>
+              <a:rPr sz="1500" b="1">
+                <a:solidFill>
+                  <a:srgbClr val="CC0E1E"/>
+                </a:solidFill>
+                <a:latin typeface="Calibri"/>
+              </a:rPr>
+              <a:t>—  </a:t>
+            </a:r>
+            <a:r>
+              <a:rPr sz="1500">
+                <a:solidFill>
+                  <a:srgbClr val="1A1A1A"/>
+                </a:solidFill>
+                <a:latin typeface="Calibri"/>
+              </a:rPr>
+              <a:t>Brake pads — BVP share of total brake pad sales (FY)</a:t>
+            </a:r>
+          </a:p>
+          <a:p>
+            <a:pPr>
+              <a:lnSpc>
+                <a:spcPct val="125000"/>
+              </a:lnSpc>
+              <a:spcAft>
+                <a:spcPts val="1000"/>
+              </a:spcAft>
+            </a:pPr>
+            <a:r>
+              <a:rPr sz="1500" b="1">
+                <a:solidFill>
+                  <a:srgbClr val="CC0E1E"/>
+                </a:solidFill>
+                <a:latin typeface="Calibri"/>
+              </a:rPr>
+              <a:t>—  </a:t>
+            </a:r>
+            <a:r>
+              <a:rPr sz="1500">
+                <a:solidFill>
+                  <a:srgbClr val="1A1A1A"/>
+                </a:solidFill>
+                <a:latin typeface="Calibri"/>
+              </a:rPr>
+              <a:t>AIM exposure</a:t>
+            </a:r>
+          </a:p>
+          <a:p>
+            <a:pPr>
+              <a:lnSpc>
+                <a:spcPct val="125000"/>
+              </a:lnSpc>
+              <a:spcAft>
+                <a:spcPts val="1000"/>
+              </a:spcAft>
+            </a:pPr>
+            <a:r>
+              <a:rPr sz="1500" b="1">
+                <a:solidFill>
+                  <a:srgbClr val="CC0E1E"/>
+                </a:solidFill>
+                <a:latin typeface="Calibri"/>
+              </a:rPr>
+              <a:t>—  </a:t>
+            </a:r>
+            <a:r>
+              <a:rPr sz="1500">
+                <a:solidFill>
+                  <a:srgbClr val="1A1A1A"/>
+                </a:solidFill>
+                <a:latin typeface="Calibri"/>
+              </a:rPr>
+              <a:t>Warranty — two lenses</a:t>
+            </a:r>
+          </a:p>
+          <a:p>
+            <a:pPr>
+              <a:lnSpc>
+                <a:spcPct val="125000"/>
+              </a:lnSpc>
+              <a:spcAft>
+                <a:spcPts val="1000"/>
+              </a:spcAft>
+            </a:pPr>
+            <a:r>
+              <a:rPr sz="1500" b="1">
+                <a:solidFill>
+                  <a:srgbClr val="CC0E1E"/>
+                </a:solidFill>
+                <a:latin typeface="Calibri"/>
+              </a:rPr>
+              <a:t>—  </a:t>
+            </a:r>
+            <a:r>
+              <a:rPr sz="1500">
+                <a:solidFill>
+                  <a:srgbClr val="1A1A1A"/>
+                </a:solidFill>
+                <a:latin typeface="Calibri"/>
+              </a:rPr>
+              <a:t>How to use this in the meeting</a:t>
             </a:r>
           </a:p>
         </p:txBody>
@@ -11632,7 +11971,7 @@
                 </a:solidFill>
                 <a:latin typeface="Calibri"/>
               </a:rPr>
-              <a:t>AGENDA</a:t>
+              <a:t>GPS</a:t>
             </a:r>
           </a:p>
         </p:txBody>
@@ -11667,7 +12006,7 @@
                 </a:solidFill>
                 <a:latin typeface="Calibri"/>
               </a:rPr>
-              <a:t>Deep-dive agenda</a:t>
+              <a:t>GPS: fiscal year headline vs after warranty</a:t>
             </a:r>
           </a:p>
         </p:txBody>
@@ -11750,16 +12089,118 @@
           </a:p>
         </p:txBody>
       </p:sp>
-      <p:sp>
-        <p:nvSpPr>
-          <p:cNvPr id="8" name="TextBox 7"/>
+      <p:pic>
+        <p:nvPicPr>
+          <p:cNvPr id="8" name="Picture 7" descr="modeb_gps.png"/>
+          <p:cNvPicPr>
+            <a:picLocks noChangeAspect="1"/>
+          </p:cNvPicPr>
+          <p:nvPr/>
+        </p:nvPicPr>
+        <p:blipFill>
+          <a:blip r:embed="rId3"/>
+          <a:stretch>
+            <a:fillRect/>
+          </a:stretch>
+        </p:blipFill>
+        <p:spPr>
+          <a:xfrm>
+            <a:off x="292608" y="2121722"/>
+            <a:ext cx="7178040" cy="3026036"/>
+          </a:xfrm>
+          <a:prstGeom prst="rect">
+            <a:avLst/>
+          </a:prstGeom>
+        </p:spPr>
+      </p:pic>
+      <p:sp>
+        <p:nvSpPr>
+          <p:cNvPr id="9" name="Rectangle 8"/>
+          <p:cNvSpPr/>
+          <p:nvPr/>
+        </p:nvSpPr>
+        <p:spPr>
+          <a:xfrm>
+            <a:off x="7726679" y="1188720"/>
+            <a:ext cx="22000" cy="4892040"/>
+          </a:xfrm>
+          <a:prstGeom prst="rect">
+            <a:avLst/>
+          </a:prstGeom>
+          <a:solidFill>
+            <a:srgbClr val="ECECEC"/>
+          </a:solidFill>
+          <a:ln>
+            <a:noFill/>
+          </a:ln>
+        </p:spPr>
+        <p:style>
+          <a:lnRef idx="1">
+            <a:schemeClr val="accent1"/>
+          </a:lnRef>
+          <a:fillRef idx="3">
+            <a:schemeClr val="accent1"/>
+          </a:fillRef>
+          <a:effectRef idx="2">
+            <a:schemeClr val="accent1"/>
+          </a:effectRef>
+          <a:fontRef idx="minor">
+            <a:schemeClr val="lt1"/>
+          </a:fontRef>
+        </p:style>
+        <p:txBody>
+          <a:bodyPr rtlCol="0" anchor="ctr"/>
+          <a:lstStyle/>
+          <a:p>
+            <a:pPr algn="ctr"/>
+          </a:p>
+        </p:txBody>
+      </p:sp>
+      <p:sp>
+        <p:nvSpPr>
+          <p:cNvPr id="10" name="TextBox 9"/>
           <p:cNvSpPr txBox="1"/>
           <p:nvPr/>
         </p:nvSpPr>
         <p:spPr>
           <a:xfrm>
-            <a:off x="292608" y="1234440"/>
-            <a:ext cx="10972800" cy="4754880"/>
+            <a:off x="7927847" y="1234440"/>
+            <a:ext cx="3886200" cy="320040"/>
+          </a:xfrm>
+          <a:prstGeom prst="rect">
+            <a:avLst/>
+          </a:prstGeom>
+          <a:noFill/>
+        </p:spPr>
+        <p:txBody>
+          <a:bodyPr wrap="square">
+            <a:spAutoFit/>
+          </a:bodyPr>
+          <a:lstStyle/>
+          <a:p>
+            <a:pPr algn="l"/>
+            <a:r>
+              <a:rPr sz="1200" b="1">
+                <a:solidFill>
+                  <a:srgbClr val="CC0E1E"/>
+                </a:solidFill>
+                <a:latin typeface="Calibri"/>
+              </a:rPr>
+              <a:t>TAKEAWAYS</a:t>
+            </a:r>
+          </a:p>
+        </p:txBody>
+      </p:sp>
+      <p:sp>
+        <p:nvSpPr>
+          <p:cNvPr id="11" name="TextBox 10"/>
+          <p:cNvSpPr txBox="1"/>
+          <p:nvPr/>
+        </p:nvSpPr>
+        <p:spPr>
+          <a:xfrm>
+            <a:off x="7927847" y="1691640"/>
+            <a:ext cx="3794760" cy="4343400"/>
           </a:xfrm>
           <a:prstGeom prst="rect">
             <a:avLst/>
@@ -11781,7 +12222,7 @@
               </a:spcAft>
             </a:pPr>
             <a:r>
-              <a:rPr sz="1500" b="1">
+              <a:rPr sz="1250" b="1">
                 <a:solidFill>
                   <a:srgbClr val="CC0E1E"/>
                 </a:solidFill>
@@ -11790,13 +12231,13 @@
               <a:t>—  </a:t>
             </a:r>
             <a:r>
-              <a:rPr sz="1500">
+              <a:rPr sz="1250">
                 <a:solidFill>
                   <a:srgbClr val="1A1A1A"/>
                 </a:solidFill>
                 <a:latin typeface="Calibri"/>
               </a:rPr>
-              <a:t>GPS — fiscal year (headline vs excl. warranty; max two lines)</a:t>
+              <a:t>Red = fiscal-year GPS (frozen CY2025 wallet). FY25 39.2% → FY26 37.1%.</a:t>
             </a:r>
           </a:p>
           <a:p>
@@ -11809,7 +12250,7 @@
               </a:spcAft>
             </a:pPr>
             <a:r>
-              <a:rPr sz="1500" b="1">
+              <a:rPr sz="1250" b="1">
                 <a:solidFill>
                   <a:srgbClr val="CC0E1E"/>
                 </a:solidFill>
@@ -11818,13 +12259,13 @@
               <a:t>—  </a:t>
             </a:r>
             <a:r>
-              <a:rPr sz="1500">
+              <a:rPr sz="1250">
                 <a:solidFill>
                   <a:srgbClr val="1A1A1A"/>
                 </a:solidFill>
                 <a:latin typeface="Calibri"/>
               </a:rPr>
-              <a:t>FY2025 → FY2026 wallet mix (Genuine / Genuine with BVP alternative / BVP)</a:t>
+              <a:t>Black = fiscal GPS after removing warranty parts (€). FY26 ≈ 26.1% (warranty EUR 102,418 ≈ 30% of FY26 billing).</a:t>
             </a:r>
           </a:p>
           <a:p>
@@ -11837,7 +12278,7 @@
               </a:spcAft>
             </a:pPr>
             <a:r>
-              <a:rPr sz="1500" b="1">
+              <a:rPr sz="1250" b="1">
                 <a:solidFill>
                   <a:srgbClr val="CC0E1E"/>
                 </a:solidFill>
@@ -11846,153 +12287,13 @@
               <a:t>—  </a:t>
             </a:r>
             <a:r>
-              <a:rPr sz="1500">
+              <a:rPr sz="1250">
                 <a:solidFill>
                   <a:srgbClr val="1A1A1A"/>
                 </a:solidFill>
                 <a:latin typeface="Calibri"/>
               </a:rPr>
-              <a:t>Where the money went — outside the service-parts basket (FY)</a:t>
-            </a:r>
-          </a:p>
-          <a:p>
-            <a:pPr>
-              <a:lnSpc>
-                <a:spcPct val="125000"/>
-              </a:lnSpc>
-              <a:spcAft>
-                <a:spcPts val="1000"/>
-              </a:spcAft>
-            </a:pPr>
-            <a:r>
-              <a:rPr sz="1500" b="1">
-                <a:solidFill>
-                  <a:srgbClr val="CC0E1E"/>
-                </a:solidFill>
-                <a:latin typeface="Calibri"/>
-              </a:rPr>
-              <a:t>—  </a:t>
-            </a:r>
-            <a:r>
-              <a:rPr sz="1500">
-                <a:solidFill>
-                  <a:srgbClr val="1A1A1A"/>
-                </a:solidFill>
-                <a:latin typeface="Calibri"/>
-              </a:rPr>
-              <a:t>Service parts: CY capture vs network + FY billing (capture % is CY-only by design)</a:t>
-            </a:r>
-          </a:p>
-          <a:p>
-            <a:pPr>
-              <a:lnSpc>
-                <a:spcPct val="125000"/>
-              </a:lnSpc>
-              <a:spcAft>
-                <a:spcPts val="1000"/>
-              </a:spcAft>
-            </a:pPr>
-            <a:r>
-              <a:rPr sz="1500" b="1">
-                <a:solidFill>
-                  <a:srgbClr val="CC0E1E"/>
-                </a:solidFill>
-                <a:latin typeface="Calibri"/>
-              </a:rPr>
-              <a:t>—  </a:t>
-            </a:r>
-            <a:r>
-              <a:rPr sz="1500">
-                <a:solidFill>
-                  <a:srgbClr val="1A1A1A"/>
-                </a:solidFill>
-                <a:latin typeface="Calibri"/>
-              </a:rPr>
-              <a:t>Brake pads — BVP share of total brake pad sales (FY)</a:t>
-            </a:r>
-          </a:p>
-          <a:p>
-            <a:pPr>
-              <a:lnSpc>
-                <a:spcPct val="125000"/>
-              </a:lnSpc>
-              <a:spcAft>
-                <a:spcPts val="1000"/>
-              </a:spcAft>
-            </a:pPr>
-            <a:r>
-              <a:rPr sz="1500" b="1">
-                <a:solidFill>
-                  <a:srgbClr val="CC0E1E"/>
-                </a:solidFill>
-                <a:latin typeface="Calibri"/>
-              </a:rPr>
-              <a:t>—  </a:t>
-            </a:r>
-            <a:r>
-              <a:rPr sz="1500">
-                <a:solidFill>
-                  <a:srgbClr val="1A1A1A"/>
-                </a:solidFill>
-                <a:latin typeface="Calibri"/>
-              </a:rPr>
-              <a:t>AIM exposure</a:t>
-            </a:r>
-          </a:p>
-          <a:p>
-            <a:pPr>
-              <a:lnSpc>
-                <a:spcPct val="125000"/>
-              </a:lnSpc>
-              <a:spcAft>
-                <a:spcPts val="1000"/>
-              </a:spcAft>
-            </a:pPr>
-            <a:r>
-              <a:rPr sz="1500" b="1">
-                <a:solidFill>
-                  <a:srgbClr val="CC0E1E"/>
-                </a:solidFill>
-                <a:latin typeface="Calibri"/>
-              </a:rPr>
-              <a:t>—  </a:t>
-            </a:r>
-            <a:r>
-              <a:rPr sz="1500">
-                <a:solidFill>
-                  <a:srgbClr val="1A1A1A"/>
-                </a:solidFill>
-                <a:latin typeface="Calibri"/>
-              </a:rPr>
-              <a:t>Warranty — two lenses</a:t>
-            </a:r>
-          </a:p>
-          <a:p>
-            <a:pPr>
-              <a:lnSpc>
-                <a:spcPct val="125000"/>
-              </a:lnSpc>
-              <a:spcAft>
-                <a:spcPts val="1000"/>
-              </a:spcAft>
-            </a:pPr>
-            <a:r>
-              <a:rPr sz="1500" b="1">
-                <a:solidFill>
-                  <a:srgbClr val="CC0E1E"/>
-                </a:solidFill>
-                <a:latin typeface="Calibri"/>
-              </a:rPr>
-              <a:t>—  </a:t>
-            </a:r>
-            <a:r>
-              <a:rPr sz="1500">
-                <a:solidFill>
-                  <a:srgbClr val="1A1A1A"/>
-                </a:solidFill>
-                <a:latin typeface="Calibri"/>
-              </a:rPr>
-              <a:t>How to use this in the meeting</a:t>
+              <a:t>Fleet 3,734 → 3,645 (working year-end estimate under the FY2027 target).</a:t>
             </a:r>
           </a:p>
         </p:txBody>
@@ -12120,7 +12421,7 @@
                 </a:solidFill>
                 <a:latin typeface="Calibri"/>
               </a:rPr>
-              <a:t>GPS</a:t>
+              <a:t>WALLET MIX</a:t>
             </a:r>
           </a:p>
         </p:txBody>
@@ -12155,7 +12456,7 @@
                 </a:solidFill>
                 <a:latin typeface="Calibri"/>
               </a:rPr>
-              <a:t>GPS: fiscal year headline vs after warranty</a:t>
+              <a:t>FY2025 → FY2026 wallet mix</a:t>
             </a:r>
           </a:p>
         </p:txBody>
@@ -12240,7 +12541,7 @@
       </p:sp>
       <p:pic>
         <p:nvPicPr>
-          <p:cNvPr id="8" name="Picture 7" descr="modeb_gps.png"/>
+          <p:cNvPr id="8" name="Picture 7" descr="modeb_fy_wallet.png"/>
           <p:cNvPicPr>
             <a:picLocks noChangeAspect="1"/>
           </p:cNvPicPr>
@@ -12254,8 +12555,8 @@
         </p:blipFill>
         <p:spPr>
           <a:xfrm>
-            <a:off x="292608" y="2120980"/>
-            <a:ext cx="7178040" cy="3027520"/>
+            <a:off x="292608" y="1324087"/>
+            <a:ext cx="6949440" cy="2929665"/>
           </a:xfrm>
           <a:prstGeom prst="rect">
             <a:avLst/>
@@ -12264,92 +12565,14 @@
       </p:pic>
       <p:sp>
         <p:nvSpPr>
-          <p:cNvPr id="9" name="Rectangle 8"/>
-          <p:cNvSpPr/>
-          <p:nvPr/>
-        </p:nvSpPr>
-        <p:spPr>
-          <a:xfrm>
-            <a:off x="7726679" y="1188720"/>
-            <a:ext cx="22000" cy="4892040"/>
-          </a:xfrm>
-          <a:prstGeom prst="rect">
-            <a:avLst/>
-          </a:prstGeom>
-          <a:solidFill>
-            <a:srgbClr val="ECECEC"/>
-          </a:solidFill>
-          <a:ln>
-            <a:noFill/>
-          </a:ln>
-        </p:spPr>
-        <p:style>
-          <a:lnRef idx="1">
-            <a:schemeClr val="accent1"/>
-          </a:lnRef>
-          <a:fillRef idx="3">
-            <a:schemeClr val="accent1"/>
-          </a:fillRef>
-          <a:effectRef idx="2">
-            <a:schemeClr val="accent1"/>
-          </a:effectRef>
-          <a:fontRef idx="minor">
-            <a:schemeClr val="lt1"/>
-          </a:fontRef>
-        </p:style>
-        <p:txBody>
-          <a:bodyPr rtlCol="0" anchor="ctr"/>
-          <a:lstStyle/>
-          <a:p>
-            <a:pPr algn="ctr"/>
-          </a:p>
-        </p:txBody>
-      </p:sp>
-      <p:sp>
-        <p:nvSpPr>
-          <p:cNvPr id="10" name="TextBox 9"/>
+          <p:cNvPr id="9" name="TextBox 8"/>
           <p:cNvSpPr txBox="1"/>
           <p:nvPr/>
         </p:nvSpPr>
         <p:spPr>
           <a:xfrm>
-            <a:off x="7927847" y="1234440"/>
-            <a:ext cx="3886200" cy="320040"/>
-          </a:xfrm>
-          <a:prstGeom prst="rect">
-            <a:avLst/>
-          </a:prstGeom>
-          <a:noFill/>
-        </p:spPr>
-        <p:txBody>
-          <a:bodyPr wrap="square">
-            <a:spAutoFit/>
-          </a:bodyPr>
-          <a:lstStyle/>
-          <a:p>
-            <a:pPr algn="l"/>
-            <a:r>
-              <a:rPr sz="1200" b="1">
-                <a:solidFill>
-                  <a:srgbClr val="CC0E1E"/>
-                </a:solidFill>
-                <a:latin typeface="Calibri"/>
-              </a:rPr>
-              <a:t>TAKEAWAYS</a:t>
-            </a:r>
-          </a:p>
-        </p:txBody>
-      </p:sp>
-      <p:sp>
-        <p:nvSpPr>
-          <p:cNvPr id="11" name="TextBox 10"/>
-          <p:cNvSpPr txBox="1"/>
-          <p:nvPr/>
-        </p:nvSpPr>
-        <p:spPr>
-          <a:xfrm>
-            <a:off x="7927847" y="1691640"/>
-            <a:ext cx="3794760" cy="4343400"/>
+            <a:off x="7406640" y="1234440"/>
+            <a:ext cx="4297680" cy="4114800"/>
           </a:xfrm>
           <a:prstGeom prst="rect">
             <a:avLst/>
@@ -12371,7 +12594,7 @@
               </a:spcAft>
             </a:pPr>
             <a:r>
-              <a:rPr sz="1250" b="1">
+              <a:rPr sz="1300" b="1">
                 <a:solidFill>
                   <a:srgbClr val="CC0E1E"/>
                 </a:solidFill>
@@ -12380,13 +12603,13 @@
               <a:t>—  </a:t>
             </a:r>
             <a:r>
-              <a:rPr sz="1250">
+              <a:rPr sz="1300">
                 <a:solidFill>
                   <a:srgbClr val="1A1A1A"/>
                 </a:solidFill>
                 <a:latin typeface="Calibri"/>
               </a:rPr>
-              <a:t>Red = fiscal-year GPS (frozen CY2025 wallet). FY25 39.2% → FY26 37.1%.</a:t>
+              <a:t>Total EUR 379,407 → EUR 349,882 (-7.8%).</a:t>
             </a:r>
           </a:p>
           <a:p>
@@ -12399,7 +12622,7 @@
               </a:spcAft>
             </a:pPr>
             <a:r>
-              <a:rPr sz="1250" b="1">
+              <a:rPr sz="1300" b="1">
                 <a:solidFill>
                   <a:srgbClr val="CC0E1E"/>
                 </a:solidFill>
@@ -12408,13 +12631,13 @@
               <a:t>—  </a:t>
             </a:r>
             <a:r>
-              <a:rPr sz="1250">
+              <a:rPr sz="1300">
                 <a:solidFill>
                   <a:srgbClr val="1A1A1A"/>
                 </a:solidFill>
                 <a:latin typeface="Calibri"/>
               </a:rPr>
-              <a:t>Black = fiscal GPS after removing warranty parts (€). FY26 ≈ 26.1% (warranty EUR 102,418 ≈ 30% of FY26 billing).</a:t>
+              <a:t>Genuine only EUR -31,719.</a:t>
             </a:r>
           </a:p>
           <a:p>
@@ -12427,7 +12650,7 @@
               </a:spcAft>
             </a:pPr>
             <a:r>
-              <a:rPr sz="1250" b="1">
+              <a:rPr sz="1300" b="1">
                 <a:solidFill>
                   <a:srgbClr val="CC0E1E"/>
                 </a:solidFill>
@@ -12436,13 +12659,41 @@
               <a:t>—  </a:t>
             </a:r>
             <a:r>
-              <a:rPr sz="1250">
+              <a:rPr sz="1300">
                 <a:solidFill>
                   <a:srgbClr val="1A1A1A"/>
                 </a:solidFill>
                 <a:latin typeface="Calibri"/>
               </a:rPr>
-              <a:t>Fleet 3,734 → 3,645 (working year-end estimate under the FY2027 target).</a:t>
+              <a:t>Genuine with BVP alternative EUR -226; BVP EUR 2,420 (3.5% of FY26 wallet).</a:t>
+            </a:r>
+          </a:p>
+          <a:p>
+            <a:pPr>
+              <a:lnSpc>
+                <a:spcPct val="125000"/>
+              </a:lnSpc>
+              <a:spcAft>
+                <a:spcPts val="1000"/>
+              </a:spcAft>
+            </a:pPr>
+            <a:r>
+              <a:rPr sz="1300" b="1">
+                <a:solidFill>
+                  <a:srgbClr val="CC0E1E"/>
+                </a:solidFill>
+                <a:latin typeface="Calibri"/>
+              </a:rPr>
+              <a:t>—  </a:t>
+            </a:r>
+            <a:r>
+              <a:rPr sz="1300">
+                <a:solidFill>
+                  <a:srgbClr val="1A1A1A"/>
+                </a:solidFill>
+                <a:latin typeface="Calibri"/>
+              </a:rPr>
+              <a:t>Display label locked: Genuine with BVP alternative.</a:t>
             </a:r>
           </a:p>
         </p:txBody>
@@ -12605,7 +12856,7 @@
                 </a:solidFill>
                 <a:latin typeface="Calibri"/>
               </a:rPr>
-              <a:t>FY2025 → FY2026 wallet mix</a:t>
+              <a:t>FY wallet mix — detail</a:t>
             </a:r>
           </a:p>
         </p:txBody>
@@ -12684,406 +12935,6 @@
                 <a:latin typeface="Calibri"/>
               </a:rPr>
               <a:t>24</a:t>
-            </a:r>
-          </a:p>
-        </p:txBody>
-      </p:sp>
-      <p:pic>
-        <p:nvPicPr>
-          <p:cNvPr id="8" name="Picture 7" descr="modeb_fy_wallet.png"/>
-          <p:cNvPicPr>
-            <a:picLocks noChangeAspect="1"/>
-          </p:cNvPicPr>
-          <p:nvPr/>
-        </p:nvPicPr>
-        <p:blipFill>
-          <a:blip r:embed="rId3"/>
-          <a:stretch>
-            <a:fillRect/>
-          </a:stretch>
-        </p:blipFill>
-        <p:spPr>
-          <a:xfrm>
-            <a:off x="292608" y="1323369"/>
-            <a:ext cx="6949440" cy="2931102"/>
-          </a:xfrm>
-          <a:prstGeom prst="rect">
-            <a:avLst/>
-          </a:prstGeom>
-        </p:spPr>
-      </p:pic>
-      <p:sp>
-        <p:nvSpPr>
-          <p:cNvPr id="9" name="TextBox 8"/>
-          <p:cNvSpPr txBox="1"/>
-          <p:nvPr/>
-        </p:nvSpPr>
-        <p:spPr>
-          <a:xfrm>
-            <a:off x="7406640" y="1234440"/>
-            <a:ext cx="4297680" cy="4114800"/>
-          </a:xfrm>
-          <a:prstGeom prst="rect">
-            <a:avLst/>
-          </a:prstGeom>
-          <a:noFill/>
-        </p:spPr>
-        <p:txBody>
-          <a:bodyPr wrap="square">
-            <a:spAutoFit/>
-          </a:bodyPr>
-          <a:lstStyle/>
-          <a:p>
-            <a:pPr>
-              <a:lnSpc>
-                <a:spcPct val="125000"/>
-              </a:lnSpc>
-              <a:spcAft>
-                <a:spcPts val="1000"/>
-              </a:spcAft>
-            </a:pPr>
-            <a:r>
-              <a:rPr sz="1300" b="1">
-                <a:solidFill>
-                  <a:srgbClr val="CC0E1E"/>
-                </a:solidFill>
-                <a:latin typeface="Calibri"/>
-              </a:rPr>
-              <a:t>—  </a:t>
-            </a:r>
-            <a:r>
-              <a:rPr sz="1300">
-                <a:solidFill>
-                  <a:srgbClr val="1A1A1A"/>
-                </a:solidFill>
-                <a:latin typeface="Calibri"/>
-              </a:rPr>
-              <a:t>Total EUR 379,407 → EUR 349,882 (-7.8%).</a:t>
-            </a:r>
-          </a:p>
-          <a:p>
-            <a:pPr>
-              <a:lnSpc>
-                <a:spcPct val="125000"/>
-              </a:lnSpc>
-              <a:spcAft>
-                <a:spcPts val="1000"/>
-              </a:spcAft>
-            </a:pPr>
-            <a:r>
-              <a:rPr sz="1300" b="1">
-                <a:solidFill>
-                  <a:srgbClr val="CC0E1E"/>
-                </a:solidFill>
-                <a:latin typeface="Calibri"/>
-              </a:rPr>
-              <a:t>—  </a:t>
-            </a:r>
-            <a:r>
-              <a:rPr sz="1300">
-                <a:solidFill>
-                  <a:srgbClr val="1A1A1A"/>
-                </a:solidFill>
-                <a:latin typeface="Calibri"/>
-              </a:rPr>
-              <a:t>Genuine only EUR -31,719.</a:t>
-            </a:r>
-          </a:p>
-          <a:p>
-            <a:pPr>
-              <a:lnSpc>
-                <a:spcPct val="125000"/>
-              </a:lnSpc>
-              <a:spcAft>
-                <a:spcPts val="1000"/>
-              </a:spcAft>
-            </a:pPr>
-            <a:r>
-              <a:rPr sz="1300" b="1">
-                <a:solidFill>
-                  <a:srgbClr val="CC0E1E"/>
-                </a:solidFill>
-                <a:latin typeface="Calibri"/>
-              </a:rPr>
-              <a:t>—  </a:t>
-            </a:r>
-            <a:r>
-              <a:rPr sz="1300">
-                <a:solidFill>
-                  <a:srgbClr val="1A1A1A"/>
-                </a:solidFill>
-                <a:latin typeface="Calibri"/>
-              </a:rPr>
-              <a:t>Genuine with BVP alternative EUR -226; BVP EUR 2,420 (3.5% of FY26 wallet).</a:t>
-            </a:r>
-          </a:p>
-          <a:p>
-            <a:pPr>
-              <a:lnSpc>
-                <a:spcPct val="125000"/>
-              </a:lnSpc>
-              <a:spcAft>
-                <a:spcPts val="1000"/>
-              </a:spcAft>
-            </a:pPr>
-            <a:r>
-              <a:rPr sz="1300" b="1">
-                <a:solidFill>
-                  <a:srgbClr val="CC0E1E"/>
-                </a:solidFill>
-                <a:latin typeface="Calibri"/>
-              </a:rPr>
-              <a:t>—  </a:t>
-            </a:r>
-            <a:r>
-              <a:rPr sz="1300">
-                <a:solidFill>
-                  <a:srgbClr val="1A1A1A"/>
-                </a:solidFill>
-                <a:latin typeface="Calibri"/>
-              </a:rPr>
-              <a:t>Display label locked: Genuine with BVP alternative.</a:t>
-            </a:r>
-          </a:p>
-        </p:txBody>
-      </p:sp>
-    </p:spTree>
-  </p:cSld>
-  <p:clrMapOvr>
-    <a:masterClrMapping/>
-  </p:clrMapOvr>
-</p:sld>
-</file>
-
-<file path=ppt/slides/slide25.xml><?xml version="1.0" encoding="utf-8"?>
-<p:sld xmlns:a="http://schemas.openxmlformats.org/drawingml/2006/main" xmlns:p="http://schemas.openxmlformats.org/presentationml/2006/main" xmlns:r="http://schemas.openxmlformats.org/officeDocument/2006/relationships">
-  <p:cSld>
-    <p:bg>
-      <p:bgPr>
-        <a:solidFill>
-          <a:srgbClr val="FFFFFF"/>
-        </a:solidFill>
-        <a:effectLst/>
-      </p:bgPr>
-    </p:bg>
-    <p:spTree>
-      <p:nvGrpSpPr>
-        <p:cNvPr id="1" name=""/>
-        <p:cNvGrpSpPr/>
-        <p:nvPr/>
-      </p:nvGrpSpPr>
-      <p:grpSpPr/>
-      <p:pic>
-        <p:nvPicPr>
-          <p:cNvPr id="2" name="Picture 1" descr="image.png"/>
-          <p:cNvPicPr>
-            <a:picLocks noChangeAspect="1"/>
-          </p:cNvPicPr>
-          <p:nvPr/>
-        </p:nvPicPr>
-        <p:blipFill>
-          <a:blip r:embed="rId2"/>
-          <a:stretch>
-            <a:fillRect/>
-          </a:stretch>
-        </p:blipFill>
-        <p:spPr>
-          <a:xfrm>
-            <a:off x="256032" y="6263640"/>
-            <a:ext cx="1679787" cy="292608"/>
-          </a:xfrm>
-          <a:prstGeom prst="rect">
-            <a:avLst/>
-          </a:prstGeom>
-        </p:spPr>
-      </p:pic>
-      <p:sp>
-        <p:nvSpPr>
-          <p:cNvPr id="3" name="Rectangle 2"/>
-          <p:cNvSpPr/>
-          <p:nvPr/>
-        </p:nvSpPr>
-        <p:spPr>
-          <a:xfrm>
-            <a:off x="0" y="6766560"/>
-            <a:ext cx="12188952" cy="91440"/>
-          </a:xfrm>
-          <a:prstGeom prst="rect">
-            <a:avLst/>
-          </a:prstGeom>
-          <a:solidFill>
-            <a:srgbClr val="CC0E1E"/>
-          </a:solidFill>
-          <a:ln>
-            <a:noFill/>
-          </a:ln>
-        </p:spPr>
-        <p:style>
-          <a:lnRef idx="1">
-            <a:schemeClr val="accent1"/>
-          </a:lnRef>
-          <a:fillRef idx="3">
-            <a:schemeClr val="accent1"/>
-          </a:fillRef>
-          <a:effectRef idx="2">
-            <a:schemeClr val="accent1"/>
-          </a:effectRef>
-          <a:fontRef idx="minor">
-            <a:schemeClr val="lt1"/>
-          </a:fontRef>
-        </p:style>
-        <p:txBody>
-          <a:bodyPr rtlCol="0" anchor="ctr"/>
-          <a:lstStyle/>
-          <a:p>
-            <a:pPr algn="ctr"/>
-          </a:p>
-        </p:txBody>
-      </p:sp>
-      <p:sp>
-        <p:nvSpPr>
-          <p:cNvPr id="4" name="TextBox 3"/>
-          <p:cNvSpPr txBox="1"/>
-          <p:nvPr/>
-        </p:nvSpPr>
-        <p:spPr>
-          <a:xfrm>
-            <a:off x="292608" y="201168"/>
-            <a:ext cx="11430000" cy="274320"/>
-          </a:xfrm>
-          <a:prstGeom prst="rect">
-            <a:avLst/>
-          </a:prstGeom>
-          <a:noFill/>
-        </p:spPr>
-        <p:txBody>
-          <a:bodyPr wrap="square">
-            <a:spAutoFit/>
-          </a:bodyPr>
-          <a:lstStyle/>
-          <a:p>
-            <a:pPr algn="l"/>
-            <a:r>
-              <a:rPr sz="1100" b="1">
-                <a:solidFill>
-                  <a:srgbClr val="CC0E1E"/>
-                </a:solidFill>
-                <a:latin typeface="Calibri"/>
-              </a:rPr>
-              <a:t>WALLET MIX</a:t>
-            </a:r>
-          </a:p>
-        </p:txBody>
-      </p:sp>
-      <p:sp>
-        <p:nvSpPr>
-          <p:cNvPr id="5" name="TextBox 4"/>
-          <p:cNvSpPr txBox="1"/>
-          <p:nvPr/>
-        </p:nvSpPr>
-        <p:spPr>
-          <a:xfrm>
-            <a:off x="292608" y="475488"/>
-            <a:ext cx="11612880" cy="566928"/>
-          </a:xfrm>
-          <a:prstGeom prst="rect">
-            <a:avLst/>
-          </a:prstGeom>
-          <a:noFill/>
-        </p:spPr>
-        <p:txBody>
-          <a:bodyPr wrap="square">
-            <a:spAutoFit/>
-          </a:bodyPr>
-          <a:lstStyle/>
-          <a:p>
-            <a:pPr algn="l"/>
-            <a:r>
-              <a:rPr sz="2500" b="1">
-                <a:solidFill>
-                  <a:srgbClr val="1A1A1A"/>
-                </a:solidFill>
-                <a:latin typeface="Calibri"/>
-              </a:rPr>
-              <a:t>FY wallet mix — detail</a:t>
-            </a:r>
-          </a:p>
-        </p:txBody>
-      </p:sp>
-      <p:sp>
-        <p:nvSpPr>
-          <p:cNvPr id="6" name="Rectangle 5"/>
-          <p:cNvSpPr/>
-          <p:nvPr/>
-        </p:nvSpPr>
-        <p:spPr>
-          <a:xfrm>
-            <a:off x="292608" y="1005840"/>
-            <a:ext cx="11612880" cy="28000"/>
-          </a:xfrm>
-          <a:prstGeom prst="rect">
-            <a:avLst/>
-          </a:prstGeom>
-          <a:solidFill>
-            <a:srgbClr val="CC0E1E"/>
-          </a:solidFill>
-          <a:ln>
-            <a:noFill/>
-          </a:ln>
-        </p:spPr>
-        <p:style>
-          <a:lnRef idx="1">
-            <a:schemeClr val="accent1"/>
-          </a:lnRef>
-          <a:fillRef idx="3">
-            <a:schemeClr val="accent1"/>
-          </a:fillRef>
-          <a:effectRef idx="2">
-            <a:schemeClr val="accent1"/>
-          </a:effectRef>
-          <a:fontRef idx="minor">
-            <a:schemeClr val="lt1"/>
-          </a:fontRef>
-        </p:style>
-        <p:txBody>
-          <a:bodyPr rtlCol="0" anchor="ctr"/>
-          <a:lstStyle/>
-          <a:p>
-            <a:pPr algn="ctr"/>
-          </a:p>
-        </p:txBody>
-      </p:sp>
-      <p:sp>
-        <p:nvSpPr>
-          <p:cNvPr id="7" name="TextBox 6"/>
-          <p:cNvSpPr txBox="1"/>
-          <p:nvPr/>
-        </p:nvSpPr>
-        <p:spPr>
-          <a:xfrm>
-            <a:off x="11594592" y="6473952"/>
-            <a:ext cx="365760" cy="274320"/>
-          </a:xfrm>
-          <a:prstGeom prst="rect">
-            <a:avLst/>
-          </a:prstGeom>
-          <a:noFill/>
-        </p:spPr>
-        <p:txBody>
-          <a:bodyPr wrap="square">
-            <a:spAutoFit/>
-          </a:bodyPr>
-          <a:lstStyle/>
-          <a:p>
-            <a:pPr algn="r"/>
-            <a:r>
-              <a:rPr sz="1000" b="0">
-                <a:solidFill>
-                  <a:srgbClr val="5A5A5A"/>
-                </a:solidFill>
-                <a:latin typeface="Calibri"/>
-              </a:rPr>
-              <a:t>25</a:t>
             </a:r>
           </a:p>
         </p:txBody>
@@ -13688,6 +13539,382 @@
 </p:sld>
 </file>
 
+<file path=ppt/slides/slide25.xml><?xml version="1.0" encoding="utf-8"?>
+<p:sld xmlns:a="http://schemas.openxmlformats.org/drawingml/2006/main" xmlns:p="http://schemas.openxmlformats.org/presentationml/2006/main" xmlns:r="http://schemas.openxmlformats.org/officeDocument/2006/relationships">
+  <p:cSld>
+    <p:bg>
+      <p:bgPr>
+        <a:solidFill>
+          <a:srgbClr val="FFFFFF"/>
+        </a:solidFill>
+        <a:effectLst/>
+      </p:bgPr>
+    </p:bg>
+    <p:spTree>
+      <p:nvGrpSpPr>
+        <p:cNvPr id="1" name=""/>
+        <p:cNvGrpSpPr/>
+        <p:nvPr/>
+      </p:nvGrpSpPr>
+      <p:grpSpPr/>
+      <p:pic>
+        <p:nvPicPr>
+          <p:cNvPr id="2" name="Picture 1" descr="image.png"/>
+          <p:cNvPicPr>
+            <a:picLocks noChangeAspect="1"/>
+          </p:cNvPicPr>
+          <p:nvPr/>
+        </p:nvPicPr>
+        <p:blipFill>
+          <a:blip r:embed="rId2"/>
+          <a:stretch>
+            <a:fillRect/>
+          </a:stretch>
+        </p:blipFill>
+        <p:spPr>
+          <a:xfrm>
+            <a:off x="256032" y="6263640"/>
+            <a:ext cx="1679787" cy="292608"/>
+          </a:xfrm>
+          <a:prstGeom prst="rect">
+            <a:avLst/>
+          </a:prstGeom>
+        </p:spPr>
+      </p:pic>
+      <p:sp>
+        <p:nvSpPr>
+          <p:cNvPr id="3" name="Rectangle 2"/>
+          <p:cNvSpPr/>
+          <p:nvPr/>
+        </p:nvSpPr>
+        <p:spPr>
+          <a:xfrm>
+            <a:off x="0" y="6766560"/>
+            <a:ext cx="12188952" cy="91440"/>
+          </a:xfrm>
+          <a:prstGeom prst="rect">
+            <a:avLst/>
+          </a:prstGeom>
+          <a:solidFill>
+            <a:srgbClr val="CC0E1E"/>
+          </a:solidFill>
+          <a:ln>
+            <a:noFill/>
+          </a:ln>
+        </p:spPr>
+        <p:style>
+          <a:lnRef idx="1">
+            <a:schemeClr val="accent1"/>
+          </a:lnRef>
+          <a:fillRef idx="3">
+            <a:schemeClr val="accent1"/>
+          </a:fillRef>
+          <a:effectRef idx="2">
+            <a:schemeClr val="accent1"/>
+          </a:effectRef>
+          <a:fontRef idx="minor">
+            <a:schemeClr val="lt1"/>
+          </a:fontRef>
+        </p:style>
+        <p:txBody>
+          <a:bodyPr rtlCol="0" anchor="ctr"/>
+          <a:lstStyle/>
+          <a:p>
+            <a:pPr algn="ctr"/>
+          </a:p>
+        </p:txBody>
+      </p:sp>
+      <p:sp>
+        <p:nvSpPr>
+          <p:cNvPr id="4" name="TextBox 3"/>
+          <p:cNvSpPr txBox="1"/>
+          <p:nvPr/>
+        </p:nvSpPr>
+        <p:spPr>
+          <a:xfrm>
+            <a:off x="292608" y="201168"/>
+            <a:ext cx="11430000" cy="274320"/>
+          </a:xfrm>
+          <a:prstGeom prst="rect">
+            <a:avLst/>
+          </a:prstGeom>
+          <a:noFill/>
+        </p:spPr>
+        <p:txBody>
+          <a:bodyPr wrap="square">
+            <a:spAutoFit/>
+          </a:bodyPr>
+          <a:lstStyle/>
+          <a:p>
+            <a:pPr algn="l"/>
+            <a:r>
+              <a:rPr sz="1100" b="1">
+                <a:solidFill>
+                  <a:srgbClr val="CC0E1E"/>
+                </a:solidFill>
+                <a:latin typeface="Calibri"/>
+              </a:rPr>
+              <a:t>DRIVERS</a:t>
+            </a:r>
+          </a:p>
+        </p:txBody>
+      </p:sp>
+      <p:sp>
+        <p:nvSpPr>
+          <p:cNvPr id="5" name="TextBox 4"/>
+          <p:cNvSpPr txBox="1"/>
+          <p:nvPr/>
+        </p:nvSpPr>
+        <p:spPr>
+          <a:xfrm>
+            <a:off x="292608" y="475488"/>
+            <a:ext cx="11612880" cy="566928"/>
+          </a:xfrm>
+          <a:prstGeom prst="rect">
+            <a:avLst/>
+          </a:prstGeom>
+          <a:noFill/>
+        </p:spPr>
+        <p:txBody>
+          <a:bodyPr wrap="square">
+            <a:spAutoFit/>
+          </a:bodyPr>
+          <a:lstStyle/>
+          <a:p>
+            <a:pPr algn="l"/>
+            <a:r>
+              <a:rPr sz="2500" b="1">
+                <a:solidFill>
+                  <a:srgbClr val="1A1A1A"/>
+                </a:solidFill>
+                <a:latin typeface="Calibri"/>
+              </a:rPr>
+              <a:t>Where the genuine drop sits (FY2025 → FY2026)</a:t>
+            </a:r>
+          </a:p>
+        </p:txBody>
+      </p:sp>
+      <p:sp>
+        <p:nvSpPr>
+          <p:cNvPr id="6" name="Rectangle 5"/>
+          <p:cNvSpPr/>
+          <p:nvPr/>
+        </p:nvSpPr>
+        <p:spPr>
+          <a:xfrm>
+            <a:off x="292608" y="1005840"/>
+            <a:ext cx="11612880" cy="28000"/>
+          </a:xfrm>
+          <a:prstGeom prst="rect">
+            <a:avLst/>
+          </a:prstGeom>
+          <a:solidFill>
+            <a:srgbClr val="CC0E1E"/>
+          </a:solidFill>
+          <a:ln>
+            <a:noFill/>
+          </a:ln>
+        </p:spPr>
+        <p:style>
+          <a:lnRef idx="1">
+            <a:schemeClr val="accent1"/>
+          </a:lnRef>
+          <a:fillRef idx="3">
+            <a:schemeClr val="accent1"/>
+          </a:fillRef>
+          <a:effectRef idx="2">
+            <a:schemeClr val="accent1"/>
+          </a:effectRef>
+          <a:fontRef idx="minor">
+            <a:schemeClr val="lt1"/>
+          </a:fontRef>
+        </p:style>
+        <p:txBody>
+          <a:bodyPr rtlCol="0" anchor="ctr"/>
+          <a:lstStyle/>
+          <a:p>
+            <a:pPr algn="ctr"/>
+          </a:p>
+        </p:txBody>
+      </p:sp>
+      <p:sp>
+        <p:nvSpPr>
+          <p:cNvPr id="7" name="TextBox 6"/>
+          <p:cNvSpPr txBox="1"/>
+          <p:nvPr/>
+        </p:nvSpPr>
+        <p:spPr>
+          <a:xfrm>
+            <a:off x="11594592" y="6473952"/>
+            <a:ext cx="365760" cy="274320"/>
+          </a:xfrm>
+          <a:prstGeom prst="rect">
+            <a:avLst/>
+          </a:prstGeom>
+          <a:noFill/>
+        </p:spPr>
+        <p:txBody>
+          <a:bodyPr wrap="square">
+            <a:spAutoFit/>
+          </a:bodyPr>
+          <a:lstStyle/>
+          <a:p>
+            <a:pPr algn="r"/>
+            <a:r>
+              <a:rPr sz="1000" b="0">
+                <a:solidFill>
+                  <a:srgbClr val="5A5A5A"/>
+                </a:solidFill>
+                <a:latin typeface="Calibri"/>
+              </a:rPr>
+              <a:t>25</a:t>
+            </a:r>
+          </a:p>
+        </p:txBody>
+      </p:sp>
+      <p:sp>
+        <p:nvSpPr>
+          <p:cNvPr id="8" name="TextBox 7"/>
+          <p:cNvSpPr txBox="1"/>
+          <p:nvPr/>
+        </p:nvSpPr>
+        <p:spPr>
+          <a:xfrm>
+            <a:off x="292608" y="1234440"/>
+            <a:ext cx="11430000" cy="4572000"/>
+          </a:xfrm>
+          <a:prstGeom prst="rect">
+            <a:avLst/>
+          </a:prstGeom>
+          <a:noFill/>
+        </p:spPr>
+        <p:txBody>
+          <a:bodyPr wrap="square">
+            <a:spAutoFit/>
+          </a:bodyPr>
+          <a:lstStyle/>
+          <a:p>
+            <a:pPr>
+              <a:lnSpc>
+                <a:spcPct val="125000"/>
+              </a:lnSpc>
+              <a:spcAft>
+                <a:spcPts val="1000"/>
+              </a:spcAft>
+            </a:pPr>
+            <a:r>
+              <a:rPr sz="1500" b="1">
+                <a:solidFill>
+                  <a:srgbClr val="CC0E1E"/>
+                </a:solidFill>
+                <a:latin typeface="Calibri"/>
+              </a:rPr>
+              <a:t>—  </a:t>
+            </a:r>
+            <a:r>
+              <a:rPr sz="1500">
+                <a:solidFill>
+                  <a:srgbClr val="1A1A1A"/>
+                </a:solidFill>
+                <a:latin typeface="Calibri"/>
+              </a:rPr>
+              <a:t>Genuine-only sales moved EUR -31,719 from FY2025 to FY2026.</a:t>
+            </a:r>
+          </a:p>
+          <a:p>
+            <a:pPr>
+              <a:lnSpc>
+                <a:spcPct val="125000"/>
+              </a:lnSpc>
+              <a:spcAft>
+                <a:spcPts val="1000"/>
+              </a:spcAft>
+            </a:pPr>
+            <a:r>
+              <a:rPr sz="1500" b="1">
+                <a:solidFill>
+                  <a:srgbClr val="CC0E1E"/>
+                </a:solidFill>
+                <a:latin typeface="Calibri"/>
+              </a:rPr>
+              <a:t>—  </a:t>
+            </a:r>
+            <a:r>
+              <a:rPr sz="1500">
+                <a:solidFill>
+                  <a:srgbClr val="1A1A1A"/>
+                </a:solidFill>
+                <a:latin typeface="Calibri"/>
+              </a:rPr>
+              <a:t>Of that, the routine service basket (filters, pads, rotors) moved EUR 7,633 on genuine-only; BVP in that basket moved EUR 3,835.</a:t>
+            </a:r>
+          </a:p>
+          <a:p>
+            <a:pPr>
+              <a:lnSpc>
+                <a:spcPct val="125000"/>
+              </a:lnSpc>
+              <a:spcAft>
+                <a:spcPts val="1000"/>
+              </a:spcAft>
+            </a:pPr>
+            <a:r>
+              <a:rPr sz="1500" b="1">
+                <a:solidFill>
+                  <a:srgbClr val="CC0E1E"/>
+                </a:solidFill>
+                <a:latin typeface="Calibri"/>
+              </a:rPr>
+              <a:t>—  </a:t>
+            </a:r>
+            <a:r>
+              <a:rPr sz="1500">
+                <a:solidFill>
+                  <a:srgbClr val="1A1A1A"/>
+                </a:solidFill>
+                <a:latin typeface="Calibri"/>
+              </a:rPr>
+              <a:t>So about 124% of the genuine-only drop sits outside routine service parts.</a:t>
+            </a:r>
+          </a:p>
+          <a:p>
+            <a:pPr>
+              <a:lnSpc>
+                <a:spcPct val="125000"/>
+              </a:lnSpc>
+              <a:spcAft>
+                <a:spcPts val="1000"/>
+              </a:spcAft>
+            </a:pPr>
+            <a:r>
+              <a:rPr sz="1500" b="1">
+                <a:solidFill>
+                  <a:srgbClr val="CC0E1E"/>
+                </a:solidFill>
+                <a:latin typeface="Calibri"/>
+              </a:rPr>
+              <a:t>—  </a:t>
+            </a:r>
+            <a:r>
+              <a:rPr sz="1500">
+                <a:solidFill>
+                  <a:srgbClr val="1A1A1A"/>
+                </a:solidFill>
+                <a:latin typeface="Calibri"/>
+              </a:rPr>
+              <a:t>Meeting line: check high-value assemblies / sensors before blaming the filter or pad menu.</a:t>
+            </a:r>
+          </a:p>
+        </p:txBody>
+      </p:sp>
+    </p:spTree>
+  </p:cSld>
+  <p:clrMapOvr>
+    <a:masterClrMapping/>
+  </p:clrMapOvr>
+</p:sld>
+</file>
+
 <file path=ppt/slides/slide26.xml><?xml version="1.0" encoding="utf-8"?>
 <p:sld xmlns:a="http://schemas.openxmlformats.org/drawingml/2006/main" xmlns:p="http://schemas.openxmlformats.org/presentationml/2006/main" xmlns:r="http://schemas.openxmlformats.org/officeDocument/2006/relationships">
   <p:cSld>
@@ -13838,7 +14065,7 @@
                 </a:solidFill>
                 <a:latin typeface="Calibri"/>
               </a:rPr>
-              <a:t>Where the genuine drop sits (FY2025 → FY2026)</a:t>
+              <a:t>Largest part-number drops (FY24→FY25) — outside service filters</a:t>
             </a:r>
           </a:p>
         </p:txBody>
@@ -13917,382 +14144,6 @@
                 <a:latin typeface="Calibri"/>
               </a:rPr>
               <a:t>26</a:t>
-            </a:r>
-          </a:p>
-        </p:txBody>
-      </p:sp>
-      <p:sp>
-        <p:nvSpPr>
-          <p:cNvPr id="8" name="TextBox 7"/>
-          <p:cNvSpPr txBox="1"/>
-          <p:nvPr/>
-        </p:nvSpPr>
-        <p:spPr>
-          <a:xfrm>
-            <a:off x="292608" y="1234440"/>
-            <a:ext cx="11430000" cy="4572000"/>
-          </a:xfrm>
-          <a:prstGeom prst="rect">
-            <a:avLst/>
-          </a:prstGeom>
-          <a:noFill/>
-        </p:spPr>
-        <p:txBody>
-          <a:bodyPr wrap="square">
-            <a:spAutoFit/>
-          </a:bodyPr>
-          <a:lstStyle/>
-          <a:p>
-            <a:pPr>
-              <a:lnSpc>
-                <a:spcPct val="125000"/>
-              </a:lnSpc>
-              <a:spcAft>
-                <a:spcPts val="1000"/>
-              </a:spcAft>
-            </a:pPr>
-            <a:r>
-              <a:rPr sz="1500" b="1">
-                <a:solidFill>
-                  <a:srgbClr val="CC0E1E"/>
-                </a:solidFill>
-                <a:latin typeface="Calibri"/>
-              </a:rPr>
-              <a:t>—  </a:t>
-            </a:r>
-            <a:r>
-              <a:rPr sz="1500">
-                <a:solidFill>
-                  <a:srgbClr val="1A1A1A"/>
-                </a:solidFill>
-                <a:latin typeface="Calibri"/>
-              </a:rPr>
-              <a:t>Genuine-only sales moved EUR -31,719 from FY2025 to FY2026.</a:t>
-            </a:r>
-          </a:p>
-          <a:p>
-            <a:pPr>
-              <a:lnSpc>
-                <a:spcPct val="125000"/>
-              </a:lnSpc>
-              <a:spcAft>
-                <a:spcPts val="1000"/>
-              </a:spcAft>
-            </a:pPr>
-            <a:r>
-              <a:rPr sz="1500" b="1">
-                <a:solidFill>
-                  <a:srgbClr val="CC0E1E"/>
-                </a:solidFill>
-                <a:latin typeface="Calibri"/>
-              </a:rPr>
-              <a:t>—  </a:t>
-            </a:r>
-            <a:r>
-              <a:rPr sz="1500">
-                <a:solidFill>
-                  <a:srgbClr val="1A1A1A"/>
-                </a:solidFill>
-                <a:latin typeface="Calibri"/>
-              </a:rPr>
-              <a:t>Of that, the routine service basket (filters, pads, rotors) moved EUR 7,633 on genuine-only; BVP in that basket moved EUR 3,835.</a:t>
-            </a:r>
-          </a:p>
-          <a:p>
-            <a:pPr>
-              <a:lnSpc>
-                <a:spcPct val="125000"/>
-              </a:lnSpc>
-              <a:spcAft>
-                <a:spcPts val="1000"/>
-              </a:spcAft>
-            </a:pPr>
-            <a:r>
-              <a:rPr sz="1500" b="1">
-                <a:solidFill>
-                  <a:srgbClr val="CC0E1E"/>
-                </a:solidFill>
-                <a:latin typeface="Calibri"/>
-              </a:rPr>
-              <a:t>—  </a:t>
-            </a:r>
-            <a:r>
-              <a:rPr sz="1500">
-                <a:solidFill>
-                  <a:srgbClr val="1A1A1A"/>
-                </a:solidFill>
-                <a:latin typeface="Calibri"/>
-              </a:rPr>
-              <a:t>So about 124% of the genuine-only drop sits outside routine service parts.</a:t>
-            </a:r>
-          </a:p>
-          <a:p>
-            <a:pPr>
-              <a:lnSpc>
-                <a:spcPct val="125000"/>
-              </a:lnSpc>
-              <a:spcAft>
-                <a:spcPts val="1000"/>
-              </a:spcAft>
-            </a:pPr>
-            <a:r>
-              <a:rPr sz="1500" b="1">
-                <a:solidFill>
-                  <a:srgbClr val="CC0E1E"/>
-                </a:solidFill>
-                <a:latin typeface="Calibri"/>
-              </a:rPr>
-              <a:t>—  </a:t>
-            </a:r>
-            <a:r>
-              <a:rPr sz="1500">
-                <a:solidFill>
-                  <a:srgbClr val="1A1A1A"/>
-                </a:solidFill>
-                <a:latin typeface="Calibri"/>
-              </a:rPr>
-              <a:t>Meeting line: check high-value assemblies / sensors before blaming the filter or pad menu.</a:t>
-            </a:r>
-          </a:p>
-        </p:txBody>
-      </p:sp>
-    </p:spTree>
-  </p:cSld>
-  <p:clrMapOvr>
-    <a:masterClrMapping/>
-  </p:clrMapOvr>
-</p:sld>
-</file>
-
-<file path=ppt/slides/slide27.xml><?xml version="1.0" encoding="utf-8"?>
-<p:sld xmlns:a="http://schemas.openxmlformats.org/drawingml/2006/main" xmlns:p="http://schemas.openxmlformats.org/presentationml/2006/main" xmlns:r="http://schemas.openxmlformats.org/officeDocument/2006/relationships">
-  <p:cSld>
-    <p:bg>
-      <p:bgPr>
-        <a:solidFill>
-          <a:srgbClr val="FFFFFF"/>
-        </a:solidFill>
-        <a:effectLst/>
-      </p:bgPr>
-    </p:bg>
-    <p:spTree>
-      <p:nvGrpSpPr>
-        <p:cNvPr id="1" name=""/>
-        <p:cNvGrpSpPr/>
-        <p:nvPr/>
-      </p:nvGrpSpPr>
-      <p:grpSpPr/>
-      <p:pic>
-        <p:nvPicPr>
-          <p:cNvPr id="2" name="Picture 1" descr="image.png"/>
-          <p:cNvPicPr>
-            <a:picLocks noChangeAspect="1"/>
-          </p:cNvPicPr>
-          <p:nvPr/>
-        </p:nvPicPr>
-        <p:blipFill>
-          <a:blip r:embed="rId2"/>
-          <a:stretch>
-            <a:fillRect/>
-          </a:stretch>
-        </p:blipFill>
-        <p:spPr>
-          <a:xfrm>
-            <a:off x="256032" y="6263640"/>
-            <a:ext cx="1679787" cy="292608"/>
-          </a:xfrm>
-          <a:prstGeom prst="rect">
-            <a:avLst/>
-          </a:prstGeom>
-        </p:spPr>
-      </p:pic>
-      <p:sp>
-        <p:nvSpPr>
-          <p:cNvPr id="3" name="Rectangle 2"/>
-          <p:cNvSpPr/>
-          <p:nvPr/>
-        </p:nvSpPr>
-        <p:spPr>
-          <a:xfrm>
-            <a:off x="0" y="6766560"/>
-            <a:ext cx="12188952" cy="91440"/>
-          </a:xfrm>
-          <a:prstGeom prst="rect">
-            <a:avLst/>
-          </a:prstGeom>
-          <a:solidFill>
-            <a:srgbClr val="CC0E1E"/>
-          </a:solidFill>
-          <a:ln>
-            <a:noFill/>
-          </a:ln>
-        </p:spPr>
-        <p:style>
-          <a:lnRef idx="1">
-            <a:schemeClr val="accent1"/>
-          </a:lnRef>
-          <a:fillRef idx="3">
-            <a:schemeClr val="accent1"/>
-          </a:fillRef>
-          <a:effectRef idx="2">
-            <a:schemeClr val="accent1"/>
-          </a:effectRef>
-          <a:fontRef idx="minor">
-            <a:schemeClr val="lt1"/>
-          </a:fontRef>
-        </p:style>
-        <p:txBody>
-          <a:bodyPr rtlCol="0" anchor="ctr"/>
-          <a:lstStyle/>
-          <a:p>
-            <a:pPr algn="ctr"/>
-          </a:p>
-        </p:txBody>
-      </p:sp>
-      <p:sp>
-        <p:nvSpPr>
-          <p:cNvPr id="4" name="TextBox 3"/>
-          <p:cNvSpPr txBox="1"/>
-          <p:nvPr/>
-        </p:nvSpPr>
-        <p:spPr>
-          <a:xfrm>
-            <a:off x="292608" y="201168"/>
-            <a:ext cx="11430000" cy="274320"/>
-          </a:xfrm>
-          <a:prstGeom prst="rect">
-            <a:avLst/>
-          </a:prstGeom>
-          <a:noFill/>
-        </p:spPr>
-        <p:txBody>
-          <a:bodyPr wrap="square">
-            <a:spAutoFit/>
-          </a:bodyPr>
-          <a:lstStyle/>
-          <a:p>
-            <a:pPr algn="l"/>
-            <a:r>
-              <a:rPr sz="1100" b="1">
-                <a:solidFill>
-                  <a:srgbClr val="CC0E1E"/>
-                </a:solidFill>
-                <a:latin typeface="Calibri"/>
-              </a:rPr>
-              <a:t>DRIVERS</a:t>
-            </a:r>
-          </a:p>
-        </p:txBody>
-      </p:sp>
-      <p:sp>
-        <p:nvSpPr>
-          <p:cNvPr id="5" name="TextBox 4"/>
-          <p:cNvSpPr txBox="1"/>
-          <p:nvPr/>
-        </p:nvSpPr>
-        <p:spPr>
-          <a:xfrm>
-            <a:off x="292608" y="475488"/>
-            <a:ext cx="11612880" cy="566928"/>
-          </a:xfrm>
-          <a:prstGeom prst="rect">
-            <a:avLst/>
-          </a:prstGeom>
-          <a:noFill/>
-        </p:spPr>
-        <p:txBody>
-          <a:bodyPr wrap="square">
-            <a:spAutoFit/>
-          </a:bodyPr>
-          <a:lstStyle/>
-          <a:p>
-            <a:pPr algn="l"/>
-            <a:r>
-              <a:rPr sz="2500" b="1">
-                <a:solidFill>
-                  <a:srgbClr val="1A1A1A"/>
-                </a:solidFill>
-                <a:latin typeface="Calibri"/>
-              </a:rPr>
-              <a:t>Largest part-number drops (FY24→FY25) — outside service filters</a:t>
-            </a:r>
-          </a:p>
-        </p:txBody>
-      </p:sp>
-      <p:sp>
-        <p:nvSpPr>
-          <p:cNvPr id="6" name="Rectangle 5"/>
-          <p:cNvSpPr/>
-          <p:nvPr/>
-        </p:nvSpPr>
-        <p:spPr>
-          <a:xfrm>
-            <a:off x="292608" y="1005840"/>
-            <a:ext cx="11612880" cy="28000"/>
-          </a:xfrm>
-          <a:prstGeom prst="rect">
-            <a:avLst/>
-          </a:prstGeom>
-          <a:solidFill>
-            <a:srgbClr val="CC0E1E"/>
-          </a:solidFill>
-          <a:ln>
-            <a:noFill/>
-          </a:ln>
-        </p:spPr>
-        <p:style>
-          <a:lnRef idx="1">
-            <a:schemeClr val="accent1"/>
-          </a:lnRef>
-          <a:fillRef idx="3">
-            <a:schemeClr val="accent1"/>
-          </a:fillRef>
-          <a:effectRef idx="2">
-            <a:schemeClr val="accent1"/>
-          </a:effectRef>
-          <a:fontRef idx="minor">
-            <a:schemeClr val="lt1"/>
-          </a:fontRef>
-        </p:style>
-        <p:txBody>
-          <a:bodyPr rtlCol="0" anchor="ctr"/>
-          <a:lstStyle/>
-          <a:p>
-            <a:pPr algn="ctr"/>
-          </a:p>
-        </p:txBody>
-      </p:sp>
-      <p:sp>
-        <p:nvSpPr>
-          <p:cNvPr id="7" name="TextBox 6"/>
-          <p:cNvSpPr txBox="1"/>
-          <p:nvPr/>
-        </p:nvSpPr>
-        <p:spPr>
-          <a:xfrm>
-            <a:off x="11594592" y="6473952"/>
-            <a:ext cx="365760" cy="274320"/>
-          </a:xfrm>
-          <a:prstGeom prst="rect">
-            <a:avLst/>
-          </a:prstGeom>
-          <a:noFill/>
-        </p:spPr>
-        <p:txBody>
-          <a:bodyPr wrap="square">
-            <a:spAutoFit/>
-          </a:bodyPr>
-          <a:lstStyle/>
-          <a:p>
-            <a:pPr algn="r"/>
-            <a:r>
-              <a:rPr sz="1000" b="0">
-                <a:solidFill>
-                  <a:srgbClr val="5A5A5A"/>
-                </a:solidFill>
-                <a:latin typeface="Calibri"/>
-              </a:rPr>
-              <a:t>27</a:t>
             </a:r>
           </a:p>
         </p:txBody>
@@ -14951,6 +14802,484 @@
 </p:sld>
 </file>
 
+<file path=ppt/slides/slide27.xml><?xml version="1.0" encoding="utf-8"?>
+<p:sld xmlns:a="http://schemas.openxmlformats.org/drawingml/2006/main" xmlns:p="http://schemas.openxmlformats.org/presentationml/2006/main" xmlns:r="http://schemas.openxmlformats.org/officeDocument/2006/relationships">
+  <p:cSld>
+    <p:bg>
+      <p:bgPr>
+        <a:solidFill>
+          <a:srgbClr val="FFFFFF"/>
+        </a:solidFill>
+        <a:effectLst/>
+      </p:bgPr>
+    </p:bg>
+    <p:spTree>
+      <p:nvGrpSpPr>
+        <p:cNvPr id="1" name=""/>
+        <p:cNvGrpSpPr/>
+        <p:nvPr/>
+      </p:nvGrpSpPr>
+      <p:grpSpPr/>
+      <p:pic>
+        <p:nvPicPr>
+          <p:cNvPr id="2" name="Picture 1" descr="image.png"/>
+          <p:cNvPicPr>
+            <a:picLocks noChangeAspect="1"/>
+          </p:cNvPicPr>
+          <p:nvPr/>
+        </p:nvPicPr>
+        <p:blipFill>
+          <a:blip r:embed="rId2"/>
+          <a:stretch>
+            <a:fillRect/>
+          </a:stretch>
+        </p:blipFill>
+        <p:spPr>
+          <a:xfrm>
+            <a:off x="256032" y="6263640"/>
+            <a:ext cx="1679787" cy="292608"/>
+          </a:xfrm>
+          <a:prstGeom prst="rect">
+            <a:avLst/>
+          </a:prstGeom>
+        </p:spPr>
+      </p:pic>
+      <p:sp>
+        <p:nvSpPr>
+          <p:cNvPr id="3" name="Rectangle 2"/>
+          <p:cNvSpPr/>
+          <p:nvPr/>
+        </p:nvSpPr>
+        <p:spPr>
+          <a:xfrm>
+            <a:off x="0" y="6766560"/>
+            <a:ext cx="12188952" cy="91440"/>
+          </a:xfrm>
+          <a:prstGeom prst="rect">
+            <a:avLst/>
+          </a:prstGeom>
+          <a:solidFill>
+            <a:srgbClr val="CC0E1E"/>
+          </a:solidFill>
+          <a:ln>
+            <a:noFill/>
+          </a:ln>
+        </p:spPr>
+        <p:style>
+          <a:lnRef idx="1">
+            <a:schemeClr val="accent1"/>
+          </a:lnRef>
+          <a:fillRef idx="3">
+            <a:schemeClr val="accent1"/>
+          </a:fillRef>
+          <a:effectRef idx="2">
+            <a:schemeClr val="accent1"/>
+          </a:effectRef>
+          <a:fontRef idx="minor">
+            <a:schemeClr val="lt1"/>
+          </a:fontRef>
+        </p:style>
+        <p:txBody>
+          <a:bodyPr rtlCol="0" anchor="ctr"/>
+          <a:lstStyle/>
+          <a:p>
+            <a:pPr algn="ctr"/>
+          </a:p>
+        </p:txBody>
+      </p:sp>
+      <p:sp>
+        <p:nvSpPr>
+          <p:cNvPr id="4" name="TextBox 3"/>
+          <p:cNvSpPr txBox="1"/>
+          <p:nvPr/>
+        </p:nvSpPr>
+        <p:spPr>
+          <a:xfrm>
+            <a:off x="292608" y="201168"/>
+            <a:ext cx="11430000" cy="274320"/>
+          </a:xfrm>
+          <a:prstGeom prst="rect">
+            <a:avLst/>
+          </a:prstGeom>
+          <a:noFill/>
+        </p:spPr>
+        <p:txBody>
+          <a:bodyPr wrap="square">
+            <a:spAutoFit/>
+          </a:bodyPr>
+          <a:lstStyle/>
+          <a:p>
+            <a:pPr algn="l"/>
+            <a:r>
+              <a:rPr sz="1100" b="1">
+                <a:solidFill>
+                  <a:srgbClr val="CC0E1E"/>
+                </a:solidFill>
+                <a:latin typeface="Calibri"/>
+              </a:rPr>
+              <a:t>SERVICE PARTS</a:t>
+            </a:r>
+          </a:p>
+        </p:txBody>
+      </p:sp>
+      <p:sp>
+        <p:nvSpPr>
+          <p:cNvPr id="5" name="TextBox 4"/>
+          <p:cNvSpPr txBox="1"/>
+          <p:nvPr/>
+        </p:nvSpPr>
+        <p:spPr>
+          <a:xfrm>
+            <a:off x="292608" y="475488"/>
+            <a:ext cx="11612880" cy="566928"/>
+          </a:xfrm>
+          <a:prstGeom prst="rect">
+            <a:avLst/>
+          </a:prstGeom>
+          <a:noFill/>
+        </p:spPr>
+        <p:txBody>
+          <a:bodyPr wrap="square">
+            <a:spAutoFit/>
+          </a:bodyPr>
+          <a:lstStyle/>
+          <a:p>
+            <a:pPr algn="l"/>
+            <a:r>
+              <a:rPr sz="2500" b="1">
+                <a:solidFill>
+                  <a:srgbClr val="1A1A1A"/>
+                </a:solidFill>
+                <a:latin typeface="Calibri"/>
+              </a:rPr>
+              <a:t>Service-parts capture vs network (calendar year)</a:t>
+            </a:r>
+          </a:p>
+        </p:txBody>
+      </p:sp>
+      <p:sp>
+        <p:nvSpPr>
+          <p:cNvPr id="6" name="Rectangle 5"/>
+          <p:cNvSpPr/>
+          <p:nvPr/>
+        </p:nvSpPr>
+        <p:spPr>
+          <a:xfrm>
+            <a:off x="292608" y="1005840"/>
+            <a:ext cx="11612880" cy="28000"/>
+          </a:xfrm>
+          <a:prstGeom prst="rect">
+            <a:avLst/>
+          </a:prstGeom>
+          <a:solidFill>
+            <a:srgbClr val="CC0E1E"/>
+          </a:solidFill>
+          <a:ln>
+            <a:noFill/>
+          </a:ln>
+        </p:spPr>
+        <p:style>
+          <a:lnRef idx="1">
+            <a:schemeClr val="accent1"/>
+          </a:lnRef>
+          <a:fillRef idx="3">
+            <a:schemeClr val="accent1"/>
+          </a:fillRef>
+          <a:effectRef idx="2">
+            <a:schemeClr val="accent1"/>
+          </a:effectRef>
+          <a:fontRef idx="minor">
+            <a:schemeClr val="lt1"/>
+          </a:fontRef>
+        </p:style>
+        <p:txBody>
+          <a:bodyPr rtlCol="0" anchor="ctr"/>
+          <a:lstStyle/>
+          <a:p>
+            <a:pPr algn="ctr"/>
+          </a:p>
+        </p:txBody>
+      </p:sp>
+      <p:sp>
+        <p:nvSpPr>
+          <p:cNvPr id="7" name="TextBox 6"/>
+          <p:cNvSpPr txBox="1"/>
+          <p:nvPr/>
+        </p:nvSpPr>
+        <p:spPr>
+          <a:xfrm>
+            <a:off x="11594592" y="6473952"/>
+            <a:ext cx="365760" cy="274320"/>
+          </a:xfrm>
+          <a:prstGeom prst="rect">
+            <a:avLst/>
+          </a:prstGeom>
+          <a:noFill/>
+        </p:spPr>
+        <p:txBody>
+          <a:bodyPr wrap="square">
+            <a:spAutoFit/>
+          </a:bodyPr>
+          <a:lstStyle/>
+          <a:p>
+            <a:pPr algn="r"/>
+            <a:r>
+              <a:rPr sz="1000" b="0">
+                <a:solidFill>
+                  <a:srgbClr val="5A5A5A"/>
+                </a:solidFill>
+                <a:latin typeface="Calibri"/>
+              </a:rPr>
+              <a:t>27</a:t>
+            </a:r>
+          </a:p>
+        </p:txBody>
+      </p:sp>
+      <p:pic>
+        <p:nvPicPr>
+          <p:cNvPr id="8" name="Picture 7" descr="modeb_pms.png"/>
+          <p:cNvPicPr>
+            <a:picLocks noChangeAspect="1"/>
+          </p:cNvPicPr>
+          <p:nvPr/>
+        </p:nvPicPr>
+        <p:blipFill>
+          <a:blip r:embed="rId3"/>
+          <a:stretch>
+            <a:fillRect/>
+          </a:stretch>
+        </p:blipFill>
+        <p:spPr>
+          <a:xfrm>
+            <a:off x="292608" y="2121722"/>
+            <a:ext cx="7178040" cy="3026036"/>
+          </a:xfrm>
+          <a:prstGeom prst="rect">
+            <a:avLst/>
+          </a:prstGeom>
+        </p:spPr>
+      </p:pic>
+      <p:sp>
+        <p:nvSpPr>
+          <p:cNvPr id="9" name="Rectangle 8"/>
+          <p:cNvSpPr/>
+          <p:nvPr/>
+        </p:nvSpPr>
+        <p:spPr>
+          <a:xfrm>
+            <a:off x="7726679" y="1188720"/>
+            <a:ext cx="22000" cy="4892040"/>
+          </a:xfrm>
+          <a:prstGeom prst="rect">
+            <a:avLst/>
+          </a:prstGeom>
+          <a:solidFill>
+            <a:srgbClr val="ECECEC"/>
+          </a:solidFill>
+          <a:ln>
+            <a:noFill/>
+          </a:ln>
+        </p:spPr>
+        <p:style>
+          <a:lnRef idx="1">
+            <a:schemeClr val="accent1"/>
+          </a:lnRef>
+          <a:fillRef idx="3">
+            <a:schemeClr val="accent1"/>
+          </a:fillRef>
+          <a:effectRef idx="2">
+            <a:schemeClr val="accent1"/>
+          </a:effectRef>
+          <a:fontRef idx="minor">
+            <a:schemeClr val="lt1"/>
+          </a:fontRef>
+        </p:style>
+        <p:txBody>
+          <a:bodyPr rtlCol="0" anchor="ctr"/>
+          <a:lstStyle/>
+          <a:p>
+            <a:pPr algn="ctr"/>
+          </a:p>
+        </p:txBody>
+      </p:sp>
+      <p:sp>
+        <p:nvSpPr>
+          <p:cNvPr id="10" name="TextBox 9"/>
+          <p:cNvSpPr txBox="1"/>
+          <p:nvPr/>
+        </p:nvSpPr>
+        <p:spPr>
+          <a:xfrm>
+            <a:off x="7927847" y="1234440"/>
+            <a:ext cx="3886200" cy="320040"/>
+          </a:xfrm>
+          <a:prstGeom prst="rect">
+            <a:avLst/>
+          </a:prstGeom>
+          <a:noFill/>
+        </p:spPr>
+        <p:txBody>
+          <a:bodyPr wrap="square">
+            <a:spAutoFit/>
+          </a:bodyPr>
+          <a:lstStyle/>
+          <a:p>
+            <a:pPr algn="l"/>
+            <a:r>
+              <a:rPr sz="1200" b="1">
+                <a:solidFill>
+                  <a:srgbClr val="CC0E1E"/>
+                </a:solidFill>
+                <a:latin typeface="Calibri"/>
+              </a:rPr>
+              <a:t>TAKEAWAYS</a:t>
+            </a:r>
+          </a:p>
+        </p:txBody>
+      </p:sp>
+      <p:sp>
+        <p:nvSpPr>
+          <p:cNvPr id="11" name="TextBox 10"/>
+          <p:cNvSpPr txBox="1"/>
+          <p:nvPr/>
+        </p:nvSpPr>
+        <p:spPr>
+          <a:xfrm>
+            <a:off x="7927847" y="1691640"/>
+            <a:ext cx="3794760" cy="4343400"/>
+          </a:xfrm>
+          <a:prstGeom prst="rect">
+            <a:avLst/>
+          </a:prstGeom>
+          <a:noFill/>
+        </p:spPr>
+        <p:txBody>
+          <a:bodyPr wrap="square">
+            <a:spAutoFit/>
+          </a:bodyPr>
+          <a:lstStyle/>
+          <a:p>
+            <a:pPr>
+              <a:lnSpc>
+                <a:spcPct val="125000"/>
+              </a:lnSpc>
+              <a:spcAft>
+                <a:spcPts val="1000"/>
+              </a:spcAft>
+            </a:pPr>
+            <a:r>
+              <a:rPr sz="1250" b="1">
+                <a:solidFill>
+                  <a:srgbClr val="CC0E1E"/>
+                </a:solidFill>
+                <a:latin typeface="Calibri"/>
+              </a:rPr>
+              <a:t>—  </a:t>
+            </a:r>
+            <a:r>
+              <a:rPr sz="1250">
+                <a:solidFill>
+                  <a:srgbClr val="1A1A1A"/>
+                </a:solidFill>
+                <a:latin typeface="Calibri"/>
+              </a:rPr>
+              <a:t>Capture % is calendar-year (full CY2025). Fleet demand is modelled on calendar years — there is no matching fiscal-year capture %.</a:t>
+            </a:r>
+          </a:p>
+          <a:p>
+            <a:pPr>
+              <a:lnSpc>
+                <a:spcPct val="125000"/>
+              </a:lnSpc>
+              <a:spcAft>
+                <a:spcPts val="1000"/>
+              </a:spcAft>
+            </a:pPr>
+            <a:r>
+              <a:rPr sz="1250" b="1">
+                <a:solidFill>
+                  <a:srgbClr val="CC0E1E"/>
+                </a:solidFill>
+                <a:latin typeface="Calibri"/>
+              </a:rPr>
+              <a:t>—  </a:t>
+            </a:r>
+            <a:r>
+              <a:rPr sz="1250">
+                <a:solidFill>
+                  <a:srgbClr val="1A1A1A"/>
+                </a:solidFill>
+                <a:latin typeface="Calibri"/>
+              </a:rPr>
+              <a:t>Oil filter 45.0% vs network 60.9%; Fuel filter 18.8% vs network 47.3%; Air filter 45.9% vs network 52.4%.</a:t>
+            </a:r>
+          </a:p>
+          <a:p>
+            <a:pPr>
+              <a:lnSpc>
+                <a:spcPct val="125000"/>
+              </a:lnSpc>
+              <a:spcAft>
+                <a:spcPts val="1000"/>
+              </a:spcAft>
+            </a:pPr>
+            <a:r>
+              <a:rPr sz="1250" b="1">
+                <a:solidFill>
+                  <a:srgbClr val="CC0E1E"/>
+                </a:solidFill>
+                <a:latin typeface="Calibri"/>
+              </a:rPr>
+              <a:t>—  </a:t>
+            </a:r>
+            <a:r>
+              <a:rPr sz="1250">
+                <a:solidFill>
+                  <a:srgbClr val="1A1A1A"/>
+                </a:solidFill>
+                <a:latin typeface="Calibri"/>
+              </a:rPr>
+              <a:t>Next slide: fiscal-year € billing in the same five categories.</a:t>
+            </a:r>
+          </a:p>
+          <a:p>
+            <a:pPr>
+              <a:lnSpc>
+                <a:spcPct val="125000"/>
+              </a:lnSpc>
+              <a:spcAft>
+                <a:spcPts val="1000"/>
+              </a:spcAft>
+            </a:pPr>
+            <a:r>
+              <a:rPr sz="1250" b="1">
+                <a:solidFill>
+                  <a:srgbClr val="CC0E1E"/>
+                </a:solidFill>
+                <a:latin typeface="Calibri"/>
+              </a:rPr>
+              <a:t>—  </a:t>
+            </a:r>
+            <a:r>
+              <a:rPr sz="1250">
+                <a:solidFill>
+                  <a:srgbClr val="1A1A1A"/>
+                </a:solidFill>
+                <a:latin typeface="Calibri"/>
+              </a:rPr>
+              <a:t>Primary lens = total capture (not genuine-only).</a:t>
+            </a:r>
+          </a:p>
+        </p:txBody>
+      </p:sp>
+    </p:spTree>
+  </p:cSld>
+  <p:clrMapOvr>
+    <a:masterClrMapping/>
+  </p:clrMapOvr>
+</p:sld>
+</file>
+
 <file path=ppt/slides/slide28.xml><?xml version="1.0" encoding="utf-8"?>
 <p:sld xmlns:a="http://schemas.openxmlformats.org/drawingml/2006/main" xmlns:p="http://schemas.openxmlformats.org/presentationml/2006/main" xmlns:r="http://schemas.openxmlformats.org/officeDocument/2006/relationships">
   <p:cSld>
@@ -15066,7 +15395,7 @@
                 </a:solidFill>
                 <a:latin typeface="Calibri"/>
               </a:rPr>
-              <a:t>SERVICE PARTS</a:t>
+              <a:t>SERVICE PARTS · FY</a:t>
             </a:r>
           </a:p>
         </p:txBody>
@@ -15101,7 +15430,7 @@
                 </a:solidFill>
                 <a:latin typeface="Calibri"/>
               </a:rPr>
-              <a:t>Service-parts capture vs network (calendar year)</a:t>
+              <a:t>Service-parts billing by fiscal year (same five lines)</a:t>
             </a:r>
           </a:p>
         </p:txBody>
@@ -15186,7 +15515,7 @@
       </p:sp>
       <p:pic>
         <p:nvPicPr>
-          <p:cNvPr id="8" name="Picture 7" descr="modeb_pms.png"/>
+          <p:cNvPr id="8" name="Picture 7" descr="modeb_pms_fy.png"/>
           <p:cNvPicPr>
             <a:picLocks noChangeAspect="1"/>
           </p:cNvPicPr>
@@ -15200,8 +15529,8 @@
         </p:blipFill>
         <p:spPr>
           <a:xfrm>
-            <a:off x="292608" y="2120980"/>
-            <a:ext cx="7178040" cy="3027520"/>
+            <a:off x="292608" y="2121722"/>
+            <a:ext cx="7178040" cy="3026036"/>
           </a:xfrm>
           <a:prstGeom prst="rect">
             <a:avLst/>
@@ -15332,7 +15661,7 @@
                 </a:solidFill>
                 <a:latin typeface="Calibri"/>
               </a:rPr>
-              <a:t>Capture % is calendar-year (full CY2025). Fleet demand is modelled on calendar years — there is no matching fiscal-year capture %.</a:t>
+              <a:t>This is Sales-to-AutoWallis Distribution € in fiscal years — not capture % of fleet demand.</a:t>
             </a:r>
           </a:p>
           <a:p>
@@ -15360,7 +15689,7 @@
                 </a:solidFill>
                 <a:latin typeface="Calibri"/>
               </a:rPr>
-              <a:t>Oil filter 45.0% vs network 60.9%; Fuel filter 18.8% vs network 47.3%; Air filter 45.9% vs network 52.4%.</a:t>
+              <a:t>Use both lenses — do not mix % capture with € billing.</a:t>
             </a:r>
           </a:p>
           <a:p>
@@ -15388,35 +15717,7 @@
                 </a:solidFill>
                 <a:latin typeface="Calibri"/>
               </a:rPr>
-              <a:t>Next slide: fiscal-year € billing in the same five categories.</a:t>
-            </a:r>
-          </a:p>
-          <a:p>
-            <a:pPr>
-              <a:lnSpc>
-                <a:spcPct val="125000"/>
-              </a:lnSpc>
-              <a:spcAft>
-                <a:spcPts val="1000"/>
-              </a:spcAft>
-            </a:pPr>
-            <a:r>
-              <a:rPr sz="1250" b="1">
-                <a:solidFill>
-                  <a:srgbClr val="CC0E1E"/>
-                </a:solidFill>
-                <a:latin typeface="Calibri"/>
-              </a:rPr>
-              <a:t>—  </a:t>
-            </a:r>
-            <a:r>
-              <a:rPr sz="1250">
-                <a:solidFill>
-                  <a:srgbClr val="1A1A1A"/>
-                </a:solidFill>
-                <a:latin typeface="Calibri"/>
-              </a:rPr>
-              <a:t>Primary lens = total capture (not genuine-only).</a:t>
+              <a:t>Primary = total sales in the basket.</a:t>
             </a:r>
           </a:p>
         </p:txBody>
@@ -15544,7 +15845,7 @@
                 </a:solidFill>
                 <a:latin typeface="Calibri"/>
               </a:rPr>
-              <a:t>SERVICE PARTS · FY</a:t>
+              <a:t>BRAKES</a:t>
             </a:r>
           </a:p>
         </p:txBody>
@@ -15579,7 +15880,7 @@
                 </a:solidFill>
                 <a:latin typeface="Calibri"/>
               </a:rPr>
-              <a:t>Service-parts billing by fiscal year (same five lines)</a:t>
+              <a:t>Brake pads — BVP share of total brake pad sales (FY)</a:t>
             </a:r>
           </a:p>
         </p:txBody>
@@ -15658,934 +15959,6 @@
                 <a:latin typeface="Calibri"/>
               </a:rPr>
               <a:t>29</a:t>
-            </a:r>
-          </a:p>
-        </p:txBody>
-      </p:sp>
-      <p:pic>
-        <p:nvPicPr>
-          <p:cNvPr id="8" name="Picture 7" descr="modeb_pms_fy.png"/>
-          <p:cNvPicPr>
-            <a:picLocks noChangeAspect="1"/>
-          </p:cNvPicPr>
-          <p:nvPr/>
-        </p:nvPicPr>
-        <p:blipFill>
-          <a:blip r:embed="rId3"/>
-          <a:stretch>
-            <a:fillRect/>
-          </a:stretch>
-        </p:blipFill>
-        <p:spPr>
-          <a:xfrm>
-            <a:off x="292608" y="2120980"/>
-            <a:ext cx="7178040" cy="3027520"/>
-          </a:xfrm>
-          <a:prstGeom prst="rect">
-            <a:avLst/>
-          </a:prstGeom>
-        </p:spPr>
-      </p:pic>
-      <p:sp>
-        <p:nvSpPr>
-          <p:cNvPr id="9" name="Rectangle 8"/>
-          <p:cNvSpPr/>
-          <p:nvPr/>
-        </p:nvSpPr>
-        <p:spPr>
-          <a:xfrm>
-            <a:off x="7726679" y="1188720"/>
-            <a:ext cx="22000" cy="4892040"/>
-          </a:xfrm>
-          <a:prstGeom prst="rect">
-            <a:avLst/>
-          </a:prstGeom>
-          <a:solidFill>
-            <a:srgbClr val="ECECEC"/>
-          </a:solidFill>
-          <a:ln>
-            <a:noFill/>
-          </a:ln>
-        </p:spPr>
-        <p:style>
-          <a:lnRef idx="1">
-            <a:schemeClr val="accent1"/>
-          </a:lnRef>
-          <a:fillRef idx="3">
-            <a:schemeClr val="accent1"/>
-          </a:fillRef>
-          <a:effectRef idx="2">
-            <a:schemeClr val="accent1"/>
-          </a:effectRef>
-          <a:fontRef idx="minor">
-            <a:schemeClr val="lt1"/>
-          </a:fontRef>
-        </p:style>
-        <p:txBody>
-          <a:bodyPr rtlCol="0" anchor="ctr"/>
-          <a:lstStyle/>
-          <a:p>
-            <a:pPr algn="ctr"/>
-          </a:p>
-        </p:txBody>
-      </p:sp>
-      <p:sp>
-        <p:nvSpPr>
-          <p:cNvPr id="10" name="TextBox 9"/>
-          <p:cNvSpPr txBox="1"/>
-          <p:nvPr/>
-        </p:nvSpPr>
-        <p:spPr>
-          <a:xfrm>
-            <a:off x="7927847" y="1234440"/>
-            <a:ext cx="3886200" cy="320040"/>
-          </a:xfrm>
-          <a:prstGeom prst="rect">
-            <a:avLst/>
-          </a:prstGeom>
-          <a:noFill/>
-        </p:spPr>
-        <p:txBody>
-          <a:bodyPr wrap="square">
-            <a:spAutoFit/>
-          </a:bodyPr>
-          <a:lstStyle/>
-          <a:p>
-            <a:pPr algn="l"/>
-            <a:r>
-              <a:rPr sz="1200" b="1">
-                <a:solidFill>
-                  <a:srgbClr val="CC0E1E"/>
-                </a:solidFill>
-                <a:latin typeface="Calibri"/>
-              </a:rPr>
-              <a:t>TAKEAWAYS</a:t>
-            </a:r>
-          </a:p>
-        </p:txBody>
-      </p:sp>
-      <p:sp>
-        <p:nvSpPr>
-          <p:cNvPr id="11" name="TextBox 10"/>
-          <p:cNvSpPr txBox="1"/>
-          <p:nvPr/>
-        </p:nvSpPr>
-        <p:spPr>
-          <a:xfrm>
-            <a:off x="7927847" y="1691640"/>
-            <a:ext cx="3794760" cy="4343400"/>
-          </a:xfrm>
-          <a:prstGeom prst="rect">
-            <a:avLst/>
-          </a:prstGeom>
-          <a:noFill/>
-        </p:spPr>
-        <p:txBody>
-          <a:bodyPr wrap="square">
-            <a:spAutoFit/>
-          </a:bodyPr>
-          <a:lstStyle/>
-          <a:p>
-            <a:pPr>
-              <a:lnSpc>
-                <a:spcPct val="125000"/>
-              </a:lnSpc>
-              <a:spcAft>
-                <a:spcPts val="1000"/>
-              </a:spcAft>
-            </a:pPr>
-            <a:r>
-              <a:rPr sz="1250" b="1">
-                <a:solidFill>
-                  <a:srgbClr val="CC0E1E"/>
-                </a:solidFill>
-                <a:latin typeface="Calibri"/>
-              </a:rPr>
-              <a:t>—  </a:t>
-            </a:r>
-            <a:r>
-              <a:rPr sz="1250">
-                <a:solidFill>
-                  <a:srgbClr val="1A1A1A"/>
-                </a:solidFill>
-                <a:latin typeface="Calibri"/>
-              </a:rPr>
-              <a:t>This is Sales-to-AutoWallis Distribution € in fiscal years — not capture % of fleet demand.</a:t>
-            </a:r>
-          </a:p>
-          <a:p>
-            <a:pPr>
-              <a:lnSpc>
-                <a:spcPct val="125000"/>
-              </a:lnSpc>
-              <a:spcAft>
-                <a:spcPts val="1000"/>
-              </a:spcAft>
-            </a:pPr>
-            <a:r>
-              <a:rPr sz="1250" b="1">
-                <a:solidFill>
-                  <a:srgbClr val="CC0E1E"/>
-                </a:solidFill>
-                <a:latin typeface="Calibri"/>
-              </a:rPr>
-              <a:t>—  </a:t>
-            </a:r>
-            <a:r>
-              <a:rPr sz="1250">
-                <a:solidFill>
-                  <a:srgbClr val="1A1A1A"/>
-                </a:solidFill>
-                <a:latin typeface="Calibri"/>
-              </a:rPr>
-              <a:t>Use both lenses — do not mix % capture with € billing.</a:t>
-            </a:r>
-          </a:p>
-          <a:p>
-            <a:pPr>
-              <a:lnSpc>
-                <a:spcPct val="125000"/>
-              </a:lnSpc>
-              <a:spcAft>
-                <a:spcPts val="1000"/>
-              </a:spcAft>
-            </a:pPr>
-            <a:r>
-              <a:rPr sz="1250" b="1">
-                <a:solidFill>
-                  <a:srgbClr val="CC0E1E"/>
-                </a:solidFill>
-                <a:latin typeface="Calibri"/>
-              </a:rPr>
-              <a:t>—  </a:t>
-            </a:r>
-            <a:r>
-              <a:rPr sz="1250">
-                <a:solidFill>
-                  <a:srgbClr val="1A1A1A"/>
-                </a:solidFill>
-                <a:latin typeface="Calibri"/>
-              </a:rPr>
-              <a:t>Primary = total sales in the basket.</a:t>
-            </a:r>
-          </a:p>
-        </p:txBody>
-      </p:sp>
-    </p:spTree>
-  </p:cSld>
-  <p:clrMapOvr>
-    <a:masterClrMapping/>
-  </p:clrMapOvr>
-</p:sld>
-</file>
-
-<file path=ppt/slides/slide3.xml><?xml version="1.0" encoding="utf-8"?>
-<p:sld xmlns:a="http://schemas.openxmlformats.org/drawingml/2006/main" xmlns:p="http://schemas.openxmlformats.org/presentationml/2006/main" xmlns:r="http://schemas.openxmlformats.org/officeDocument/2006/relationships">
-  <p:cSld>
-    <p:bg>
-      <p:bgPr>
-        <a:solidFill>
-          <a:srgbClr val="FFFFFF"/>
-        </a:solidFill>
-        <a:effectLst/>
-      </p:bgPr>
-    </p:bg>
-    <p:spTree>
-      <p:nvGrpSpPr>
-        <p:cNvPr id="1" name=""/>
-        <p:cNvGrpSpPr/>
-        <p:nvPr/>
-      </p:nvGrpSpPr>
-      <p:grpSpPr/>
-      <p:pic>
-        <p:nvPicPr>
-          <p:cNvPr id="2" name="Picture 1" descr="isuzu_logo_red.png"/>
-          <p:cNvPicPr>
-            <a:picLocks noChangeAspect="1"/>
-          </p:cNvPicPr>
-          <p:nvPr/>
-        </p:nvPicPr>
-        <p:blipFill>
-          <a:blip r:embed="rId2"/>
-          <a:stretch>
-            <a:fillRect/>
-          </a:stretch>
-        </p:blipFill>
-        <p:spPr>
-          <a:xfrm>
-            <a:off x="256032" y="6263640"/>
-            <a:ext cx="1679787" cy="292608"/>
-          </a:xfrm>
-          <a:prstGeom prst="rect">
-            <a:avLst/>
-          </a:prstGeom>
-        </p:spPr>
-      </p:pic>
-      <p:sp>
-        <p:nvSpPr>
-          <p:cNvPr id="3" name="Rectangle 2"/>
-          <p:cNvSpPr/>
-          <p:nvPr/>
-        </p:nvSpPr>
-        <p:spPr>
-          <a:xfrm>
-            <a:off x="0" y="6766560"/>
-            <a:ext cx="12188952" cy="91440"/>
-          </a:xfrm>
-          <a:prstGeom prst="rect">
-            <a:avLst/>
-          </a:prstGeom>
-          <a:solidFill>
-            <a:srgbClr val="CC0E1E"/>
-          </a:solidFill>
-          <a:ln>
-            <a:noFill/>
-          </a:ln>
-        </p:spPr>
-        <p:style>
-          <a:lnRef idx="1">
-            <a:schemeClr val="accent1"/>
-          </a:lnRef>
-          <a:fillRef idx="3">
-            <a:schemeClr val="accent1"/>
-          </a:fillRef>
-          <a:effectRef idx="2">
-            <a:schemeClr val="accent1"/>
-          </a:effectRef>
-          <a:fontRef idx="minor">
-            <a:schemeClr val="lt1"/>
-          </a:fontRef>
-        </p:style>
-        <p:txBody>
-          <a:bodyPr rtlCol="0" anchor="ctr"/>
-          <a:lstStyle/>
-          <a:p>
-            <a:pPr algn="ctr"/>
-          </a:p>
-        </p:txBody>
-      </p:sp>
-      <p:sp>
-        <p:nvSpPr>
-          <p:cNvPr id="4" name="TextBox 3"/>
-          <p:cNvSpPr txBox="1"/>
-          <p:nvPr/>
-        </p:nvSpPr>
-        <p:spPr>
-          <a:xfrm>
-            <a:off x="292608" y="201168"/>
-            <a:ext cx="11430000" cy="274320"/>
-          </a:xfrm>
-          <a:prstGeom prst="rect">
-            <a:avLst/>
-          </a:prstGeom>
-          <a:noFill/>
-        </p:spPr>
-        <p:txBody>
-          <a:bodyPr wrap="square">
-            <a:spAutoFit/>
-          </a:bodyPr>
-          <a:lstStyle/>
-          <a:p>
-            <a:pPr algn="l"/>
-            <a:r>
-              <a:rPr sz="1100" b="1">
-                <a:solidFill>
-                  <a:srgbClr val="CC0E1E"/>
-                </a:solidFill>
-                <a:latin typeface="Calibri"/>
-              </a:rPr>
-              <a:t>PARTS PERFORMANCE</a:t>
-            </a:r>
-          </a:p>
-        </p:txBody>
-      </p:sp>
-      <p:sp>
-        <p:nvSpPr>
-          <p:cNvPr id="5" name="TextBox 4"/>
-          <p:cNvSpPr txBox="1"/>
-          <p:nvPr/>
-        </p:nvSpPr>
-        <p:spPr>
-          <a:xfrm>
-            <a:off x="292608" y="475488"/>
-            <a:ext cx="11612880" cy="566928"/>
-          </a:xfrm>
-          <a:prstGeom prst="rect">
-            <a:avLst/>
-          </a:prstGeom>
-          <a:noFill/>
-        </p:spPr>
-        <p:txBody>
-          <a:bodyPr wrap="square">
-            <a:spAutoFit/>
-          </a:bodyPr>
-          <a:lstStyle/>
-          <a:p>
-            <a:pPr algn="l"/>
-            <a:r>
-              <a:rPr sz="2500" b="1">
-                <a:solidFill>
-                  <a:srgbClr val="1A1A1A"/>
-                </a:solidFill>
-                <a:latin typeface="Calibri"/>
-              </a:rPr>
-              <a:t>Parts Performance — CY H1 2026 vs CY H1 2025 (commercial, ex-warranty)</a:t>
-            </a:r>
-          </a:p>
-        </p:txBody>
-      </p:sp>
-      <p:sp>
-        <p:nvSpPr>
-          <p:cNvPr id="6" name="Rectangle 5"/>
-          <p:cNvSpPr/>
-          <p:nvPr/>
-        </p:nvSpPr>
-        <p:spPr>
-          <a:xfrm>
-            <a:off x="292608" y="1005840"/>
-            <a:ext cx="11612880" cy="28000"/>
-          </a:xfrm>
-          <a:prstGeom prst="rect">
-            <a:avLst/>
-          </a:prstGeom>
-          <a:solidFill>
-            <a:srgbClr val="CC0E1E"/>
-          </a:solidFill>
-          <a:ln>
-            <a:noFill/>
-          </a:ln>
-        </p:spPr>
-        <p:style>
-          <a:lnRef idx="1">
-            <a:schemeClr val="accent1"/>
-          </a:lnRef>
-          <a:fillRef idx="3">
-            <a:schemeClr val="accent1"/>
-          </a:fillRef>
-          <a:effectRef idx="2">
-            <a:schemeClr val="accent1"/>
-          </a:effectRef>
-          <a:fontRef idx="minor">
-            <a:schemeClr val="lt1"/>
-          </a:fontRef>
-        </p:style>
-        <p:txBody>
-          <a:bodyPr rtlCol="0" anchor="ctr"/>
-          <a:lstStyle/>
-          <a:p>
-            <a:pPr algn="ctr"/>
-          </a:p>
-        </p:txBody>
-      </p:sp>
-      <p:sp>
-        <p:nvSpPr>
-          <p:cNvPr id="7" name="TextBox 6"/>
-          <p:cNvSpPr txBox="1"/>
-          <p:nvPr/>
-        </p:nvSpPr>
-        <p:spPr>
-          <a:xfrm>
-            <a:off x="11594592" y="6473952"/>
-            <a:ext cx="365760" cy="274320"/>
-          </a:xfrm>
-          <a:prstGeom prst="rect">
-            <a:avLst/>
-          </a:prstGeom>
-          <a:noFill/>
-        </p:spPr>
-        <p:txBody>
-          <a:bodyPr wrap="square">
-            <a:spAutoFit/>
-          </a:bodyPr>
-          <a:lstStyle/>
-          <a:p>
-            <a:pPr algn="r"/>
-            <a:r>
-              <a:rPr sz="1000" b="0">
-                <a:solidFill>
-                  <a:srgbClr val="5A5A5A"/>
-                </a:solidFill>
-                <a:latin typeface="Calibri"/>
-              </a:rPr>
-              <a:t>3</a:t>
-            </a:r>
-          </a:p>
-        </p:txBody>
-      </p:sp>
-      <p:pic>
-        <p:nvPicPr>
-          <p:cNvPr id="8" name="Picture 7" descr="category_movers.png"/>
-          <p:cNvPicPr>
-            <a:picLocks noChangeAspect="1"/>
-          </p:cNvPicPr>
-          <p:nvPr/>
-        </p:nvPicPr>
-        <p:blipFill>
-          <a:blip r:embed="rId3"/>
-          <a:stretch>
-            <a:fillRect/>
-          </a:stretch>
-        </p:blipFill>
-        <p:spPr>
-          <a:xfrm>
-            <a:off x="292608" y="2120980"/>
-            <a:ext cx="7178040" cy="3027520"/>
-          </a:xfrm>
-          <a:prstGeom prst="rect">
-            <a:avLst/>
-          </a:prstGeom>
-        </p:spPr>
-      </p:pic>
-      <p:sp>
-        <p:nvSpPr>
-          <p:cNvPr id="9" name="Rectangle 8"/>
-          <p:cNvSpPr/>
-          <p:nvPr/>
-        </p:nvSpPr>
-        <p:spPr>
-          <a:xfrm>
-            <a:off x="7726679" y="1188720"/>
-            <a:ext cx="22000" cy="4892040"/>
-          </a:xfrm>
-          <a:prstGeom prst="rect">
-            <a:avLst/>
-          </a:prstGeom>
-          <a:solidFill>
-            <a:srgbClr val="ECECEC"/>
-          </a:solidFill>
-          <a:ln>
-            <a:noFill/>
-          </a:ln>
-        </p:spPr>
-        <p:style>
-          <a:lnRef idx="1">
-            <a:schemeClr val="accent1"/>
-          </a:lnRef>
-          <a:fillRef idx="3">
-            <a:schemeClr val="accent1"/>
-          </a:fillRef>
-          <a:effectRef idx="2">
-            <a:schemeClr val="accent1"/>
-          </a:effectRef>
-          <a:fontRef idx="minor">
-            <a:schemeClr val="lt1"/>
-          </a:fontRef>
-        </p:style>
-        <p:txBody>
-          <a:bodyPr rtlCol="0" anchor="ctr"/>
-          <a:lstStyle/>
-          <a:p>
-            <a:pPr algn="ctr"/>
-          </a:p>
-        </p:txBody>
-      </p:sp>
-      <p:sp>
-        <p:nvSpPr>
-          <p:cNvPr id="10" name="TextBox 9"/>
-          <p:cNvSpPr txBox="1"/>
-          <p:nvPr/>
-        </p:nvSpPr>
-        <p:spPr>
-          <a:xfrm>
-            <a:off x="7927847" y="1234440"/>
-            <a:ext cx="3886200" cy="320040"/>
-          </a:xfrm>
-          <a:prstGeom prst="rect">
-            <a:avLst/>
-          </a:prstGeom>
-          <a:noFill/>
-        </p:spPr>
-        <p:txBody>
-          <a:bodyPr wrap="square">
-            <a:spAutoFit/>
-          </a:bodyPr>
-          <a:lstStyle/>
-          <a:p>
-            <a:pPr algn="l"/>
-            <a:r>
-              <a:rPr sz="1200" b="1">
-                <a:solidFill>
-                  <a:srgbClr val="CC0E1E"/>
-                </a:solidFill>
-                <a:latin typeface="Calibri"/>
-              </a:rPr>
-              <a:t>TAKEAWAYS</a:t>
-            </a:r>
-          </a:p>
-        </p:txBody>
-      </p:sp>
-      <p:sp>
-        <p:nvSpPr>
-          <p:cNvPr id="11" name="TextBox 10"/>
-          <p:cNvSpPr txBox="1"/>
-          <p:nvPr/>
-        </p:nvSpPr>
-        <p:spPr>
-          <a:xfrm>
-            <a:off x="7927847" y="1691640"/>
-            <a:ext cx="3794760" cy="4343400"/>
-          </a:xfrm>
-          <a:prstGeom prst="rect">
-            <a:avLst/>
-          </a:prstGeom>
-          <a:noFill/>
-        </p:spPr>
-        <p:txBody>
-          <a:bodyPr wrap="square">
-            <a:spAutoFit/>
-          </a:bodyPr>
-          <a:lstStyle/>
-          <a:p>
-            <a:pPr>
-              <a:lnSpc>
-                <a:spcPct val="125000"/>
-              </a:lnSpc>
-              <a:spcAft>
-                <a:spcPts val="1000"/>
-              </a:spcAft>
-            </a:pPr>
-            <a:r>
-              <a:rPr sz="1250" b="1">
-                <a:solidFill>
-                  <a:srgbClr val="CC0E1E"/>
-                </a:solidFill>
-                <a:latin typeface="Calibri"/>
-              </a:rPr>
-              <a:t>—  </a:t>
-            </a:r>
-            <a:r>
-              <a:rPr sz="1250">
-                <a:solidFill>
-                  <a:srgbClr val="1A1A1A"/>
-                </a:solidFill>
-                <a:latin typeface="Calibri"/>
-              </a:rPr>
-              <a:t>Commercial parts billing (warranty/campaign excluded) EUR 123K against EUR 122K a year earlier — +0.3% (CY H1 2026 vs CY H1 2025, Jan–Jun).</a:t>
-            </a:r>
-          </a:p>
-          <a:p>
-            <a:pPr>
-              <a:lnSpc>
-                <a:spcPct val="125000"/>
-              </a:lnSpc>
-              <a:spcAft>
-                <a:spcPts val="1000"/>
-              </a:spcAft>
-            </a:pPr>
-            <a:r>
-              <a:rPr sz="1250" b="1">
-                <a:solidFill>
-                  <a:srgbClr val="CC0E1E"/>
-                </a:solidFill>
-                <a:latin typeface="Calibri"/>
-              </a:rPr>
-              <a:t>—  </a:t>
-            </a:r>
-            <a:r>
-              <a:rPr sz="1250">
-                <a:solidFill>
-                  <a:srgbClr val="1A1A1A"/>
-                </a:solidFill>
-                <a:latin typeface="Calibri"/>
-              </a:rPr>
-              <a:t>Largest PN drops: 8983767550 (ROTOR; DISC BRK,FRT) EUR -6K, 79 fewer pcs; 8977993753 (LAMP ASM; HEAD) EUR -3K, 9 fewer pcs; 8975546610 (PAD KIT; CALIPER,DIS) [TF*] EUR -2K, 21 fewer pcs.</a:t>
-            </a:r>
-          </a:p>
-          <a:p>
-            <a:pPr>
-              <a:lnSpc>
-                <a:spcPct val="125000"/>
-              </a:lnSpc>
-              <a:spcAft>
-                <a:spcPts val="1000"/>
-              </a:spcAft>
-            </a:pPr>
-            <a:r>
-              <a:rPr sz="1250" b="1">
-                <a:solidFill>
-                  <a:srgbClr val="CC0E1E"/>
-                </a:solidFill>
-                <a:latin typeface="Calibri"/>
-              </a:rPr>
-              <a:t>—  </a:t>
-            </a:r>
-            <a:r>
-              <a:rPr sz="1250">
-                <a:solidFill>
-                  <a:srgbClr val="1A1A1A"/>
-                </a:solidFill>
-                <a:latin typeface="Calibri"/>
-              </a:rPr>
-              <a:t>Largest PN gains: 8974995480 (FILTER; ACL) [TFR,TFS,UCR,UCS] EUR 3K, 154 more pcs; 1884057520 (T AXLE OIL  20L) EUR 2K, 14 more pcs; 8975595830 (PANEL; SIDE GATE) EUR 2K, 8 more pcs.</a:t>
-            </a:r>
-          </a:p>
-          <a:p>
-            <a:pPr>
-              <a:lnSpc>
-                <a:spcPct val="125000"/>
-              </a:lnSpc>
-              <a:spcAft>
-                <a:spcPts val="1000"/>
-              </a:spcAft>
-            </a:pPr>
-            <a:r>
-              <a:rPr sz="1250" b="1">
-                <a:solidFill>
-                  <a:srgbClr val="CC0E1E"/>
-                </a:solidFill>
-                <a:latin typeface="Calibri"/>
-              </a:rPr>
-              <a:t>—  </a:t>
-            </a:r>
-            <a:r>
-              <a:rPr sz="1250">
-                <a:solidFill>
-                  <a:srgbClr val="1A1A1A"/>
-                </a:solidFill>
-                <a:latin typeface="Calibri"/>
-              </a:rPr>
-              <a:t>Credit notes of EUR 1K stay on the net bridge (net EUR 170K); not in the movers.</a:t>
-            </a:r>
-          </a:p>
-        </p:txBody>
-      </p:sp>
-    </p:spTree>
-  </p:cSld>
-  <p:clrMapOvr>
-    <a:masterClrMapping/>
-  </p:clrMapOvr>
-</p:sld>
-</file>
-
-<file path=ppt/slides/slide30.xml><?xml version="1.0" encoding="utf-8"?>
-<p:sld xmlns:a="http://schemas.openxmlformats.org/drawingml/2006/main" xmlns:p="http://schemas.openxmlformats.org/presentationml/2006/main" xmlns:r="http://schemas.openxmlformats.org/officeDocument/2006/relationships">
-  <p:cSld>
-    <p:bg>
-      <p:bgPr>
-        <a:solidFill>
-          <a:srgbClr val="FFFFFF"/>
-        </a:solidFill>
-        <a:effectLst/>
-      </p:bgPr>
-    </p:bg>
-    <p:spTree>
-      <p:nvGrpSpPr>
-        <p:cNvPr id="1" name=""/>
-        <p:cNvGrpSpPr/>
-        <p:nvPr/>
-      </p:nvGrpSpPr>
-      <p:grpSpPr/>
-      <p:pic>
-        <p:nvPicPr>
-          <p:cNvPr id="2" name="Picture 1" descr="image.png"/>
-          <p:cNvPicPr>
-            <a:picLocks noChangeAspect="1"/>
-          </p:cNvPicPr>
-          <p:nvPr/>
-        </p:nvPicPr>
-        <p:blipFill>
-          <a:blip r:embed="rId2"/>
-          <a:stretch>
-            <a:fillRect/>
-          </a:stretch>
-        </p:blipFill>
-        <p:spPr>
-          <a:xfrm>
-            <a:off x="256032" y="6263640"/>
-            <a:ext cx="1679787" cy="292608"/>
-          </a:xfrm>
-          <a:prstGeom prst="rect">
-            <a:avLst/>
-          </a:prstGeom>
-        </p:spPr>
-      </p:pic>
-      <p:sp>
-        <p:nvSpPr>
-          <p:cNvPr id="3" name="Rectangle 2"/>
-          <p:cNvSpPr/>
-          <p:nvPr/>
-        </p:nvSpPr>
-        <p:spPr>
-          <a:xfrm>
-            <a:off x="0" y="6766560"/>
-            <a:ext cx="12188952" cy="91440"/>
-          </a:xfrm>
-          <a:prstGeom prst="rect">
-            <a:avLst/>
-          </a:prstGeom>
-          <a:solidFill>
-            <a:srgbClr val="CC0E1E"/>
-          </a:solidFill>
-          <a:ln>
-            <a:noFill/>
-          </a:ln>
-        </p:spPr>
-        <p:style>
-          <a:lnRef idx="1">
-            <a:schemeClr val="accent1"/>
-          </a:lnRef>
-          <a:fillRef idx="3">
-            <a:schemeClr val="accent1"/>
-          </a:fillRef>
-          <a:effectRef idx="2">
-            <a:schemeClr val="accent1"/>
-          </a:effectRef>
-          <a:fontRef idx="minor">
-            <a:schemeClr val="lt1"/>
-          </a:fontRef>
-        </p:style>
-        <p:txBody>
-          <a:bodyPr rtlCol="0" anchor="ctr"/>
-          <a:lstStyle/>
-          <a:p>
-            <a:pPr algn="ctr"/>
-          </a:p>
-        </p:txBody>
-      </p:sp>
-      <p:sp>
-        <p:nvSpPr>
-          <p:cNvPr id="4" name="TextBox 3"/>
-          <p:cNvSpPr txBox="1"/>
-          <p:nvPr/>
-        </p:nvSpPr>
-        <p:spPr>
-          <a:xfrm>
-            <a:off x="292608" y="201168"/>
-            <a:ext cx="11430000" cy="274320"/>
-          </a:xfrm>
-          <a:prstGeom prst="rect">
-            <a:avLst/>
-          </a:prstGeom>
-          <a:noFill/>
-        </p:spPr>
-        <p:txBody>
-          <a:bodyPr wrap="square">
-            <a:spAutoFit/>
-          </a:bodyPr>
-          <a:lstStyle/>
-          <a:p>
-            <a:pPr algn="l"/>
-            <a:r>
-              <a:rPr sz="1100" b="1">
-                <a:solidFill>
-                  <a:srgbClr val="CC0E1E"/>
-                </a:solidFill>
-                <a:latin typeface="Calibri"/>
-              </a:rPr>
-              <a:t>BRAKES</a:t>
-            </a:r>
-          </a:p>
-        </p:txBody>
-      </p:sp>
-      <p:sp>
-        <p:nvSpPr>
-          <p:cNvPr id="5" name="TextBox 4"/>
-          <p:cNvSpPr txBox="1"/>
-          <p:nvPr/>
-        </p:nvSpPr>
-        <p:spPr>
-          <a:xfrm>
-            <a:off x="292608" y="475488"/>
-            <a:ext cx="11612880" cy="566928"/>
-          </a:xfrm>
-          <a:prstGeom prst="rect">
-            <a:avLst/>
-          </a:prstGeom>
-          <a:noFill/>
-        </p:spPr>
-        <p:txBody>
-          <a:bodyPr wrap="square">
-            <a:spAutoFit/>
-          </a:bodyPr>
-          <a:lstStyle/>
-          <a:p>
-            <a:pPr algn="l"/>
-            <a:r>
-              <a:rPr sz="2500" b="1">
-                <a:solidFill>
-                  <a:srgbClr val="1A1A1A"/>
-                </a:solidFill>
-                <a:latin typeface="Calibri"/>
-              </a:rPr>
-              <a:t>Brake pads — BVP share of total brake pad sales (FY)</a:t>
-            </a:r>
-          </a:p>
-        </p:txBody>
-      </p:sp>
-      <p:sp>
-        <p:nvSpPr>
-          <p:cNvPr id="6" name="Rectangle 5"/>
-          <p:cNvSpPr/>
-          <p:nvPr/>
-        </p:nvSpPr>
-        <p:spPr>
-          <a:xfrm>
-            <a:off x="292608" y="1005840"/>
-            <a:ext cx="11612880" cy="28000"/>
-          </a:xfrm>
-          <a:prstGeom prst="rect">
-            <a:avLst/>
-          </a:prstGeom>
-          <a:solidFill>
-            <a:srgbClr val="CC0E1E"/>
-          </a:solidFill>
-          <a:ln>
-            <a:noFill/>
-          </a:ln>
-        </p:spPr>
-        <p:style>
-          <a:lnRef idx="1">
-            <a:schemeClr val="accent1"/>
-          </a:lnRef>
-          <a:fillRef idx="3">
-            <a:schemeClr val="accent1"/>
-          </a:fillRef>
-          <a:effectRef idx="2">
-            <a:schemeClr val="accent1"/>
-          </a:effectRef>
-          <a:fontRef idx="minor">
-            <a:schemeClr val="lt1"/>
-          </a:fontRef>
-        </p:style>
-        <p:txBody>
-          <a:bodyPr rtlCol="0" anchor="ctr"/>
-          <a:lstStyle/>
-          <a:p>
-            <a:pPr algn="ctr"/>
-          </a:p>
-        </p:txBody>
-      </p:sp>
-      <p:sp>
-        <p:nvSpPr>
-          <p:cNvPr id="7" name="TextBox 6"/>
-          <p:cNvSpPr txBox="1"/>
-          <p:nvPr/>
-        </p:nvSpPr>
-        <p:spPr>
-          <a:xfrm>
-            <a:off x="11594592" y="6473952"/>
-            <a:ext cx="365760" cy="274320"/>
-          </a:xfrm>
-          <a:prstGeom prst="rect">
-            <a:avLst/>
-          </a:prstGeom>
-          <a:noFill/>
-        </p:spPr>
-        <p:txBody>
-          <a:bodyPr wrap="square">
-            <a:spAutoFit/>
-          </a:bodyPr>
-          <a:lstStyle/>
-          <a:p>
-            <a:pPr algn="r"/>
-            <a:r>
-              <a:rPr sz="1000" b="0">
-                <a:solidFill>
-                  <a:srgbClr val="5A5A5A"/>
-                </a:solidFill>
-                <a:latin typeface="Calibri"/>
-              </a:rPr>
-              <a:t>30</a:t>
             </a:r>
           </a:p>
         </p:txBody>
@@ -16988,7 +16361,485 @@
 </p:sld>
 </file>
 
-<file path=ppt/slides/slide31.xml><?xml version="1.0" encoding="utf-8"?>
+<file path=ppt/slides/slide3.xml><?xml version="1.0" encoding="utf-8"?>
+<p:sld xmlns:a="http://schemas.openxmlformats.org/drawingml/2006/main" xmlns:p="http://schemas.openxmlformats.org/presentationml/2006/main" xmlns:r="http://schemas.openxmlformats.org/officeDocument/2006/relationships">
+  <p:cSld>
+    <p:bg>
+      <p:bgPr>
+        <a:solidFill>
+          <a:srgbClr val="FFFFFF"/>
+        </a:solidFill>
+        <a:effectLst/>
+      </p:bgPr>
+    </p:bg>
+    <p:spTree>
+      <p:nvGrpSpPr>
+        <p:cNvPr id="1" name=""/>
+        <p:cNvGrpSpPr/>
+        <p:nvPr/>
+      </p:nvGrpSpPr>
+      <p:grpSpPr/>
+      <p:pic>
+        <p:nvPicPr>
+          <p:cNvPr id="2" name="Picture 1" descr="isuzu_logo_red.png"/>
+          <p:cNvPicPr>
+            <a:picLocks noChangeAspect="1"/>
+          </p:cNvPicPr>
+          <p:nvPr/>
+        </p:nvPicPr>
+        <p:blipFill>
+          <a:blip r:embed="rId2"/>
+          <a:stretch>
+            <a:fillRect/>
+          </a:stretch>
+        </p:blipFill>
+        <p:spPr>
+          <a:xfrm>
+            <a:off x="256032" y="6263640"/>
+            <a:ext cx="1679787" cy="292608"/>
+          </a:xfrm>
+          <a:prstGeom prst="rect">
+            <a:avLst/>
+          </a:prstGeom>
+        </p:spPr>
+      </p:pic>
+      <p:sp>
+        <p:nvSpPr>
+          <p:cNvPr id="3" name="Rectangle 2"/>
+          <p:cNvSpPr/>
+          <p:nvPr/>
+        </p:nvSpPr>
+        <p:spPr>
+          <a:xfrm>
+            <a:off x="0" y="6766560"/>
+            <a:ext cx="12188952" cy="91440"/>
+          </a:xfrm>
+          <a:prstGeom prst="rect">
+            <a:avLst/>
+          </a:prstGeom>
+          <a:solidFill>
+            <a:srgbClr val="CC0E1E"/>
+          </a:solidFill>
+          <a:ln>
+            <a:noFill/>
+          </a:ln>
+        </p:spPr>
+        <p:style>
+          <a:lnRef idx="1">
+            <a:schemeClr val="accent1"/>
+          </a:lnRef>
+          <a:fillRef idx="3">
+            <a:schemeClr val="accent1"/>
+          </a:fillRef>
+          <a:effectRef idx="2">
+            <a:schemeClr val="accent1"/>
+          </a:effectRef>
+          <a:fontRef idx="minor">
+            <a:schemeClr val="lt1"/>
+          </a:fontRef>
+        </p:style>
+        <p:txBody>
+          <a:bodyPr rtlCol="0" anchor="ctr"/>
+          <a:lstStyle/>
+          <a:p>
+            <a:pPr algn="ctr"/>
+          </a:p>
+        </p:txBody>
+      </p:sp>
+      <p:sp>
+        <p:nvSpPr>
+          <p:cNvPr id="4" name="TextBox 3"/>
+          <p:cNvSpPr txBox="1"/>
+          <p:nvPr/>
+        </p:nvSpPr>
+        <p:spPr>
+          <a:xfrm>
+            <a:off x="292608" y="201168"/>
+            <a:ext cx="11430000" cy="274320"/>
+          </a:xfrm>
+          <a:prstGeom prst="rect">
+            <a:avLst/>
+          </a:prstGeom>
+          <a:noFill/>
+        </p:spPr>
+        <p:txBody>
+          <a:bodyPr wrap="square">
+            <a:spAutoFit/>
+          </a:bodyPr>
+          <a:lstStyle/>
+          <a:p>
+            <a:pPr algn="l"/>
+            <a:r>
+              <a:rPr sz="1100" b="1">
+                <a:solidFill>
+                  <a:srgbClr val="CC0E1E"/>
+                </a:solidFill>
+                <a:latin typeface="Calibri"/>
+              </a:rPr>
+              <a:t>PARTS PERFORMANCE</a:t>
+            </a:r>
+          </a:p>
+        </p:txBody>
+      </p:sp>
+      <p:sp>
+        <p:nvSpPr>
+          <p:cNvPr id="5" name="TextBox 4"/>
+          <p:cNvSpPr txBox="1"/>
+          <p:nvPr/>
+        </p:nvSpPr>
+        <p:spPr>
+          <a:xfrm>
+            <a:off x="292608" y="475488"/>
+            <a:ext cx="11612880" cy="566928"/>
+          </a:xfrm>
+          <a:prstGeom prst="rect">
+            <a:avLst/>
+          </a:prstGeom>
+          <a:noFill/>
+        </p:spPr>
+        <p:txBody>
+          <a:bodyPr wrap="square">
+            <a:spAutoFit/>
+          </a:bodyPr>
+          <a:lstStyle/>
+          <a:p>
+            <a:pPr algn="l"/>
+            <a:r>
+              <a:rPr sz="2500" b="1">
+                <a:solidFill>
+                  <a:srgbClr val="1A1A1A"/>
+                </a:solidFill>
+                <a:latin typeface="Calibri"/>
+              </a:rPr>
+              <a:t>Parts Performance — CY H1 2026 vs CY H1 2025 (commercial, ex-warranty)</a:t>
+            </a:r>
+          </a:p>
+        </p:txBody>
+      </p:sp>
+      <p:sp>
+        <p:nvSpPr>
+          <p:cNvPr id="6" name="Rectangle 5"/>
+          <p:cNvSpPr/>
+          <p:nvPr/>
+        </p:nvSpPr>
+        <p:spPr>
+          <a:xfrm>
+            <a:off x="292608" y="1005840"/>
+            <a:ext cx="11612880" cy="28000"/>
+          </a:xfrm>
+          <a:prstGeom prst="rect">
+            <a:avLst/>
+          </a:prstGeom>
+          <a:solidFill>
+            <a:srgbClr val="CC0E1E"/>
+          </a:solidFill>
+          <a:ln>
+            <a:noFill/>
+          </a:ln>
+        </p:spPr>
+        <p:style>
+          <a:lnRef idx="1">
+            <a:schemeClr val="accent1"/>
+          </a:lnRef>
+          <a:fillRef idx="3">
+            <a:schemeClr val="accent1"/>
+          </a:fillRef>
+          <a:effectRef idx="2">
+            <a:schemeClr val="accent1"/>
+          </a:effectRef>
+          <a:fontRef idx="minor">
+            <a:schemeClr val="lt1"/>
+          </a:fontRef>
+        </p:style>
+        <p:txBody>
+          <a:bodyPr rtlCol="0" anchor="ctr"/>
+          <a:lstStyle/>
+          <a:p>
+            <a:pPr algn="ctr"/>
+          </a:p>
+        </p:txBody>
+      </p:sp>
+      <p:sp>
+        <p:nvSpPr>
+          <p:cNvPr id="7" name="TextBox 6"/>
+          <p:cNvSpPr txBox="1"/>
+          <p:nvPr/>
+        </p:nvSpPr>
+        <p:spPr>
+          <a:xfrm>
+            <a:off x="11594592" y="6473952"/>
+            <a:ext cx="365760" cy="274320"/>
+          </a:xfrm>
+          <a:prstGeom prst="rect">
+            <a:avLst/>
+          </a:prstGeom>
+          <a:noFill/>
+        </p:spPr>
+        <p:txBody>
+          <a:bodyPr wrap="square">
+            <a:spAutoFit/>
+          </a:bodyPr>
+          <a:lstStyle/>
+          <a:p>
+            <a:pPr algn="r"/>
+            <a:r>
+              <a:rPr sz="1000" b="0">
+                <a:solidFill>
+                  <a:srgbClr val="5A5A5A"/>
+                </a:solidFill>
+                <a:latin typeface="Calibri"/>
+              </a:rPr>
+              <a:t>3</a:t>
+            </a:r>
+          </a:p>
+        </p:txBody>
+      </p:sp>
+      <p:pic>
+        <p:nvPicPr>
+          <p:cNvPr id="8" name="Picture 7" descr="category_movers.png"/>
+          <p:cNvPicPr>
+            <a:picLocks noChangeAspect="1"/>
+          </p:cNvPicPr>
+          <p:nvPr/>
+        </p:nvPicPr>
+        <p:blipFill>
+          <a:blip r:embed="rId3"/>
+          <a:stretch>
+            <a:fillRect/>
+          </a:stretch>
+        </p:blipFill>
+        <p:spPr>
+          <a:xfrm>
+            <a:off x="292608" y="2121722"/>
+            <a:ext cx="7178040" cy="3026036"/>
+          </a:xfrm>
+          <a:prstGeom prst="rect">
+            <a:avLst/>
+          </a:prstGeom>
+        </p:spPr>
+      </p:pic>
+      <p:sp>
+        <p:nvSpPr>
+          <p:cNvPr id="9" name="Rectangle 8"/>
+          <p:cNvSpPr/>
+          <p:nvPr/>
+        </p:nvSpPr>
+        <p:spPr>
+          <a:xfrm>
+            <a:off x="7726679" y="1188720"/>
+            <a:ext cx="22000" cy="4892040"/>
+          </a:xfrm>
+          <a:prstGeom prst="rect">
+            <a:avLst/>
+          </a:prstGeom>
+          <a:solidFill>
+            <a:srgbClr val="ECECEC"/>
+          </a:solidFill>
+          <a:ln>
+            <a:noFill/>
+          </a:ln>
+        </p:spPr>
+        <p:style>
+          <a:lnRef idx="1">
+            <a:schemeClr val="accent1"/>
+          </a:lnRef>
+          <a:fillRef idx="3">
+            <a:schemeClr val="accent1"/>
+          </a:fillRef>
+          <a:effectRef idx="2">
+            <a:schemeClr val="accent1"/>
+          </a:effectRef>
+          <a:fontRef idx="minor">
+            <a:schemeClr val="lt1"/>
+          </a:fontRef>
+        </p:style>
+        <p:txBody>
+          <a:bodyPr rtlCol="0" anchor="ctr"/>
+          <a:lstStyle/>
+          <a:p>
+            <a:pPr algn="ctr"/>
+          </a:p>
+        </p:txBody>
+      </p:sp>
+      <p:sp>
+        <p:nvSpPr>
+          <p:cNvPr id="10" name="TextBox 9"/>
+          <p:cNvSpPr txBox="1"/>
+          <p:nvPr/>
+        </p:nvSpPr>
+        <p:spPr>
+          <a:xfrm>
+            <a:off x="7927847" y="1234440"/>
+            <a:ext cx="3886200" cy="320040"/>
+          </a:xfrm>
+          <a:prstGeom prst="rect">
+            <a:avLst/>
+          </a:prstGeom>
+          <a:noFill/>
+        </p:spPr>
+        <p:txBody>
+          <a:bodyPr wrap="square">
+            <a:spAutoFit/>
+          </a:bodyPr>
+          <a:lstStyle/>
+          <a:p>
+            <a:pPr algn="l"/>
+            <a:r>
+              <a:rPr sz="1200" b="1">
+                <a:solidFill>
+                  <a:srgbClr val="CC0E1E"/>
+                </a:solidFill>
+                <a:latin typeface="Calibri"/>
+              </a:rPr>
+              <a:t>TAKEAWAYS</a:t>
+            </a:r>
+          </a:p>
+        </p:txBody>
+      </p:sp>
+      <p:sp>
+        <p:nvSpPr>
+          <p:cNvPr id="11" name="TextBox 10"/>
+          <p:cNvSpPr txBox="1"/>
+          <p:nvPr/>
+        </p:nvSpPr>
+        <p:spPr>
+          <a:xfrm>
+            <a:off x="7927847" y="1691640"/>
+            <a:ext cx="3794760" cy="4343400"/>
+          </a:xfrm>
+          <a:prstGeom prst="rect">
+            <a:avLst/>
+          </a:prstGeom>
+          <a:noFill/>
+        </p:spPr>
+        <p:txBody>
+          <a:bodyPr wrap="square">
+            <a:spAutoFit/>
+          </a:bodyPr>
+          <a:lstStyle/>
+          <a:p>
+            <a:pPr>
+              <a:lnSpc>
+                <a:spcPct val="125000"/>
+              </a:lnSpc>
+              <a:spcAft>
+                <a:spcPts val="1000"/>
+              </a:spcAft>
+            </a:pPr>
+            <a:r>
+              <a:rPr sz="1250" b="1">
+                <a:solidFill>
+                  <a:srgbClr val="CC0E1E"/>
+                </a:solidFill>
+                <a:latin typeface="Calibri"/>
+              </a:rPr>
+              <a:t>—  </a:t>
+            </a:r>
+            <a:r>
+              <a:rPr sz="1250">
+                <a:solidFill>
+                  <a:srgbClr val="1A1A1A"/>
+                </a:solidFill>
+                <a:latin typeface="Calibri"/>
+              </a:rPr>
+              <a:t>Commercial parts billing (warranty/campaign excluded) EUR 123K against EUR 122K a year earlier — +0.3% (CY H1 2026 vs CY H1 2025, Jan–Jun).</a:t>
+            </a:r>
+          </a:p>
+          <a:p>
+            <a:pPr>
+              <a:lnSpc>
+                <a:spcPct val="125000"/>
+              </a:lnSpc>
+              <a:spcAft>
+                <a:spcPts val="1000"/>
+              </a:spcAft>
+            </a:pPr>
+            <a:r>
+              <a:rPr sz="1250" b="1">
+                <a:solidFill>
+                  <a:srgbClr val="CC0E1E"/>
+                </a:solidFill>
+                <a:latin typeface="Calibri"/>
+              </a:rPr>
+              <a:t>—  </a:t>
+            </a:r>
+            <a:r>
+              <a:rPr sz="1250">
+                <a:solidFill>
+                  <a:srgbClr val="1A1A1A"/>
+                </a:solidFill>
+                <a:latin typeface="Calibri"/>
+              </a:rPr>
+              <a:t>Largest PN drops (all categories): 8983767550 (ROTOR; DISC BRK,FRT) EUR -6K, 79 fewer pcs; 8977993753 (LAMP ASM; HEAD) EUR -3K, 9 fewer pcs; 8975546610 (PAD KIT; CALIPER,DIS) [TF*] EUR -2K, 21 fewer pcs.</a:t>
+            </a:r>
+          </a:p>
+          <a:p>
+            <a:pPr>
+              <a:lnSpc>
+                <a:spcPct val="125000"/>
+              </a:lnSpc>
+              <a:spcAft>
+                <a:spcPts val="1000"/>
+              </a:spcAft>
+            </a:pPr>
+            <a:r>
+              <a:rPr sz="1250" b="1">
+                <a:solidFill>
+                  <a:srgbClr val="CC0E1E"/>
+                </a:solidFill>
+                <a:latin typeface="Calibri"/>
+              </a:rPr>
+              <a:t>—  </a:t>
+            </a:r>
+            <a:r>
+              <a:rPr sz="1250">
+                <a:solidFill>
+                  <a:srgbClr val="1A1A1A"/>
+                </a:solidFill>
+                <a:latin typeface="Calibri"/>
+              </a:rPr>
+              <a:t>Largest PN gains (all categories): 8974995480 (FILTER; ACL) [TFR,TFS,UCR,UCS] EUR 3K, 154 more pcs; 1884057520 (T AXLE OIL  20L) EUR 2K, 14 more pcs; 8975595830 (PANEL; SIDE GATE) EUR 2K, 8 more pcs.</a:t>
+            </a:r>
+          </a:p>
+          <a:p>
+            <a:pPr>
+              <a:lnSpc>
+                <a:spcPct val="125000"/>
+              </a:lnSpc>
+              <a:spcAft>
+                <a:spcPts val="1000"/>
+              </a:spcAft>
+            </a:pPr>
+            <a:r>
+              <a:rPr sz="1250" b="1">
+                <a:solidFill>
+                  <a:srgbClr val="CC0E1E"/>
+                </a:solidFill>
+                <a:latin typeface="Calibri"/>
+              </a:rPr>
+              <a:t>—  </a:t>
+            </a:r>
+            <a:r>
+              <a:rPr sz="1250">
+                <a:solidFill>
+                  <a:srgbClr val="1A1A1A"/>
+                </a:solidFill>
+                <a:latin typeface="Calibri"/>
+              </a:rPr>
+              <a:t>Within Air conditioning (EUR 5K, +37%): 8974995480 (FILTER; ACL) [TFR,TFS,UCR,UCS] EUR 3K, 154 more pcs; 8975554500 (FILTER; BLOWER UNIT) [TF*,UC*] EUR 1K, 51 more pcs; 8981569021 (CONTROL SUB ASM; HTR) EUR 0K.</a:t>
+            </a:r>
+          </a:p>
+        </p:txBody>
+      </p:sp>
+    </p:spTree>
+  </p:cSld>
+  <p:clrMapOvr>
+    <a:masterClrMapping/>
+  </p:clrMapOvr>
+</p:sld>
+</file>
+
+<file path=ppt/slides/slide30.xml><?xml version="1.0" encoding="utf-8"?>
 <p:sld xmlns:a="http://schemas.openxmlformats.org/drawingml/2006/main" xmlns:p="http://schemas.openxmlformats.org/presentationml/2006/main" xmlns:r="http://schemas.openxmlformats.org/officeDocument/2006/relationships">
   <p:cSld>
     <p:bg>
@@ -17216,7 +17067,7 @@
                 </a:solidFill>
                 <a:latin typeface="Calibri"/>
               </a:rPr>
-              <a:t>31</a:t>
+              <a:t>30</a:t>
             </a:r>
           </a:p>
         </p:txBody>
@@ -17712,6 +17563,780 @@
 </p:sld>
 </file>
 
+<file path=ppt/slides/slide31.xml><?xml version="1.0" encoding="utf-8"?>
+<p:sld xmlns:a="http://schemas.openxmlformats.org/drawingml/2006/main" xmlns:p="http://schemas.openxmlformats.org/presentationml/2006/main" xmlns:r="http://schemas.openxmlformats.org/officeDocument/2006/relationships">
+  <p:cSld>
+    <p:bg>
+      <p:bgPr>
+        <a:solidFill>
+          <a:srgbClr val="FFFFFF"/>
+        </a:solidFill>
+        <a:effectLst/>
+      </p:bgPr>
+    </p:bg>
+    <p:spTree>
+      <p:nvGrpSpPr>
+        <p:cNvPr id="1" name=""/>
+        <p:cNvGrpSpPr/>
+        <p:nvPr/>
+      </p:nvGrpSpPr>
+      <p:grpSpPr/>
+      <p:pic>
+        <p:nvPicPr>
+          <p:cNvPr id="2" name="Picture 1" descr="image.png"/>
+          <p:cNvPicPr>
+            <a:picLocks noChangeAspect="1"/>
+          </p:cNvPicPr>
+          <p:nvPr/>
+        </p:nvPicPr>
+        <p:blipFill>
+          <a:blip r:embed="rId2"/>
+          <a:stretch>
+            <a:fillRect/>
+          </a:stretch>
+        </p:blipFill>
+        <p:spPr>
+          <a:xfrm>
+            <a:off x="256032" y="6263640"/>
+            <a:ext cx="1679787" cy="292608"/>
+          </a:xfrm>
+          <a:prstGeom prst="rect">
+            <a:avLst/>
+          </a:prstGeom>
+        </p:spPr>
+      </p:pic>
+      <p:sp>
+        <p:nvSpPr>
+          <p:cNvPr id="3" name="Rectangle 2"/>
+          <p:cNvSpPr/>
+          <p:nvPr/>
+        </p:nvSpPr>
+        <p:spPr>
+          <a:xfrm>
+            <a:off x="0" y="6766560"/>
+            <a:ext cx="12188952" cy="91440"/>
+          </a:xfrm>
+          <a:prstGeom prst="rect">
+            <a:avLst/>
+          </a:prstGeom>
+          <a:solidFill>
+            <a:srgbClr val="CC0E1E"/>
+          </a:solidFill>
+          <a:ln>
+            <a:noFill/>
+          </a:ln>
+        </p:spPr>
+        <p:style>
+          <a:lnRef idx="1">
+            <a:schemeClr val="accent1"/>
+          </a:lnRef>
+          <a:fillRef idx="3">
+            <a:schemeClr val="accent1"/>
+          </a:fillRef>
+          <a:effectRef idx="2">
+            <a:schemeClr val="accent1"/>
+          </a:effectRef>
+          <a:fontRef idx="minor">
+            <a:schemeClr val="lt1"/>
+          </a:fontRef>
+        </p:style>
+        <p:txBody>
+          <a:bodyPr rtlCol="0" anchor="ctr"/>
+          <a:lstStyle/>
+          <a:p>
+            <a:pPr algn="ctr"/>
+          </a:p>
+        </p:txBody>
+      </p:sp>
+      <p:sp>
+        <p:nvSpPr>
+          <p:cNvPr id="4" name="TextBox 3"/>
+          <p:cNvSpPr txBox="1"/>
+          <p:nvPr/>
+        </p:nvSpPr>
+        <p:spPr>
+          <a:xfrm>
+            <a:off x="292608" y="201168"/>
+            <a:ext cx="11430000" cy="274320"/>
+          </a:xfrm>
+          <a:prstGeom prst="rect">
+            <a:avLst/>
+          </a:prstGeom>
+          <a:noFill/>
+        </p:spPr>
+        <p:txBody>
+          <a:bodyPr wrap="square">
+            <a:spAutoFit/>
+          </a:bodyPr>
+          <a:lstStyle/>
+          <a:p>
+            <a:pPr algn="l"/>
+            <a:r>
+              <a:rPr sz="1100" b="1">
+                <a:solidFill>
+                  <a:srgbClr val="CC0E1E"/>
+                </a:solidFill>
+                <a:latin typeface="Calibri"/>
+              </a:rPr>
+              <a:t>WARRANTY</a:t>
+            </a:r>
+          </a:p>
+        </p:txBody>
+      </p:sp>
+      <p:sp>
+        <p:nvSpPr>
+          <p:cNvPr id="5" name="TextBox 4"/>
+          <p:cNvSpPr txBox="1"/>
+          <p:nvPr/>
+        </p:nvSpPr>
+        <p:spPr>
+          <a:xfrm>
+            <a:off x="292608" y="475488"/>
+            <a:ext cx="11612880" cy="566928"/>
+          </a:xfrm>
+          <a:prstGeom prst="rect">
+            <a:avLst/>
+          </a:prstGeom>
+          <a:noFill/>
+        </p:spPr>
+        <p:txBody>
+          <a:bodyPr wrap="square">
+            <a:spAutoFit/>
+          </a:bodyPr>
+          <a:lstStyle/>
+          <a:p>
+            <a:pPr algn="l"/>
+            <a:r>
+              <a:rPr sz="2500" b="1">
+                <a:solidFill>
+                  <a:srgbClr val="1A1A1A"/>
+                </a:solidFill>
+                <a:latin typeface="Calibri"/>
+              </a:rPr>
+              <a:t>Warranty — two real lenses</a:t>
+            </a:r>
+          </a:p>
+        </p:txBody>
+      </p:sp>
+      <p:sp>
+        <p:nvSpPr>
+          <p:cNvPr id="6" name="Rectangle 5"/>
+          <p:cNvSpPr/>
+          <p:nvPr/>
+        </p:nvSpPr>
+        <p:spPr>
+          <a:xfrm>
+            <a:off x="292608" y="1005840"/>
+            <a:ext cx="11612880" cy="28000"/>
+          </a:xfrm>
+          <a:prstGeom prst="rect">
+            <a:avLst/>
+          </a:prstGeom>
+          <a:solidFill>
+            <a:srgbClr val="CC0E1E"/>
+          </a:solidFill>
+          <a:ln>
+            <a:noFill/>
+          </a:ln>
+        </p:spPr>
+        <p:style>
+          <a:lnRef idx="1">
+            <a:schemeClr val="accent1"/>
+          </a:lnRef>
+          <a:fillRef idx="3">
+            <a:schemeClr val="accent1"/>
+          </a:fillRef>
+          <a:effectRef idx="2">
+            <a:schemeClr val="accent1"/>
+          </a:effectRef>
+          <a:fontRef idx="minor">
+            <a:schemeClr val="lt1"/>
+          </a:fontRef>
+        </p:style>
+        <p:txBody>
+          <a:bodyPr rtlCol="0" anchor="ctr"/>
+          <a:lstStyle/>
+          <a:p>
+            <a:pPr algn="ctr"/>
+          </a:p>
+        </p:txBody>
+      </p:sp>
+      <p:sp>
+        <p:nvSpPr>
+          <p:cNvPr id="7" name="TextBox 6"/>
+          <p:cNvSpPr txBox="1"/>
+          <p:nvPr/>
+        </p:nvSpPr>
+        <p:spPr>
+          <a:xfrm>
+            <a:off x="11594592" y="6473952"/>
+            <a:ext cx="365760" cy="274320"/>
+          </a:xfrm>
+          <a:prstGeom prst="rect">
+            <a:avLst/>
+          </a:prstGeom>
+          <a:noFill/>
+        </p:spPr>
+        <p:txBody>
+          <a:bodyPr wrap="square">
+            <a:spAutoFit/>
+          </a:bodyPr>
+          <a:lstStyle/>
+          <a:p>
+            <a:pPr algn="r"/>
+            <a:r>
+              <a:rPr sz="1000" b="0">
+                <a:solidFill>
+                  <a:srgbClr val="5A5A5A"/>
+                </a:solidFill>
+                <a:latin typeface="Calibri"/>
+              </a:rPr>
+              <a:t>31</a:t>
+            </a:r>
+          </a:p>
+        </p:txBody>
+      </p:sp>
+      <p:sp>
+        <p:nvSpPr>
+          <p:cNvPr id="8" name="Rounded Rectangle 7"/>
+          <p:cNvSpPr/>
+          <p:nvPr/>
+        </p:nvSpPr>
+        <p:spPr>
+          <a:xfrm>
+            <a:off x="292608" y="1234440"/>
+            <a:ext cx="5486400" cy="2926080"/>
+          </a:xfrm>
+          <a:prstGeom prst="roundRect">
+            <a:avLst>
+              <a:gd name="adj" fmla="val 6000"/>
+            </a:avLst>
+          </a:prstGeom>
+          <a:solidFill>
+            <a:srgbClr val="ECECEC"/>
+          </a:solidFill>
+          <a:ln>
+            <a:noFill/>
+          </a:ln>
+          <a:effectLst/>
+        </p:spPr>
+        <p:style>
+          <a:lnRef idx="1">
+            <a:schemeClr val="accent1"/>
+          </a:lnRef>
+          <a:fillRef idx="3">
+            <a:schemeClr val="accent1"/>
+          </a:fillRef>
+          <a:effectRef idx="2">
+            <a:schemeClr val="accent1"/>
+          </a:effectRef>
+          <a:fontRef idx="minor">
+            <a:schemeClr val="lt1"/>
+          </a:fontRef>
+        </p:style>
+        <p:txBody>
+          <a:bodyPr rtlCol="0" anchor="ctr"/>
+          <a:lstStyle/>
+          <a:p>
+            <a:pPr algn="ctr"/>
+          </a:p>
+        </p:txBody>
+      </p:sp>
+      <p:sp>
+        <p:nvSpPr>
+          <p:cNvPr id="9" name="Oval 8"/>
+          <p:cNvSpPr/>
+          <p:nvPr/>
+        </p:nvSpPr>
+        <p:spPr>
+          <a:xfrm>
+            <a:off x="493776" y="1435608"/>
+            <a:ext cx="457200" cy="457200"/>
+          </a:xfrm>
+          <a:prstGeom prst="ellipse">
+            <a:avLst/>
+          </a:prstGeom>
+          <a:solidFill>
+            <a:srgbClr val="CC0E1E"/>
+          </a:solidFill>
+          <a:ln>
+            <a:noFill/>
+          </a:ln>
+          <a:effectLst/>
+        </p:spPr>
+        <p:style>
+          <a:lnRef idx="1">
+            <a:schemeClr val="accent1"/>
+          </a:lnRef>
+          <a:fillRef idx="3">
+            <a:schemeClr val="accent1"/>
+          </a:fillRef>
+          <a:effectRef idx="2">
+            <a:schemeClr val="accent1"/>
+          </a:effectRef>
+          <a:fontRef idx="minor">
+            <a:schemeClr val="lt1"/>
+          </a:fontRef>
+        </p:style>
+        <p:txBody>
+          <a:bodyPr rtlCol="0" anchor="ctr" lIns="0" rIns="0" tIns="0" bIns="0"/>
+          <a:lstStyle/>
+          <a:p>
+            <a:pPr algn="ctr"/>
+            <a:r>
+              <a:rPr sz="1800" b="1">
+                <a:solidFill>
+                  <a:srgbClr val="FFFFFF"/>
+                </a:solidFill>
+                <a:latin typeface="Calibri"/>
+              </a:rPr>
+              <a:t>1</a:t>
+            </a:r>
+          </a:p>
+        </p:txBody>
+      </p:sp>
+      <p:sp>
+        <p:nvSpPr>
+          <p:cNvPr id="10" name="TextBox 9"/>
+          <p:cNvSpPr txBox="1"/>
+          <p:nvPr/>
+        </p:nvSpPr>
+        <p:spPr>
+          <a:xfrm>
+            <a:off x="1115568" y="1435608"/>
+            <a:ext cx="4480560" cy="411480"/>
+          </a:xfrm>
+          <a:prstGeom prst="rect">
+            <a:avLst/>
+          </a:prstGeom>
+          <a:noFill/>
+        </p:spPr>
+        <p:txBody>
+          <a:bodyPr wrap="square">
+            <a:spAutoFit/>
+          </a:bodyPr>
+          <a:lstStyle/>
+          <a:p>
+            <a:pPr algn="l"/>
+            <a:r>
+              <a:rPr sz="1500" b="1">
+                <a:solidFill>
+                  <a:srgbClr val="1A1A1A"/>
+                </a:solidFill>
+                <a:latin typeface="Calibri"/>
+              </a:rPr>
+              <a:t>CY2025 claim-price parts</a:t>
+            </a:r>
+          </a:p>
+        </p:txBody>
+      </p:sp>
+      <p:sp>
+        <p:nvSpPr>
+          <p:cNvPr id="11" name="TextBox 10"/>
+          <p:cNvSpPr txBox="1"/>
+          <p:nvPr/>
+        </p:nvSpPr>
+        <p:spPr>
+          <a:xfrm>
+            <a:off x="585216" y="2011680"/>
+            <a:ext cx="4937760" cy="2011680"/>
+          </a:xfrm>
+          <a:prstGeom prst="rect">
+            <a:avLst/>
+          </a:prstGeom>
+          <a:noFill/>
+        </p:spPr>
+        <p:txBody>
+          <a:bodyPr wrap="square">
+            <a:spAutoFit/>
+          </a:bodyPr>
+          <a:lstStyle/>
+          <a:p>
+            <a:pPr>
+              <a:lnSpc>
+                <a:spcPct val="115000"/>
+              </a:lnSpc>
+              <a:spcAft>
+                <a:spcPts val="1000"/>
+              </a:spcAft>
+            </a:pPr>
+            <a:r>
+              <a:rPr sz="1250" b="1">
+                <a:solidFill>
+                  <a:srgbClr val="CC0E1E"/>
+                </a:solidFill>
+                <a:latin typeface="Calibri"/>
+              </a:rPr>
+              <a:t>—  </a:t>
+            </a:r>
+            <a:r>
+              <a:rPr sz="1250">
+                <a:solidFill>
+                  <a:srgbClr val="1A1A1A"/>
+                </a:solidFill>
+                <a:latin typeface="Calibri"/>
+              </a:rPr>
+              <a:t>EUR 77,434 (claim-price basis).</a:t>
+            </a:r>
+          </a:p>
+          <a:p>
+            <a:pPr>
+              <a:lnSpc>
+                <a:spcPct val="115000"/>
+              </a:lnSpc>
+              <a:spcAft>
+                <a:spcPts val="1000"/>
+              </a:spcAft>
+            </a:pPr>
+            <a:r>
+              <a:rPr sz="1250" b="1">
+                <a:solidFill>
+                  <a:srgbClr val="CC0E1E"/>
+                </a:solidFill>
+                <a:latin typeface="Calibri"/>
+              </a:rPr>
+              <a:t>—  </a:t>
+            </a:r>
+            <a:r>
+              <a:rPr sz="1250">
+                <a:solidFill>
+                  <a:srgbClr val="1A1A1A"/>
+                </a:solidFill>
+                <a:latin typeface="Calibri"/>
+              </a:rPr>
+              <a:t>Calendar-year claim price basis.</a:t>
+            </a:r>
+          </a:p>
+          <a:p>
+            <a:pPr>
+              <a:lnSpc>
+                <a:spcPct val="115000"/>
+              </a:lnSpc>
+              <a:spcAft>
+                <a:spcPts val="1000"/>
+              </a:spcAft>
+            </a:pPr>
+            <a:r>
+              <a:rPr sz="1250" b="1">
+                <a:solidFill>
+                  <a:srgbClr val="CC0E1E"/>
+                </a:solidFill>
+                <a:latin typeface="Calibri"/>
+              </a:rPr>
+              <a:t>—  </a:t>
+            </a:r>
+            <a:r>
+              <a:rPr sz="1250">
+                <a:solidFill>
+                  <a:srgbClr val="1A1A1A"/>
+                </a:solidFill>
+                <a:latin typeface="Calibri"/>
+              </a:rPr>
+              <a:t>LCV warranty.</a:t>
+            </a:r>
+          </a:p>
+        </p:txBody>
+      </p:sp>
+      <p:sp>
+        <p:nvSpPr>
+          <p:cNvPr id="12" name="Rounded Rectangle 11"/>
+          <p:cNvSpPr/>
+          <p:nvPr/>
+        </p:nvSpPr>
+        <p:spPr>
+          <a:xfrm>
+            <a:off x="6126480" y="1234440"/>
+            <a:ext cx="5486400" cy="2926080"/>
+          </a:xfrm>
+          <a:prstGeom prst="roundRect">
+            <a:avLst>
+              <a:gd name="adj" fmla="val 6000"/>
+            </a:avLst>
+          </a:prstGeom>
+          <a:solidFill>
+            <a:srgbClr val="ECECEC"/>
+          </a:solidFill>
+          <a:ln>
+            <a:noFill/>
+          </a:ln>
+          <a:effectLst/>
+        </p:spPr>
+        <p:style>
+          <a:lnRef idx="1">
+            <a:schemeClr val="accent1"/>
+          </a:lnRef>
+          <a:fillRef idx="3">
+            <a:schemeClr val="accent1"/>
+          </a:fillRef>
+          <a:effectRef idx="2">
+            <a:schemeClr val="accent1"/>
+          </a:effectRef>
+          <a:fontRef idx="minor">
+            <a:schemeClr val="lt1"/>
+          </a:fontRef>
+        </p:style>
+        <p:txBody>
+          <a:bodyPr rtlCol="0" anchor="ctr"/>
+          <a:lstStyle/>
+          <a:p>
+            <a:pPr algn="ctr"/>
+          </a:p>
+        </p:txBody>
+      </p:sp>
+      <p:sp>
+        <p:nvSpPr>
+          <p:cNvPr id="13" name="Oval 12"/>
+          <p:cNvSpPr/>
+          <p:nvPr/>
+        </p:nvSpPr>
+        <p:spPr>
+          <a:xfrm>
+            <a:off x="6327648" y="1435608"/>
+            <a:ext cx="457200" cy="457200"/>
+          </a:xfrm>
+          <a:prstGeom prst="ellipse">
+            <a:avLst/>
+          </a:prstGeom>
+          <a:solidFill>
+            <a:srgbClr val="CC0E1E"/>
+          </a:solidFill>
+          <a:ln>
+            <a:noFill/>
+          </a:ln>
+          <a:effectLst/>
+        </p:spPr>
+        <p:style>
+          <a:lnRef idx="1">
+            <a:schemeClr val="accent1"/>
+          </a:lnRef>
+          <a:fillRef idx="3">
+            <a:schemeClr val="accent1"/>
+          </a:fillRef>
+          <a:effectRef idx="2">
+            <a:schemeClr val="accent1"/>
+          </a:effectRef>
+          <a:fontRef idx="minor">
+            <a:schemeClr val="lt1"/>
+          </a:fontRef>
+        </p:style>
+        <p:txBody>
+          <a:bodyPr rtlCol="0" anchor="ctr" lIns="0" rIns="0" tIns="0" bIns="0"/>
+          <a:lstStyle/>
+          <a:p>
+            <a:pPr algn="ctr"/>
+            <a:r>
+              <a:rPr sz="1800" b="1">
+                <a:solidFill>
+                  <a:srgbClr val="FFFFFF"/>
+                </a:solidFill>
+                <a:latin typeface="Calibri"/>
+              </a:rPr>
+              <a:t>2</a:t>
+            </a:r>
+          </a:p>
+        </p:txBody>
+      </p:sp>
+      <p:sp>
+        <p:nvSpPr>
+          <p:cNvPr id="14" name="TextBox 13"/>
+          <p:cNvSpPr txBox="1"/>
+          <p:nvPr/>
+        </p:nvSpPr>
+        <p:spPr>
+          <a:xfrm>
+            <a:off x="6949440" y="1435608"/>
+            <a:ext cx="4480560" cy="411480"/>
+          </a:xfrm>
+          <a:prstGeom prst="rect">
+            <a:avLst/>
+          </a:prstGeom>
+          <a:noFill/>
+        </p:spPr>
+        <p:txBody>
+          <a:bodyPr wrap="square">
+            <a:spAutoFit/>
+          </a:bodyPr>
+          <a:lstStyle/>
+          <a:p>
+            <a:pPr algn="l"/>
+            <a:r>
+              <a:rPr sz="1500" b="1">
+                <a:solidFill>
+                  <a:srgbClr val="1A1A1A"/>
+                </a:solidFill>
+                <a:latin typeface="Calibri"/>
+              </a:rPr>
+              <a:t>Fiscal GPS expense</a:t>
+            </a:r>
+          </a:p>
+        </p:txBody>
+      </p:sp>
+      <p:sp>
+        <p:nvSpPr>
+          <p:cNvPr id="15" name="TextBox 14"/>
+          <p:cNvSpPr txBox="1"/>
+          <p:nvPr/>
+        </p:nvSpPr>
+        <p:spPr>
+          <a:xfrm>
+            <a:off x="6419088" y="2011680"/>
+            <a:ext cx="4937760" cy="2011680"/>
+          </a:xfrm>
+          <a:prstGeom prst="rect">
+            <a:avLst/>
+          </a:prstGeom>
+          <a:noFill/>
+        </p:spPr>
+        <p:txBody>
+          <a:bodyPr wrap="square">
+            <a:spAutoFit/>
+          </a:bodyPr>
+          <a:lstStyle/>
+          <a:p>
+            <a:pPr>
+              <a:lnSpc>
+                <a:spcPct val="115000"/>
+              </a:lnSpc>
+              <a:spcAft>
+                <a:spcPts val="1000"/>
+              </a:spcAft>
+            </a:pPr>
+            <a:r>
+              <a:rPr sz="1250" b="1">
+                <a:solidFill>
+                  <a:srgbClr val="CC0E1E"/>
+                </a:solidFill>
+                <a:latin typeface="Calibri"/>
+              </a:rPr>
+              <a:t>—  </a:t>
+            </a:r>
+            <a:r>
+              <a:rPr sz="1250">
+                <a:solidFill>
+                  <a:srgbClr val="1A1A1A"/>
+                </a:solidFill>
+                <a:latin typeface="Calibri"/>
+              </a:rPr>
+              <a:t>FY24 EUR 225 · FY25 EUR 25,886 · FY26 EUR 102,418.</a:t>
+            </a:r>
+          </a:p>
+          <a:p>
+            <a:pPr>
+              <a:lnSpc>
+                <a:spcPct val="115000"/>
+              </a:lnSpc>
+              <a:spcAft>
+                <a:spcPts val="1000"/>
+              </a:spcAft>
+            </a:pPr>
+            <a:r>
+              <a:rPr sz="1250" b="1">
+                <a:solidFill>
+                  <a:srgbClr val="CC0E1E"/>
+                </a:solidFill>
+                <a:latin typeface="Calibri"/>
+              </a:rPr>
+              <a:t>—  </a:t>
+            </a:r>
+            <a:r>
+              <a:rPr sz="1250">
+                <a:solidFill>
+                  <a:srgbClr val="1A1A1A"/>
+                </a:solidFill>
+                <a:latin typeface="Calibri"/>
+              </a:rPr>
+              <a:t>Source row: AutoWallis.</a:t>
+            </a:r>
+          </a:p>
+          <a:p>
+            <a:pPr>
+              <a:lnSpc>
+                <a:spcPct val="115000"/>
+              </a:lnSpc>
+              <a:spcAft>
+                <a:spcPts val="1000"/>
+              </a:spcAft>
+            </a:pPr>
+            <a:r>
+              <a:rPr sz="1250" b="1">
+                <a:solidFill>
+                  <a:srgbClr val="CC0E1E"/>
+                </a:solidFill>
+                <a:latin typeface="Calibri"/>
+              </a:rPr>
+              <a:t>—  </a:t>
+            </a:r>
+            <a:r>
+              <a:rPr sz="1250">
+                <a:solidFill>
+                  <a:srgbClr val="1A1A1A"/>
+                </a:solidFill>
+                <a:latin typeface="Calibri"/>
+              </a:rPr>
+              <a:t>Ex-warranty GPS = (net − warranty) ÷ frozen CY25 wallet.</a:t>
+            </a:r>
+          </a:p>
+        </p:txBody>
+      </p:sp>
+      <p:sp>
+        <p:nvSpPr>
+          <p:cNvPr id="16" name="TextBox 15"/>
+          <p:cNvSpPr txBox="1"/>
+          <p:nvPr/>
+        </p:nvSpPr>
+        <p:spPr>
+          <a:xfrm>
+            <a:off x="292608" y="4480560"/>
+            <a:ext cx="11430000" cy="1097280"/>
+          </a:xfrm>
+          <a:prstGeom prst="rect">
+            <a:avLst/>
+          </a:prstGeom>
+          <a:noFill/>
+        </p:spPr>
+        <p:txBody>
+          <a:bodyPr wrap="square">
+            <a:spAutoFit/>
+          </a:bodyPr>
+          <a:lstStyle/>
+          <a:p>
+            <a:pPr>
+              <a:lnSpc>
+                <a:spcPct val="125000"/>
+              </a:lnSpc>
+              <a:spcAft>
+                <a:spcPts val="1000"/>
+              </a:spcAft>
+            </a:pPr>
+            <a:r>
+              <a:rPr sz="1300" b="1">
+                <a:solidFill>
+                  <a:srgbClr val="CC0E1E"/>
+                </a:solidFill>
+                <a:latin typeface="Calibri"/>
+              </a:rPr>
+              <a:t>—  </a:t>
+            </a:r>
+            <a:r>
+              <a:rPr sz="1300">
+                <a:solidFill>
+                  <a:srgbClr val="1A1A1A"/>
+                </a:solidFill>
+                <a:latin typeface="Calibri"/>
+              </a:rPr>
+              <a:t>Both numbers are real — never mix them on one slide without labels.</a:t>
+            </a:r>
+          </a:p>
+        </p:txBody>
+      </p:sp>
+    </p:spTree>
+  </p:cSld>
+  <p:clrMapOvr>
+    <a:masterClrMapping/>
+  </p:clrMapOvr>
+</p:sld>
+</file>
+
 <file path=ppt/slides/slide32.xml><?xml version="1.0" encoding="utf-8"?>
 <p:sld xmlns:a="http://schemas.openxmlformats.org/drawingml/2006/main" xmlns:p="http://schemas.openxmlformats.org/presentationml/2006/main" xmlns:r="http://schemas.openxmlformats.org/officeDocument/2006/relationships">
   <p:cSld>
@@ -17827,7 +18452,7 @@
                 </a:solidFill>
                 <a:latin typeface="Calibri"/>
               </a:rPr>
-              <a:t>WARRANTY</a:t>
+              <a:t>BRIDGE</a:t>
             </a:r>
           </a:p>
         </p:txBody>
@@ -17862,7 +18487,7 @@
                 </a:solidFill>
                 <a:latin typeface="Calibri"/>
               </a:rPr>
-              <a:t>Warranty — two real lenses</a:t>
+              <a:t>How to use this in the meeting</a:t>
             </a:r>
           </a:p>
         </p:txBody>
@@ -17941,780 +18566,6 @@
                 <a:latin typeface="Calibri"/>
               </a:rPr>
               <a:t>32</a:t>
-            </a:r>
-          </a:p>
-        </p:txBody>
-      </p:sp>
-      <p:sp>
-        <p:nvSpPr>
-          <p:cNvPr id="8" name="Rounded Rectangle 7"/>
-          <p:cNvSpPr/>
-          <p:nvPr/>
-        </p:nvSpPr>
-        <p:spPr>
-          <a:xfrm>
-            <a:off x="292608" y="1234440"/>
-            <a:ext cx="5486400" cy="2926080"/>
-          </a:xfrm>
-          <a:prstGeom prst="roundRect">
-            <a:avLst>
-              <a:gd name="adj" fmla="val 6000"/>
-            </a:avLst>
-          </a:prstGeom>
-          <a:solidFill>
-            <a:srgbClr val="ECECEC"/>
-          </a:solidFill>
-          <a:ln>
-            <a:noFill/>
-          </a:ln>
-          <a:effectLst/>
-        </p:spPr>
-        <p:style>
-          <a:lnRef idx="1">
-            <a:schemeClr val="accent1"/>
-          </a:lnRef>
-          <a:fillRef idx="3">
-            <a:schemeClr val="accent1"/>
-          </a:fillRef>
-          <a:effectRef idx="2">
-            <a:schemeClr val="accent1"/>
-          </a:effectRef>
-          <a:fontRef idx="minor">
-            <a:schemeClr val="lt1"/>
-          </a:fontRef>
-        </p:style>
-        <p:txBody>
-          <a:bodyPr rtlCol="0" anchor="ctr"/>
-          <a:lstStyle/>
-          <a:p>
-            <a:pPr algn="ctr"/>
-          </a:p>
-        </p:txBody>
-      </p:sp>
-      <p:sp>
-        <p:nvSpPr>
-          <p:cNvPr id="9" name="Oval 8"/>
-          <p:cNvSpPr/>
-          <p:nvPr/>
-        </p:nvSpPr>
-        <p:spPr>
-          <a:xfrm>
-            <a:off x="493776" y="1435608"/>
-            <a:ext cx="457200" cy="457200"/>
-          </a:xfrm>
-          <a:prstGeom prst="ellipse">
-            <a:avLst/>
-          </a:prstGeom>
-          <a:solidFill>
-            <a:srgbClr val="CC0E1E"/>
-          </a:solidFill>
-          <a:ln>
-            <a:noFill/>
-          </a:ln>
-          <a:effectLst/>
-        </p:spPr>
-        <p:style>
-          <a:lnRef idx="1">
-            <a:schemeClr val="accent1"/>
-          </a:lnRef>
-          <a:fillRef idx="3">
-            <a:schemeClr val="accent1"/>
-          </a:fillRef>
-          <a:effectRef idx="2">
-            <a:schemeClr val="accent1"/>
-          </a:effectRef>
-          <a:fontRef idx="minor">
-            <a:schemeClr val="lt1"/>
-          </a:fontRef>
-        </p:style>
-        <p:txBody>
-          <a:bodyPr rtlCol="0" anchor="ctr" lIns="0" rIns="0" tIns="0" bIns="0"/>
-          <a:lstStyle/>
-          <a:p>
-            <a:pPr algn="ctr"/>
-            <a:r>
-              <a:rPr sz="1800" b="1">
-                <a:solidFill>
-                  <a:srgbClr val="FFFFFF"/>
-                </a:solidFill>
-                <a:latin typeface="Calibri"/>
-              </a:rPr>
-              <a:t>1</a:t>
-            </a:r>
-          </a:p>
-        </p:txBody>
-      </p:sp>
-      <p:sp>
-        <p:nvSpPr>
-          <p:cNvPr id="10" name="TextBox 9"/>
-          <p:cNvSpPr txBox="1"/>
-          <p:nvPr/>
-        </p:nvSpPr>
-        <p:spPr>
-          <a:xfrm>
-            <a:off x="1115568" y="1435608"/>
-            <a:ext cx="4480560" cy="411480"/>
-          </a:xfrm>
-          <a:prstGeom prst="rect">
-            <a:avLst/>
-          </a:prstGeom>
-          <a:noFill/>
-        </p:spPr>
-        <p:txBody>
-          <a:bodyPr wrap="square">
-            <a:spAutoFit/>
-          </a:bodyPr>
-          <a:lstStyle/>
-          <a:p>
-            <a:pPr algn="l"/>
-            <a:r>
-              <a:rPr sz="1500" b="1">
-                <a:solidFill>
-                  <a:srgbClr val="1A1A1A"/>
-                </a:solidFill>
-                <a:latin typeface="Calibri"/>
-              </a:rPr>
-              <a:t>CY2025 claim-price parts</a:t>
-            </a:r>
-          </a:p>
-        </p:txBody>
-      </p:sp>
-      <p:sp>
-        <p:nvSpPr>
-          <p:cNvPr id="11" name="TextBox 10"/>
-          <p:cNvSpPr txBox="1"/>
-          <p:nvPr/>
-        </p:nvSpPr>
-        <p:spPr>
-          <a:xfrm>
-            <a:off x="585216" y="2011680"/>
-            <a:ext cx="4937760" cy="2011680"/>
-          </a:xfrm>
-          <a:prstGeom prst="rect">
-            <a:avLst/>
-          </a:prstGeom>
-          <a:noFill/>
-        </p:spPr>
-        <p:txBody>
-          <a:bodyPr wrap="square">
-            <a:spAutoFit/>
-          </a:bodyPr>
-          <a:lstStyle/>
-          <a:p>
-            <a:pPr>
-              <a:lnSpc>
-                <a:spcPct val="115000"/>
-              </a:lnSpc>
-              <a:spcAft>
-                <a:spcPts val="1000"/>
-              </a:spcAft>
-            </a:pPr>
-            <a:r>
-              <a:rPr sz="1250" b="1">
-                <a:solidFill>
-                  <a:srgbClr val="CC0E1E"/>
-                </a:solidFill>
-                <a:latin typeface="Calibri"/>
-              </a:rPr>
-              <a:t>—  </a:t>
-            </a:r>
-            <a:r>
-              <a:rPr sz="1250">
-                <a:solidFill>
-                  <a:srgbClr val="1A1A1A"/>
-                </a:solidFill>
-                <a:latin typeface="Calibri"/>
-              </a:rPr>
-              <a:t>EUR 77,434 (claim-price basis).</a:t>
-            </a:r>
-          </a:p>
-          <a:p>
-            <a:pPr>
-              <a:lnSpc>
-                <a:spcPct val="115000"/>
-              </a:lnSpc>
-              <a:spcAft>
-                <a:spcPts val="1000"/>
-              </a:spcAft>
-            </a:pPr>
-            <a:r>
-              <a:rPr sz="1250" b="1">
-                <a:solidFill>
-                  <a:srgbClr val="CC0E1E"/>
-                </a:solidFill>
-                <a:latin typeface="Calibri"/>
-              </a:rPr>
-              <a:t>—  </a:t>
-            </a:r>
-            <a:r>
-              <a:rPr sz="1250">
-                <a:solidFill>
-                  <a:srgbClr val="1A1A1A"/>
-                </a:solidFill>
-                <a:latin typeface="Calibri"/>
-              </a:rPr>
-              <a:t>Calendar-year claim price basis.</a:t>
-            </a:r>
-          </a:p>
-          <a:p>
-            <a:pPr>
-              <a:lnSpc>
-                <a:spcPct val="115000"/>
-              </a:lnSpc>
-              <a:spcAft>
-                <a:spcPts val="1000"/>
-              </a:spcAft>
-            </a:pPr>
-            <a:r>
-              <a:rPr sz="1250" b="1">
-                <a:solidFill>
-                  <a:srgbClr val="CC0E1E"/>
-                </a:solidFill>
-                <a:latin typeface="Calibri"/>
-              </a:rPr>
-              <a:t>—  </a:t>
-            </a:r>
-            <a:r>
-              <a:rPr sz="1250">
-                <a:solidFill>
-                  <a:srgbClr val="1A1A1A"/>
-                </a:solidFill>
-                <a:latin typeface="Calibri"/>
-              </a:rPr>
-              <a:t>LCV warranty.</a:t>
-            </a:r>
-          </a:p>
-        </p:txBody>
-      </p:sp>
-      <p:sp>
-        <p:nvSpPr>
-          <p:cNvPr id="12" name="Rounded Rectangle 11"/>
-          <p:cNvSpPr/>
-          <p:nvPr/>
-        </p:nvSpPr>
-        <p:spPr>
-          <a:xfrm>
-            <a:off x="6126480" y="1234440"/>
-            <a:ext cx="5486400" cy="2926080"/>
-          </a:xfrm>
-          <a:prstGeom prst="roundRect">
-            <a:avLst>
-              <a:gd name="adj" fmla="val 6000"/>
-            </a:avLst>
-          </a:prstGeom>
-          <a:solidFill>
-            <a:srgbClr val="ECECEC"/>
-          </a:solidFill>
-          <a:ln>
-            <a:noFill/>
-          </a:ln>
-          <a:effectLst/>
-        </p:spPr>
-        <p:style>
-          <a:lnRef idx="1">
-            <a:schemeClr val="accent1"/>
-          </a:lnRef>
-          <a:fillRef idx="3">
-            <a:schemeClr val="accent1"/>
-          </a:fillRef>
-          <a:effectRef idx="2">
-            <a:schemeClr val="accent1"/>
-          </a:effectRef>
-          <a:fontRef idx="minor">
-            <a:schemeClr val="lt1"/>
-          </a:fontRef>
-        </p:style>
-        <p:txBody>
-          <a:bodyPr rtlCol="0" anchor="ctr"/>
-          <a:lstStyle/>
-          <a:p>
-            <a:pPr algn="ctr"/>
-          </a:p>
-        </p:txBody>
-      </p:sp>
-      <p:sp>
-        <p:nvSpPr>
-          <p:cNvPr id="13" name="Oval 12"/>
-          <p:cNvSpPr/>
-          <p:nvPr/>
-        </p:nvSpPr>
-        <p:spPr>
-          <a:xfrm>
-            <a:off x="6327648" y="1435608"/>
-            <a:ext cx="457200" cy="457200"/>
-          </a:xfrm>
-          <a:prstGeom prst="ellipse">
-            <a:avLst/>
-          </a:prstGeom>
-          <a:solidFill>
-            <a:srgbClr val="CC0E1E"/>
-          </a:solidFill>
-          <a:ln>
-            <a:noFill/>
-          </a:ln>
-          <a:effectLst/>
-        </p:spPr>
-        <p:style>
-          <a:lnRef idx="1">
-            <a:schemeClr val="accent1"/>
-          </a:lnRef>
-          <a:fillRef idx="3">
-            <a:schemeClr val="accent1"/>
-          </a:fillRef>
-          <a:effectRef idx="2">
-            <a:schemeClr val="accent1"/>
-          </a:effectRef>
-          <a:fontRef idx="minor">
-            <a:schemeClr val="lt1"/>
-          </a:fontRef>
-        </p:style>
-        <p:txBody>
-          <a:bodyPr rtlCol="0" anchor="ctr" lIns="0" rIns="0" tIns="0" bIns="0"/>
-          <a:lstStyle/>
-          <a:p>
-            <a:pPr algn="ctr"/>
-            <a:r>
-              <a:rPr sz="1800" b="1">
-                <a:solidFill>
-                  <a:srgbClr val="FFFFFF"/>
-                </a:solidFill>
-                <a:latin typeface="Calibri"/>
-              </a:rPr>
-              <a:t>2</a:t>
-            </a:r>
-          </a:p>
-        </p:txBody>
-      </p:sp>
-      <p:sp>
-        <p:nvSpPr>
-          <p:cNvPr id="14" name="TextBox 13"/>
-          <p:cNvSpPr txBox="1"/>
-          <p:nvPr/>
-        </p:nvSpPr>
-        <p:spPr>
-          <a:xfrm>
-            <a:off x="6949440" y="1435608"/>
-            <a:ext cx="4480560" cy="411480"/>
-          </a:xfrm>
-          <a:prstGeom prst="rect">
-            <a:avLst/>
-          </a:prstGeom>
-          <a:noFill/>
-        </p:spPr>
-        <p:txBody>
-          <a:bodyPr wrap="square">
-            <a:spAutoFit/>
-          </a:bodyPr>
-          <a:lstStyle/>
-          <a:p>
-            <a:pPr algn="l"/>
-            <a:r>
-              <a:rPr sz="1500" b="1">
-                <a:solidFill>
-                  <a:srgbClr val="1A1A1A"/>
-                </a:solidFill>
-                <a:latin typeface="Calibri"/>
-              </a:rPr>
-              <a:t>Fiscal GPS expense</a:t>
-            </a:r>
-          </a:p>
-        </p:txBody>
-      </p:sp>
-      <p:sp>
-        <p:nvSpPr>
-          <p:cNvPr id="15" name="TextBox 14"/>
-          <p:cNvSpPr txBox="1"/>
-          <p:nvPr/>
-        </p:nvSpPr>
-        <p:spPr>
-          <a:xfrm>
-            <a:off x="6419088" y="2011680"/>
-            <a:ext cx="4937760" cy="2011680"/>
-          </a:xfrm>
-          <a:prstGeom prst="rect">
-            <a:avLst/>
-          </a:prstGeom>
-          <a:noFill/>
-        </p:spPr>
-        <p:txBody>
-          <a:bodyPr wrap="square">
-            <a:spAutoFit/>
-          </a:bodyPr>
-          <a:lstStyle/>
-          <a:p>
-            <a:pPr>
-              <a:lnSpc>
-                <a:spcPct val="115000"/>
-              </a:lnSpc>
-              <a:spcAft>
-                <a:spcPts val="1000"/>
-              </a:spcAft>
-            </a:pPr>
-            <a:r>
-              <a:rPr sz="1250" b="1">
-                <a:solidFill>
-                  <a:srgbClr val="CC0E1E"/>
-                </a:solidFill>
-                <a:latin typeface="Calibri"/>
-              </a:rPr>
-              <a:t>—  </a:t>
-            </a:r>
-            <a:r>
-              <a:rPr sz="1250">
-                <a:solidFill>
-                  <a:srgbClr val="1A1A1A"/>
-                </a:solidFill>
-                <a:latin typeface="Calibri"/>
-              </a:rPr>
-              <a:t>FY24 EUR 225 · FY25 EUR 25,886 · FY26 EUR 102,418.</a:t>
-            </a:r>
-          </a:p>
-          <a:p>
-            <a:pPr>
-              <a:lnSpc>
-                <a:spcPct val="115000"/>
-              </a:lnSpc>
-              <a:spcAft>
-                <a:spcPts val="1000"/>
-              </a:spcAft>
-            </a:pPr>
-            <a:r>
-              <a:rPr sz="1250" b="1">
-                <a:solidFill>
-                  <a:srgbClr val="CC0E1E"/>
-                </a:solidFill>
-                <a:latin typeface="Calibri"/>
-              </a:rPr>
-              <a:t>—  </a:t>
-            </a:r>
-            <a:r>
-              <a:rPr sz="1250">
-                <a:solidFill>
-                  <a:srgbClr val="1A1A1A"/>
-                </a:solidFill>
-                <a:latin typeface="Calibri"/>
-              </a:rPr>
-              <a:t>Source row: AutoWallis.</a:t>
-            </a:r>
-          </a:p>
-          <a:p>
-            <a:pPr>
-              <a:lnSpc>
-                <a:spcPct val="115000"/>
-              </a:lnSpc>
-              <a:spcAft>
-                <a:spcPts val="1000"/>
-              </a:spcAft>
-            </a:pPr>
-            <a:r>
-              <a:rPr sz="1250" b="1">
-                <a:solidFill>
-                  <a:srgbClr val="CC0E1E"/>
-                </a:solidFill>
-                <a:latin typeface="Calibri"/>
-              </a:rPr>
-              <a:t>—  </a:t>
-            </a:r>
-            <a:r>
-              <a:rPr sz="1250">
-                <a:solidFill>
-                  <a:srgbClr val="1A1A1A"/>
-                </a:solidFill>
-                <a:latin typeface="Calibri"/>
-              </a:rPr>
-              <a:t>Ex-warranty GPS = (net − warranty) ÷ frozen CY25 wallet.</a:t>
-            </a:r>
-          </a:p>
-        </p:txBody>
-      </p:sp>
-      <p:sp>
-        <p:nvSpPr>
-          <p:cNvPr id="16" name="TextBox 15"/>
-          <p:cNvSpPr txBox="1"/>
-          <p:nvPr/>
-        </p:nvSpPr>
-        <p:spPr>
-          <a:xfrm>
-            <a:off x="292608" y="4480560"/>
-            <a:ext cx="11430000" cy="1097280"/>
-          </a:xfrm>
-          <a:prstGeom prst="rect">
-            <a:avLst/>
-          </a:prstGeom>
-          <a:noFill/>
-        </p:spPr>
-        <p:txBody>
-          <a:bodyPr wrap="square">
-            <a:spAutoFit/>
-          </a:bodyPr>
-          <a:lstStyle/>
-          <a:p>
-            <a:pPr>
-              <a:lnSpc>
-                <a:spcPct val="125000"/>
-              </a:lnSpc>
-              <a:spcAft>
-                <a:spcPts val="1000"/>
-              </a:spcAft>
-            </a:pPr>
-            <a:r>
-              <a:rPr sz="1300" b="1">
-                <a:solidFill>
-                  <a:srgbClr val="CC0E1E"/>
-                </a:solidFill>
-                <a:latin typeface="Calibri"/>
-              </a:rPr>
-              <a:t>—  </a:t>
-            </a:r>
-            <a:r>
-              <a:rPr sz="1300">
-                <a:solidFill>
-                  <a:srgbClr val="1A1A1A"/>
-                </a:solidFill>
-                <a:latin typeface="Calibri"/>
-              </a:rPr>
-              <a:t>Both numbers are real — never mix them on one slide without labels.</a:t>
-            </a:r>
-          </a:p>
-        </p:txBody>
-      </p:sp>
-    </p:spTree>
-  </p:cSld>
-  <p:clrMapOvr>
-    <a:masterClrMapping/>
-  </p:clrMapOvr>
-</p:sld>
-</file>
-
-<file path=ppt/slides/slide33.xml><?xml version="1.0" encoding="utf-8"?>
-<p:sld xmlns:a="http://schemas.openxmlformats.org/drawingml/2006/main" xmlns:p="http://schemas.openxmlformats.org/presentationml/2006/main" xmlns:r="http://schemas.openxmlformats.org/officeDocument/2006/relationships">
-  <p:cSld>
-    <p:bg>
-      <p:bgPr>
-        <a:solidFill>
-          <a:srgbClr val="FFFFFF"/>
-        </a:solidFill>
-        <a:effectLst/>
-      </p:bgPr>
-    </p:bg>
-    <p:spTree>
-      <p:nvGrpSpPr>
-        <p:cNvPr id="1" name=""/>
-        <p:cNvGrpSpPr/>
-        <p:nvPr/>
-      </p:nvGrpSpPr>
-      <p:grpSpPr/>
-      <p:pic>
-        <p:nvPicPr>
-          <p:cNvPr id="2" name="Picture 1" descr="image.png"/>
-          <p:cNvPicPr>
-            <a:picLocks noChangeAspect="1"/>
-          </p:cNvPicPr>
-          <p:nvPr/>
-        </p:nvPicPr>
-        <p:blipFill>
-          <a:blip r:embed="rId2"/>
-          <a:stretch>
-            <a:fillRect/>
-          </a:stretch>
-        </p:blipFill>
-        <p:spPr>
-          <a:xfrm>
-            <a:off x="256032" y="6263640"/>
-            <a:ext cx="1679787" cy="292608"/>
-          </a:xfrm>
-          <a:prstGeom prst="rect">
-            <a:avLst/>
-          </a:prstGeom>
-        </p:spPr>
-      </p:pic>
-      <p:sp>
-        <p:nvSpPr>
-          <p:cNvPr id="3" name="Rectangle 2"/>
-          <p:cNvSpPr/>
-          <p:nvPr/>
-        </p:nvSpPr>
-        <p:spPr>
-          <a:xfrm>
-            <a:off x="0" y="6766560"/>
-            <a:ext cx="12188952" cy="91440"/>
-          </a:xfrm>
-          <a:prstGeom prst="rect">
-            <a:avLst/>
-          </a:prstGeom>
-          <a:solidFill>
-            <a:srgbClr val="CC0E1E"/>
-          </a:solidFill>
-          <a:ln>
-            <a:noFill/>
-          </a:ln>
-        </p:spPr>
-        <p:style>
-          <a:lnRef idx="1">
-            <a:schemeClr val="accent1"/>
-          </a:lnRef>
-          <a:fillRef idx="3">
-            <a:schemeClr val="accent1"/>
-          </a:fillRef>
-          <a:effectRef idx="2">
-            <a:schemeClr val="accent1"/>
-          </a:effectRef>
-          <a:fontRef idx="minor">
-            <a:schemeClr val="lt1"/>
-          </a:fontRef>
-        </p:style>
-        <p:txBody>
-          <a:bodyPr rtlCol="0" anchor="ctr"/>
-          <a:lstStyle/>
-          <a:p>
-            <a:pPr algn="ctr"/>
-          </a:p>
-        </p:txBody>
-      </p:sp>
-      <p:sp>
-        <p:nvSpPr>
-          <p:cNvPr id="4" name="TextBox 3"/>
-          <p:cNvSpPr txBox="1"/>
-          <p:nvPr/>
-        </p:nvSpPr>
-        <p:spPr>
-          <a:xfrm>
-            <a:off x="292608" y="201168"/>
-            <a:ext cx="11430000" cy="274320"/>
-          </a:xfrm>
-          <a:prstGeom prst="rect">
-            <a:avLst/>
-          </a:prstGeom>
-          <a:noFill/>
-        </p:spPr>
-        <p:txBody>
-          <a:bodyPr wrap="square">
-            <a:spAutoFit/>
-          </a:bodyPr>
-          <a:lstStyle/>
-          <a:p>
-            <a:pPr algn="l"/>
-            <a:r>
-              <a:rPr sz="1100" b="1">
-                <a:solidFill>
-                  <a:srgbClr val="CC0E1E"/>
-                </a:solidFill>
-                <a:latin typeface="Calibri"/>
-              </a:rPr>
-              <a:t>BRIDGE</a:t>
-            </a:r>
-          </a:p>
-        </p:txBody>
-      </p:sp>
-      <p:sp>
-        <p:nvSpPr>
-          <p:cNvPr id="5" name="TextBox 4"/>
-          <p:cNvSpPr txBox="1"/>
-          <p:nvPr/>
-        </p:nvSpPr>
-        <p:spPr>
-          <a:xfrm>
-            <a:off x="292608" y="475488"/>
-            <a:ext cx="11612880" cy="566928"/>
-          </a:xfrm>
-          <a:prstGeom prst="rect">
-            <a:avLst/>
-          </a:prstGeom>
-          <a:noFill/>
-        </p:spPr>
-        <p:txBody>
-          <a:bodyPr wrap="square">
-            <a:spAutoFit/>
-          </a:bodyPr>
-          <a:lstStyle/>
-          <a:p>
-            <a:pPr algn="l"/>
-            <a:r>
-              <a:rPr sz="2500" b="1">
-                <a:solidFill>
-                  <a:srgbClr val="1A1A1A"/>
-                </a:solidFill>
-                <a:latin typeface="Calibri"/>
-              </a:rPr>
-              <a:t>How to use this in the meeting</a:t>
-            </a:r>
-          </a:p>
-        </p:txBody>
-      </p:sp>
-      <p:sp>
-        <p:nvSpPr>
-          <p:cNvPr id="6" name="Rectangle 5"/>
-          <p:cNvSpPr/>
-          <p:nvPr/>
-        </p:nvSpPr>
-        <p:spPr>
-          <a:xfrm>
-            <a:off x="292608" y="1005840"/>
-            <a:ext cx="11612880" cy="28000"/>
-          </a:xfrm>
-          <a:prstGeom prst="rect">
-            <a:avLst/>
-          </a:prstGeom>
-          <a:solidFill>
-            <a:srgbClr val="CC0E1E"/>
-          </a:solidFill>
-          <a:ln>
-            <a:noFill/>
-          </a:ln>
-        </p:spPr>
-        <p:style>
-          <a:lnRef idx="1">
-            <a:schemeClr val="accent1"/>
-          </a:lnRef>
-          <a:fillRef idx="3">
-            <a:schemeClr val="accent1"/>
-          </a:fillRef>
-          <a:effectRef idx="2">
-            <a:schemeClr val="accent1"/>
-          </a:effectRef>
-          <a:fontRef idx="minor">
-            <a:schemeClr val="lt1"/>
-          </a:fontRef>
-        </p:style>
-        <p:txBody>
-          <a:bodyPr rtlCol="0" anchor="ctr"/>
-          <a:lstStyle/>
-          <a:p>
-            <a:pPr algn="ctr"/>
-          </a:p>
-        </p:txBody>
-      </p:sp>
-      <p:sp>
-        <p:nvSpPr>
-          <p:cNvPr id="7" name="TextBox 6"/>
-          <p:cNvSpPr txBox="1"/>
-          <p:nvPr/>
-        </p:nvSpPr>
-        <p:spPr>
-          <a:xfrm>
-            <a:off x="11594592" y="6473952"/>
-            <a:ext cx="365760" cy="274320"/>
-          </a:xfrm>
-          <a:prstGeom prst="rect">
-            <a:avLst/>
-          </a:prstGeom>
-          <a:noFill/>
-        </p:spPr>
-        <p:txBody>
-          <a:bodyPr wrap="square">
-            <a:spAutoFit/>
-          </a:bodyPr>
-          <a:lstStyle/>
-          <a:p>
-            <a:pPr algn="r"/>
-            <a:r>
-              <a:rPr sz="1000" b="0">
-                <a:solidFill>
-                  <a:srgbClr val="5A5A5A"/>
-                </a:solidFill>
-                <a:latin typeface="Calibri"/>
-              </a:rPr>
-              <a:t>33</a:t>
             </a:r>
           </a:p>
         </p:txBody>
@@ -18945,7 +18796,7 @@
 </p:sld>
 </file>
 
-<file path=ppt/slides/slide34.xml><?xml version="1.0" encoding="utf-8"?>
+<file path=ppt/slides/slide33.xml><?xml version="1.0" encoding="utf-8"?>
 <p:sld xmlns:a="http://schemas.openxmlformats.org/drawingml/2006/main" xmlns:p="http://schemas.openxmlformats.org/presentationml/2006/main" xmlns:r="http://schemas.openxmlformats.org/officeDocument/2006/relationships">
   <p:cSld>
     <p:bg>
@@ -23274,7 +23125,7 @@
                 </a:solidFill>
                 <a:latin typeface="Calibri"/>
               </a:rPr>
-              <a:t>SALES-TO-DEALER</a:t>
+              <a:t>FY2027 EXTENDED TARGET</a:t>
             </a:r>
           </a:p>
         </p:txBody>
@@ -23309,7 +23160,7 @@
                 </a:solidFill>
                 <a:latin typeface="Calibri"/>
               </a:rPr>
-              <a:t>Sales-to-Dealer outlook — FY2027</a:t>
+              <a:t>FY2027 Extended Target: EUR 366,166</a:t>
             </a:r>
           </a:p>
         </p:txBody>
@@ -23401,7 +23252,7 @@
         <p:spPr>
           <a:xfrm>
             <a:off x="292608" y="1234440"/>
-            <a:ext cx="10881360" cy="3840480"/>
+            <a:ext cx="10881360" cy="4023360"/>
           </a:xfrm>
           <a:prstGeom prst="rect">
             <a:avLst/>
@@ -23438,7 +23289,7 @@
                 </a:solidFill>
                 <a:latin typeface="Calibri"/>
               </a:rPr>
-              <a:t>FY2026 Sales-to-Dealer is EUR 532,687 (working estimate).</a:t>
+              <a:t>FY2026 ISZE billing was EUR 346,246. The FY2027 base plan is EUR 349,600, plus a 1.8% stretch (EUR 16,566) — EUR 366,166 in total, +5.8% versus FY2026.</a:t>
             </a:r>
           </a:p>
           <a:p>
@@ -23466,7 +23317,7 @@
                 </a:solidFill>
                 <a:latin typeface="Calibri"/>
               </a:rPr>
-              <a:t>The working fleet movement into FY2027 is -2.4%.</a:t>
+              <a:t>That stretch lifts your GPS share of fleet potential from 38.0% to 39.8%.</a:t>
             </a:r>
           </a:p>
           <a:p>
@@ -23494,7 +23345,7 @@
                 </a:solidFill>
                 <a:latin typeface="Calibri"/>
               </a:rPr>
-              <a:t>Applying fleet movement, the 5% price adjustment and 1.8% additional growth gives a FY2027 Sales-to-Dealer target of EUR 555,817.</a:t>
+              <a:t>This is the ISZE→AutoWallis commercial target — separate from what you sell on to your own dealers.</a:t>
             </a:r>
           </a:p>
           <a:p>
@@ -23522,7 +23373,7 @@
                 </a:solidFill>
                 <a:latin typeface="Calibri"/>
               </a:rPr>
-              <a:t>The discussion is held in Sales-to-Dealer amounts; ISZE billing remains an internal reconciliation measure.</a:t>
+              <a:t>ISZE management has submitted a financial incentive tied to reaching this stretch target for FY2027 — not yet approved by Japan. We'll confirm as soon as that's through.</a:t>
             </a:r>
           </a:p>
         </p:txBody>
